--- a/His Mercy is More.pptx
+++ b/His Mercy is More.pptx
@@ -6,19 +6,20 @@
   </p:sldMasterIdLst>
   <p:sldIdLst>
     <p:sldId id="257" r:id="rId2"/>
-    <p:sldId id="260" r:id="rId3"/>
-    <p:sldId id="261" r:id="rId4"/>
-    <p:sldId id="259" r:id="rId5"/>
-    <p:sldId id="262" r:id="rId6"/>
-    <p:sldId id="263" r:id="rId7"/>
-    <p:sldId id="265" r:id="rId8"/>
-    <p:sldId id="264" r:id="rId9"/>
-    <p:sldId id="266" r:id="rId10"/>
-    <p:sldId id="267" r:id="rId11"/>
-    <p:sldId id="268" r:id="rId12"/>
-    <p:sldId id="271" r:id="rId13"/>
-    <p:sldId id="269" r:id="rId14"/>
-    <p:sldId id="270" r:id="rId15"/>
+    <p:sldId id="272" r:id="rId3"/>
+    <p:sldId id="260" r:id="rId4"/>
+    <p:sldId id="261" r:id="rId5"/>
+    <p:sldId id="259" r:id="rId6"/>
+    <p:sldId id="262" r:id="rId7"/>
+    <p:sldId id="263" r:id="rId8"/>
+    <p:sldId id="265" r:id="rId9"/>
+    <p:sldId id="264" r:id="rId10"/>
+    <p:sldId id="266" r:id="rId11"/>
+    <p:sldId id="267" r:id="rId12"/>
+    <p:sldId id="268" r:id="rId13"/>
+    <p:sldId id="271" r:id="rId14"/>
+    <p:sldId id="269" r:id="rId15"/>
+    <p:sldId id="270" r:id="rId16"/>
   </p:sldIdLst>
   <p:sldSz cx="12192000" cy="6858000"/>
   <p:notesSz cx="6858000" cy="9144000"/>
@@ -117,6 +118,11 @@
       </a:defRPr>
     </a:lvl9pPr>
   </p:defaultTextStyle>
+  <p:extLst>
+    <p:ext uri="{EFAFB233-063F-42B5-8137-9DF3F51BA10A}">
+      <p15:sldGuideLst xmlns:p15="http://schemas.microsoft.com/office/powerpoint/2012/main"/>
+    </p:ext>
+  </p:extLst>
 </p:presentation>
 </file>
 
@@ -267,7 +273,7 @@
           <a:p>
             <a:fld id="{E759A0DE-F190-5444-87AC-4719D5F20D15}" type="datetimeFigureOut">
               <a:rPr lang="en-US" smtClean="0"/>
-              <a:t>11/11/25</a:t>
+              <a:t>11/15/25</a:t>
             </a:fld>
             <a:endParaRPr lang="en-US"/>
           </a:p>
@@ -465,7 +471,7 @@
           <a:p>
             <a:fld id="{E759A0DE-F190-5444-87AC-4719D5F20D15}" type="datetimeFigureOut">
               <a:rPr lang="en-US" smtClean="0"/>
-              <a:t>11/11/25</a:t>
+              <a:t>11/15/25</a:t>
             </a:fld>
             <a:endParaRPr lang="en-US"/>
           </a:p>
@@ -673,7 +679,7 @@
           <a:p>
             <a:fld id="{E759A0DE-F190-5444-87AC-4719D5F20D15}" type="datetimeFigureOut">
               <a:rPr lang="en-US" smtClean="0"/>
-              <a:t>11/11/25</a:t>
+              <a:t>11/15/25</a:t>
             </a:fld>
             <a:endParaRPr lang="en-US"/>
           </a:p>
@@ -871,7 +877,7 @@
           <a:p>
             <a:fld id="{E759A0DE-F190-5444-87AC-4719D5F20D15}" type="datetimeFigureOut">
               <a:rPr lang="en-US" smtClean="0"/>
-              <a:t>11/11/25</a:t>
+              <a:t>11/15/25</a:t>
             </a:fld>
             <a:endParaRPr lang="en-US"/>
           </a:p>
@@ -1146,7 +1152,7 @@
           <a:p>
             <a:fld id="{E759A0DE-F190-5444-87AC-4719D5F20D15}" type="datetimeFigureOut">
               <a:rPr lang="en-US" smtClean="0"/>
-              <a:t>11/11/25</a:t>
+              <a:t>11/15/25</a:t>
             </a:fld>
             <a:endParaRPr lang="en-US"/>
           </a:p>
@@ -1411,7 +1417,7 @@
           <a:p>
             <a:fld id="{E759A0DE-F190-5444-87AC-4719D5F20D15}" type="datetimeFigureOut">
               <a:rPr lang="en-US" smtClean="0"/>
-              <a:t>11/11/25</a:t>
+              <a:t>11/15/25</a:t>
             </a:fld>
             <a:endParaRPr lang="en-US"/>
           </a:p>
@@ -1823,7 +1829,7 @@
           <a:p>
             <a:fld id="{E759A0DE-F190-5444-87AC-4719D5F20D15}" type="datetimeFigureOut">
               <a:rPr lang="en-US" smtClean="0"/>
-              <a:t>11/11/25</a:t>
+              <a:t>11/15/25</a:t>
             </a:fld>
             <a:endParaRPr lang="en-US"/>
           </a:p>
@@ -1964,7 +1970,7 @@
           <a:p>
             <a:fld id="{E759A0DE-F190-5444-87AC-4719D5F20D15}" type="datetimeFigureOut">
               <a:rPr lang="en-US" smtClean="0"/>
-              <a:t>11/11/25</a:t>
+              <a:t>11/15/25</a:t>
             </a:fld>
             <a:endParaRPr lang="en-US"/>
           </a:p>
@@ -2077,7 +2083,7 @@
           <a:p>
             <a:fld id="{E759A0DE-F190-5444-87AC-4719D5F20D15}" type="datetimeFigureOut">
               <a:rPr lang="en-US" smtClean="0"/>
-              <a:t>11/11/25</a:t>
+              <a:t>11/15/25</a:t>
             </a:fld>
             <a:endParaRPr lang="en-US"/>
           </a:p>
@@ -2388,7 +2394,7 @@
           <a:p>
             <a:fld id="{E759A0DE-F190-5444-87AC-4719D5F20D15}" type="datetimeFigureOut">
               <a:rPr lang="en-US" smtClean="0"/>
-              <a:t>11/11/25</a:t>
+              <a:t>11/15/25</a:t>
             </a:fld>
             <a:endParaRPr lang="en-US"/>
           </a:p>
@@ -2676,7 +2682,7 @@
           <a:p>
             <a:fld id="{E759A0DE-F190-5444-87AC-4719D5F20D15}" type="datetimeFigureOut">
               <a:rPr lang="en-US" smtClean="0"/>
-              <a:t>11/11/25</a:t>
+              <a:t>11/15/25</a:t>
             </a:fld>
             <a:endParaRPr lang="en-US"/>
           </a:p>
@@ -2917,7 +2923,7 @@
           <a:p>
             <a:fld id="{E759A0DE-F190-5444-87AC-4719D5F20D15}" type="datetimeFigureOut">
               <a:rPr lang="en-US" smtClean="0"/>
-              <a:t>11/11/25</a:t>
+              <a:t>11/15/25</a:t>
             </a:fld>
             <a:endParaRPr lang="en-US"/>
           </a:p>
@@ -3323,7 +3329,7 @@
     <p:bg>
       <p:bgPr>
         <a:solidFill>
-          <a:srgbClr val="7030A0"/>
+          <a:schemeClr val="bg1"/>
         </a:solidFill>
         <a:effectLst/>
       </p:bgPr>
@@ -3348,123 +3354,387 @@
           <a:chExt cx="0" cy="0"/>
         </a:xfrm>
       </p:grpSpPr>
-      <p:sp>
-        <p:nvSpPr>
-          <p:cNvPr id="3" name="Subtitle 2">
-            <a:extLst>
-              <a:ext uri="{FF2B5EF4-FFF2-40B4-BE49-F238E27FC236}">
-                <a16:creationId xmlns:a16="http://schemas.microsoft.com/office/drawing/2014/main" id="{9D925259-27FF-FECE-3C92-C339F33447E1}"/>
-              </a:ext>
-            </a:extLst>
-          </p:cNvPr>
-          <p:cNvSpPr>
-            <a:spLocks noGrp="1"/>
-          </p:cNvSpPr>
-          <p:nvPr>
-            <p:ph type="subTitle" idx="1"/>
+      <p:sp useBgFill="1">
+        <p:nvSpPr>
+          <p:cNvPr id="9" name="Rectangle 8">
+            <a:extLst>
+              <a:ext uri="{FF2B5EF4-FFF2-40B4-BE49-F238E27FC236}">
+                <a16:creationId xmlns:a16="http://schemas.microsoft.com/office/drawing/2014/main" id="{E91DC736-0EF8-4F87-9146-EBF1D2EE4D3D}"/>
+              </a:ext>
+              <a:ext uri="{C183D7F6-B498-43B3-948B-1728B52AA6E4}">
+                <adec:decorative xmlns:adec="http://schemas.microsoft.com/office/drawing/2017/decorative" val="1"/>
+              </a:ext>
+            </a:extLst>
+          </p:cNvPr>
+          <p:cNvSpPr>
+            <a:spLocks noGrp="1" noRot="1" noChangeAspect="1" noMove="1" noResize="1" noEditPoints="1" noAdjustHandles="1" noChangeArrowheads="1" noChangeShapeType="1" noTextEdit="1"/>
+          </p:cNvSpPr>
+          <p:nvPr>
+            <p:extLst>
+              <p:ext uri="{386F3935-93C4-4BCD-93E2-E3B085C9AB24}">
+                <p16:designElem xmlns:p16="http://schemas.microsoft.com/office/powerpoint/2015/main" val="1"/>
+              </p:ext>
+            </p:extLst>
           </p:nvPr>
         </p:nvSpPr>
         <p:spPr>
           <a:xfrm>
-            <a:off x="682831" y="497702"/>
-            <a:ext cx="10826338" cy="5862596"/>
+            <a:off x="0" y="0"/>
+            <a:ext cx="12192000" cy="6858000"/>
+          </a:xfrm>
+          <a:prstGeom prst="rect">
+            <a:avLst/>
+          </a:prstGeom>
+          <a:ln>
+            <a:noFill/>
+          </a:ln>
+        </p:spPr>
+        <p:style>
+          <a:lnRef idx="2">
+            <a:schemeClr val="accent1">
+              <a:shade val="50000"/>
+            </a:schemeClr>
+          </a:lnRef>
+          <a:fillRef idx="1">
+            <a:schemeClr val="accent1"/>
+          </a:fillRef>
+          <a:effectRef idx="0">
+            <a:schemeClr val="accent1"/>
+          </a:effectRef>
+          <a:fontRef idx="minor">
+            <a:schemeClr val="lt1"/>
+          </a:fontRef>
+        </p:style>
+        <p:txBody>
+          <a:bodyPr rtlCol="0" anchor="ctr"/>
+          <a:lstStyle/>
+          <a:p>
+            <a:pPr algn="ctr"/>
+            <a:endParaRPr lang="en-US"/>
+          </a:p>
+        </p:txBody>
+      </p:sp>
+      <p:pic>
+        <p:nvPicPr>
+          <p:cNvPr id="4" name="Picture 3" descr="A mountain range reflected in a lake&#10;&#10;AI-generated content may be incorrect.">
+            <a:extLst>
+              <a:ext uri="{FF2B5EF4-FFF2-40B4-BE49-F238E27FC236}">
+                <a16:creationId xmlns:a16="http://schemas.microsoft.com/office/drawing/2014/main" id="{98BA084F-0CF8-8D13-165C-DA40FA2749B1}"/>
+              </a:ext>
+            </a:extLst>
+          </p:cNvPr>
+          <p:cNvPicPr>
+            <a:picLocks noChangeAspect="1"/>
+          </p:cNvPicPr>
+          <p:nvPr/>
+        </p:nvPicPr>
+        <p:blipFill>
+          <a:blip r:embed="rId2"/>
+          <a:srcRect l="11719" r="17612" b="9091"/>
+          <a:stretch>
+            <a:fillRect/>
+          </a:stretch>
+        </p:blipFill>
+        <p:spPr>
+          <a:xfrm>
+            <a:off x="3523488" y="10"/>
+            <a:ext cx="8668512" cy="6857990"/>
+          </a:xfrm>
+          <a:prstGeom prst="rect">
+            <a:avLst/>
+          </a:prstGeom>
+        </p:spPr>
+      </p:pic>
+      <p:sp>
+        <p:nvSpPr>
+          <p:cNvPr id="11" name="Rectangle 10">
+            <a:extLst>
+              <a:ext uri="{FF2B5EF4-FFF2-40B4-BE49-F238E27FC236}">
+                <a16:creationId xmlns:a16="http://schemas.microsoft.com/office/drawing/2014/main" id="{097CD68E-23E3-4007-8847-CD0944C4F7BE}"/>
+              </a:ext>
+              <a:ext uri="{C183D7F6-B498-43B3-948B-1728B52AA6E4}">
+                <adec:decorative xmlns:adec="http://schemas.microsoft.com/office/drawing/2017/decorative" val="1"/>
+              </a:ext>
+            </a:extLst>
+          </p:cNvPr>
+          <p:cNvSpPr>
+            <a:spLocks noGrp="1" noRot="1" noChangeAspect="1" noMove="1" noResize="1" noEditPoints="1" noAdjustHandles="1" noChangeArrowheads="1" noChangeShapeType="1" noTextEdit="1"/>
+          </p:cNvSpPr>
+          <p:nvPr>
+            <p:extLst>
+              <p:ext uri="{386F3935-93C4-4BCD-93E2-E3B085C9AB24}">
+                <p16:designElem xmlns:p16="http://schemas.microsoft.com/office/powerpoint/2015/main" val="1"/>
+              </p:ext>
+            </p:extLst>
+          </p:nvPr>
+        </p:nvSpPr>
+        <p:spPr>
+          <a:xfrm>
+            <a:off x="0" y="0"/>
+            <a:ext cx="9756601" cy="6858000"/>
+          </a:xfrm>
+          <a:prstGeom prst="rect">
+            <a:avLst/>
+          </a:prstGeom>
+          <a:gradFill>
+            <a:gsLst>
+              <a:gs pos="58000">
+                <a:schemeClr val="bg1"/>
+              </a:gs>
+              <a:gs pos="35000">
+                <a:schemeClr val="bg1">
+                  <a:alpha val="79000"/>
+                </a:schemeClr>
+              </a:gs>
+              <a:gs pos="19000">
+                <a:schemeClr val="bg1">
+                  <a:alpha val="38000"/>
+                </a:schemeClr>
+              </a:gs>
+              <a:gs pos="0">
+                <a:schemeClr val="bg1">
+                  <a:alpha val="0"/>
+                </a:schemeClr>
+              </a:gs>
+              <a:gs pos="100000">
+                <a:schemeClr val="bg1"/>
+              </a:gs>
+            </a:gsLst>
+            <a:lin ang="10800000" scaled="0"/>
+          </a:gradFill>
+          <a:ln>
+            <a:noFill/>
+          </a:ln>
+        </p:spPr>
+        <p:style>
+          <a:lnRef idx="2">
+            <a:schemeClr val="accent1">
+              <a:shade val="50000"/>
+            </a:schemeClr>
+          </a:lnRef>
+          <a:fillRef idx="1">
+            <a:schemeClr val="accent1"/>
+          </a:fillRef>
+          <a:effectRef idx="0">
+            <a:schemeClr val="accent1"/>
+          </a:effectRef>
+          <a:fontRef idx="minor">
+            <a:schemeClr val="lt1"/>
+          </a:fontRef>
+        </p:style>
+        <p:txBody>
+          <a:bodyPr rtlCol="0" anchor="ctr"/>
+          <a:lstStyle/>
+          <a:p>
+            <a:pPr algn="ctr"/>
+            <a:endParaRPr lang="en-US" dirty="0"/>
+          </a:p>
+        </p:txBody>
+      </p:sp>
+      <p:sp>
+        <p:nvSpPr>
+          <p:cNvPr id="3" name="Subtitle 2">
+            <a:extLst>
+              <a:ext uri="{FF2B5EF4-FFF2-40B4-BE49-F238E27FC236}">
+                <a16:creationId xmlns:a16="http://schemas.microsoft.com/office/drawing/2014/main" id="{9D925259-27FF-FECE-3C92-C339F33447E1}"/>
+              </a:ext>
+            </a:extLst>
+          </p:cNvPr>
+          <p:cNvSpPr>
+            <a:spLocks noGrp="1"/>
+          </p:cNvSpPr>
+          <p:nvPr>
+            <p:ph type="subTitle" idx="1"/>
+          </p:nvPr>
+        </p:nvSpPr>
+        <p:spPr>
+          <a:xfrm>
+            <a:off x="477980" y="4872922"/>
+            <a:ext cx="4497781" cy="1208141"/>
           </a:xfrm>
         </p:spPr>
         <p:txBody>
           <a:bodyPr>
-            <a:noAutofit/>
+            <a:normAutofit/>
           </a:bodyPr>
           <a:lstStyle/>
           <a:p>
-            <a:endParaRPr lang="en-US" sz="4400" dirty="0">
-              <a:solidFill>
-                <a:schemeClr val="bg1"/>
-              </a:solidFill>
+            <a:pPr algn="l"/>
+            <a:endParaRPr lang="en-US" sz="2000" dirty="0">
               <a:latin typeface="Avenir Medium" panose="02000503020000020003" pitchFamily="2" charset="0"/>
               <a:ea typeface="Bodoni Ornaments" pitchFamily="2" charset="0"/>
             </a:endParaRPr>
           </a:p>
           <a:p>
-            <a:r>
-              <a:rPr lang="en-US" sz="4400" dirty="0">
-                <a:solidFill>
-                  <a:schemeClr val="bg1"/>
-                </a:solidFill>
-                <a:latin typeface="Avenir Medium" panose="02000503020000020003" pitchFamily="2" charset="0"/>
+            <a:pPr algn="l"/>
+            <a:r>
+              <a:rPr lang="en-US" sz="4000" i="1" dirty="0">
+                <a:latin typeface="Avenir Oblique" panose="02000503020000020003" pitchFamily="2" charset="0"/>
                 <a:ea typeface="Bodoni Ornaments" pitchFamily="2" charset="0"/>
               </a:rPr>
-              <a:t>Praise the Lord, </a:t>
-            </a:r>
-            <a:br>
-              <a:rPr lang="en-US" sz="4400" dirty="0">
-                <a:solidFill>
-                  <a:schemeClr val="bg1"/>
-                </a:solidFill>
-                <a:latin typeface="Avenir Medium" panose="02000503020000020003" pitchFamily="2" charset="0"/>
-                <a:ea typeface="Bodoni Ornaments" pitchFamily="2" charset="0"/>
-              </a:rPr>
-            </a:br>
-            <a:endParaRPr lang="en-US" sz="4400" dirty="0">
+              <a:t>His Mercy is More</a:t>
+            </a:r>
+          </a:p>
+        </p:txBody>
+      </p:sp>
+      <p:sp>
+        <p:nvSpPr>
+          <p:cNvPr id="13" name="Rectangle 12">
+            <a:extLst>
+              <a:ext uri="{FF2B5EF4-FFF2-40B4-BE49-F238E27FC236}">
+                <a16:creationId xmlns:a16="http://schemas.microsoft.com/office/drawing/2014/main" id="{AF2F604E-43BE-4DC3-B983-E071523364F8}"/>
+              </a:ext>
+              <a:ext uri="{C183D7F6-B498-43B3-948B-1728B52AA6E4}">
+                <adec:decorative xmlns:adec="http://schemas.microsoft.com/office/drawing/2017/decorative" val="1"/>
+              </a:ext>
+            </a:extLst>
+          </p:cNvPr>
+          <p:cNvSpPr>
+            <a:spLocks noGrp="1" noRot="1" noChangeAspect="1" noMove="1" noResize="1" noEditPoints="1" noAdjustHandles="1" noChangeArrowheads="1" noChangeShapeType="1" noTextEdit="1"/>
+          </p:cNvSpPr>
+          <p:nvPr>
+            <p:extLst>
+              <p:ext uri="{386F3935-93C4-4BCD-93E2-E3B085C9AB24}">
+                <p16:designElem xmlns:p16="http://schemas.microsoft.com/office/powerpoint/2015/main" val="1"/>
+              </p:ext>
+            </p:extLst>
+          </p:nvPr>
+        </p:nvSpPr>
+        <p:spPr>
+          <a:xfrm rot="5400000">
+            <a:off x="759921" y="346791"/>
+            <a:ext cx="146304" cy="704088"/>
+          </a:xfrm>
+          <a:prstGeom prst="rect">
+            <a:avLst/>
+          </a:prstGeom>
+          <a:solidFill>
+            <a:schemeClr val="accent2"/>
+          </a:solidFill>
+          <a:ln>
+            <a:noFill/>
+          </a:ln>
+        </p:spPr>
+        <p:style>
+          <a:lnRef idx="2">
+            <a:schemeClr val="accent1">
+              <a:shade val="50000"/>
+            </a:schemeClr>
+          </a:lnRef>
+          <a:fillRef idx="1">
+            <a:schemeClr val="accent1"/>
+          </a:fillRef>
+          <a:effectRef idx="0">
+            <a:schemeClr val="accent1"/>
+          </a:effectRef>
+          <a:fontRef idx="minor">
+            <a:schemeClr val="lt1"/>
+          </a:fontRef>
+        </p:style>
+        <p:txBody>
+          <a:bodyPr rtlCol="0" anchor="ctr"/>
+          <a:lstStyle/>
+          <a:p>
+            <a:pPr algn="ctr"/>
+            <a:endParaRPr lang="en-US">
               <a:solidFill>
-                <a:schemeClr val="bg1"/>
+                <a:prstClr val="white"/>
               </a:solidFill>
-              <a:latin typeface="Avenir Medium" panose="02000503020000020003" pitchFamily="2" charset="0"/>
-              <a:ea typeface="Bodoni Ornaments" pitchFamily="2" charset="0"/>
+              <a:latin typeface="Calibri" panose="020F0502020204030204"/>
             </a:endParaRPr>
           </a:p>
-          <a:p>
-            <a:r>
-              <a:rPr lang="en-US" sz="4400" dirty="0">
-                <a:solidFill>
-                  <a:schemeClr val="bg1"/>
-                </a:solidFill>
-                <a:latin typeface="Avenir Medium" panose="02000503020000020003" pitchFamily="2" charset="0"/>
-                <a:ea typeface="Bodoni Ornaments" pitchFamily="2" charset="0"/>
-              </a:rPr>
-              <a:t>His mercy is more</a:t>
-            </a:r>
-          </a:p>
-          <a:p>
-            <a:endParaRPr lang="en-US" sz="4400" dirty="0">
+        </p:txBody>
+      </p:sp>
+      <p:sp>
+        <p:nvSpPr>
+          <p:cNvPr id="15" name="Rectangle 14">
+            <a:extLst>
+              <a:ext uri="{FF2B5EF4-FFF2-40B4-BE49-F238E27FC236}">
+                <a16:creationId xmlns:a16="http://schemas.microsoft.com/office/drawing/2014/main" id="{08C9B587-E65E-4B52-B37C-ABEBB6E87928}"/>
+              </a:ext>
+              <a:ext uri="{C183D7F6-B498-43B3-948B-1728B52AA6E4}">
+                <adec:decorative xmlns:adec="http://schemas.microsoft.com/office/drawing/2017/decorative" val="1"/>
+              </a:ext>
+            </a:extLst>
+          </p:cNvPr>
+          <p:cNvSpPr>
+            <a:spLocks noGrp="1" noRot="1" noChangeAspect="1" noMove="1" noResize="1" noEditPoints="1" noAdjustHandles="1" noChangeArrowheads="1" noChangeShapeType="1" noTextEdit="1"/>
+          </p:cNvSpPr>
+          <p:nvPr>
+            <p:extLst>
+              <p:ext uri="{386F3935-93C4-4BCD-93E2-E3B085C9AB24}">
+                <p16:designElem xmlns:p16="http://schemas.microsoft.com/office/powerpoint/2015/main" val="1"/>
+              </p:ext>
+            </p:extLst>
+          </p:nvPr>
+        </p:nvSpPr>
+        <p:spPr>
+          <a:xfrm>
+            <a:off x="481029" y="4546920"/>
+            <a:ext cx="3977640" cy="18288"/>
+          </a:xfrm>
+          <a:prstGeom prst="rect">
+            <a:avLst/>
+          </a:prstGeom>
+          <a:solidFill>
+            <a:srgbClr val="D5D5D5"/>
+          </a:solidFill>
+          <a:ln w="3175">
+            <a:noFill/>
+          </a:ln>
+          <a:effectLst/>
+        </p:spPr>
+        <p:style>
+          <a:lnRef idx="2">
+            <a:schemeClr val="accent1">
+              <a:shade val="50000"/>
+            </a:schemeClr>
+          </a:lnRef>
+          <a:fillRef idx="1">
+            <a:schemeClr val="accent1"/>
+          </a:fillRef>
+          <a:effectRef idx="0">
+            <a:schemeClr val="accent1"/>
+          </a:effectRef>
+          <a:fontRef idx="minor">
+            <a:schemeClr val="lt1"/>
+          </a:fontRef>
+        </p:style>
+        <p:txBody>
+          <a:bodyPr rtlCol="0" anchor="ctr"/>
+          <a:lstStyle/>
+          <a:p>
+            <a:pPr marL="0" marR="0" lvl="0" indent="0" algn="ctr" defTabSz="914400" rtl="0" eaLnBrk="1" fontAlgn="auto" latinLnBrk="0" hangingPunct="1">
+              <a:lnSpc>
+                <a:spcPct val="100000"/>
+              </a:lnSpc>
+              <a:spcBef>
+                <a:spcPts val="0"/>
+              </a:spcBef>
+              <a:spcAft>
+                <a:spcPts val="0"/>
+              </a:spcAft>
+              <a:buClrTx/>
+              <a:buSzTx/>
+              <a:buFontTx/>
+              <a:buNone/>
+              <a:tabLst/>
+              <a:defRPr/>
+            </a:pPr>
+            <a:endParaRPr kumimoji="0" lang="en-US" sz="1800" b="0" i="0" u="none" strike="noStrike" kern="1200" cap="none" spc="0" normalizeH="0" baseline="0" noProof="0">
+              <a:ln>
+                <a:noFill/>
+              </a:ln>
               <a:solidFill>
-                <a:schemeClr val="bg1"/>
+                <a:prstClr val="white"/>
               </a:solidFill>
-              <a:latin typeface="Avenir Medium" panose="02000503020000020003" pitchFamily="2" charset="0"/>
-              <a:ea typeface="Bodoni Ornaments" pitchFamily="2" charset="0"/>
+              <a:effectLst/>
+              <a:uLnTx/>
+              <a:uFillTx/>
+              <a:latin typeface="Calibri" panose="020F0502020204030204"/>
+              <a:ea typeface="+mn-ea"/>
+              <a:cs typeface="+mn-cs"/>
             </a:endParaRPr>
-          </a:p>
-          <a:p>
-            <a:r>
-              <a:rPr lang="en-US" sz="4400" dirty="0">
-                <a:solidFill>
-                  <a:schemeClr val="bg1"/>
-                </a:solidFill>
-                <a:latin typeface="Avenir Medium" panose="02000503020000020003" pitchFamily="2" charset="0"/>
-                <a:ea typeface="Bodoni Ornaments" pitchFamily="2" charset="0"/>
-              </a:rPr>
-              <a:t>Stronger than darkness, </a:t>
-            </a:r>
-          </a:p>
-          <a:p>
-            <a:endParaRPr lang="en-US" sz="4400" dirty="0">
-              <a:solidFill>
-                <a:schemeClr val="bg1"/>
-              </a:solidFill>
-              <a:latin typeface="Avenir Medium" panose="02000503020000020003" pitchFamily="2" charset="0"/>
-              <a:ea typeface="Bodoni Ornaments" pitchFamily="2" charset="0"/>
-            </a:endParaRPr>
-          </a:p>
-          <a:p>
-            <a:r>
-              <a:rPr lang="en-US" sz="4400" dirty="0">
-                <a:solidFill>
-                  <a:schemeClr val="bg1"/>
-                </a:solidFill>
-                <a:latin typeface="Avenir Medium" panose="02000503020000020003" pitchFamily="2" charset="0"/>
-                <a:ea typeface="Bodoni Ornaments" pitchFamily="2" charset="0"/>
-              </a:rPr>
-              <a:t>new every morn</a:t>
-            </a:r>
           </a:p>
         </p:txBody>
       </p:sp>
@@ -3482,6 +3752,170 @@
 </file>
 
 <file path=ppt/slides/slide10.xml><?xml version="1.0" encoding="utf-8"?>
+<p:sld xmlns:a="http://schemas.openxmlformats.org/drawingml/2006/main" xmlns:r="http://schemas.openxmlformats.org/officeDocument/2006/relationships" xmlns:p="http://schemas.openxmlformats.org/presentationml/2006/main">
+  <p:cSld>
+    <p:bg>
+      <p:bgPr>
+        <a:solidFill>
+          <a:srgbClr val="7030A0"/>
+        </a:solidFill>
+        <a:effectLst/>
+      </p:bgPr>
+    </p:bg>
+    <p:spTree>
+      <p:nvGrpSpPr>
+        <p:cNvPr id="1" name="">
+          <a:extLst>
+            <a:ext uri="{FF2B5EF4-FFF2-40B4-BE49-F238E27FC236}">
+              <a16:creationId xmlns:a16="http://schemas.microsoft.com/office/drawing/2014/main" id="{2F06430C-F080-BAC0-6911-7773A1C75171}"/>
+            </a:ext>
+          </a:extLst>
+        </p:cNvPr>
+        <p:cNvGrpSpPr/>
+        <p:nvPr/>
+      </p:nvGrpSpPr>
+      <p:grpSpPr>
+        <a:xfrm>
+          <a:off x="0" y="0"/>
+          <a:ext cx="0" cy="0"/>
+          <a:chOff x="0" y="0"/>
+          <a:chExt cx="0" cy="0"/>
+        </a:xfrm>
+      </p:grpSpPr>
+      <p:sp>
+        <p:nvSpPr>
+          <p:cNvPr id="3" name="Subtitle 2">
+            <a:extLst>
+              <a:ext uri="{FF2B5EF4-FFF2-40B4-BE49-F238E27FC236}">
+                <a16:creationId xmlns:a16="http://schemas.microsoft.com/office/drawing/2014/main" id="{8329FF72-2542-4B42-F83E-6F9237349C20}"/>
+              </a:ext>
+            </a:extLst>
+          </p:cNvPr>
+          <p:cNvSpPr>
+            <a:spLocks noGrp="1"/>
+          </p:cNvSpPr>
+          <p:nvPr>
+            <p:ph type="subTitle" idx="1"/>
+          </p:nvPr>
+        </p:nvSpPr>
+        <p:spPr>
+          <a:xfrm>
+            <a:off x="682831" y="497702"/>
+            <a:ext cx="10826338" cy="5862596"/>
+          </a:xfrm>
+        </p:spPr>
+        <p:txBody>
+          <a:bodyPr>
+            <a:noAutofit/>
+          </a:bodyPr>
+          <a:lstStyle/>
+          <a:p>
+            <a:endParaRPr lang="en-US" sz="4400" dirty="0">
+              <a:solidFill>
+                <a:schemeClr val="bg1"/>
+              </a:solidFill>
+              <a:latin typeface="Avenir Medium" panose="02000503020000020003" pitchFamily="2" charset="0"/>
+              <a:ea typeface="Bodoni Ornaments" pitchFamily="2" charset="0"/>
+            </a:endParaRPr>
+          </a:p>
+          <a:p>
+            <a:r>
+              <a:rPr lang="en-US" sz="4400" dirty="0">
+                <a:solidFill>
+                  <a:schemeClr val="bg1"/>
+                </a:solidFill>
+                <a:latin typeface="Avenir Medium" panose="02000503020000020003" pitchFamily="2" charset="0"/>
+                <a:ea typeface="Bodoni Ornaments" pitchFamily="2" charset="0"/>
+              </a:rPr>
+              <a:t>Praise the Lord, </a:t>
+            </a:r>
+            <a:br>
+              <a:rPr lang="en-US" sz="4400" dirty="0">
+                <a:solidFill>
+                  <a:schemeClr val="bg1"/>
+                </a:solidFill>
+                <a:latin typeface="Avenir Medium" panose="02000503020000020003" pitchFamily="2" charset="0"/>
+                <a:ea typeface="Bodoni Ornaments" pitchFamily="2" charset="0"/>
+              </a:rPr>
+            </a:br>
+            <a:endParaRPr lang="en-US" sz="4400" dirty="0">
+              <a:solidFill>
+                <a:schemeClr val="bg1"/>
+              </a:solidFill>
+              <a:latin typeface="Avenir Medium" panose="02000503020000020003" pitchFamily="2" charset="0"/>
+              <a:ea typeface="Bodoni Ornaments" pitchFamily="2" charset="0"/>
+            </a:endParaRPr>
+          </a:p>
+          <a:p>
+            <a:r>
+              <a:rPr lang="en-US" sz="4400" dirty="0">
+                <a:solidFill>
+                  <a:schemeClr val="bg1"/>
+                </a:solidFill>
+                <a:latin typeface="Avenir Medium" panose="02000503020000020003" pitchFamily="2" charset="0"/>
+                <a:ea typeface="Bodoni Ornaments" pitchFamily="2" charset="0"/>
+              </a:rPr>
+              <a:t>His mercy is more</a:t>
+            </a:r>
+          </a:p>
+          <a:p>
+            <a:endParaRPr lang="en-US" sz="4400" dirty="0">
+              <a:solidFill>
+                <a:schemeClr val="bg1"/>
+              </a:solidFill>
+              <a:latin typeface="Avenir Medium" panose="02000503020000020003" pitchFamily="2" charset="0"/>
+              <a:ea typeface="Bodoni Ornaments" pitchFamily="2" charset="0"/>
+            </a:endParaRPr>
+          </a:p>
+          <a:p>
+            <a:r>
+              <a:rPr lang="en-US" sz="4400" dirty="0">
+                <a:solidFill>
+                  <a:schemeClr val="bg1"/>
+                </a:solidFill>
+                <a:latin typeface="Avenir Medium" panose="02000503020000020003" pitchFamily="2" charset="0"/>
+                <a:ea typeface="Bodoni Ornaments" pitchFamily="2" charset="0"/>
+              </a:rPr>
+              <a:t>Stronger than darkness, </a:t>
+            </a:r>
+          </a:p>
+          <a:p>
+            <a:endParaRPr lang="en-US" sz="4400" dirty="0">
+              <a:solidFill>
+                <a:schemeClr val="bg1"/>
+              </a:solidFill>
+              <a:latin typeface="Avenir Medium" panose="02000503020000020003" pitchFamily="2" charset="0"/>
+              <a:ea typeface="Bodoni Ornaments" pitchFamily="2" charset="0"/>
+            </a:endParaRPr>
+          </a:p>
+          <a:p>
+            <a:r>
+              <a:rPr lang="en-US" sz="4400" dirty="0">
+                <a:solidFill>
+                  <a:schemeClr val="bg1"/>
+                </a:solidFill>
+                <a:latin typeface="Avenir Medium" panose="02000503020000020003" pitchFamily="2" charset="0"/>
+                <a:ea typeface="Bodoni Ornaments" pitchFamily="2" charset="0"/>
+              </a:rPr>
+              <a:t>new every morn</a:t>
+            </a:r>
+          </a:p>
+        </p:txBody>
+      </p:sp>
+    </p:spTree>
+    <p:extLst>
+      <p:ext uri="{BB962C8B-B14F-4D97-AF65-F5344CB8AC3E}">
+        <p14:creationId xmlns:p14="http://schemas.microsoft.com/office/powerpoint/2010/main" val="2300250334"/>
+      </p:ext>
+    </p:extLst>
+  </p:cSld>
+  <p:clrMapOvr>
+    <a:masterClrMapping/>
+  </p:clrMapOvr>
+</p:sld>
+</file>
+
+<file path=ppt/slides/slide11.xml><?xml version="1.0" encoding="utf-8"?>
 <p:sld xmlns:a="http://schemas.openxmlformats.org/drawingml/2006/main" xmlns:r="http://schemas.openxmlformats.org/officeDocument/2006/relationships" xmlns:p="http://schemas.openxmlformats.org/presentationml/2006/main">
   <p:cSld>
     <p:bg>
@@ -3596,7 +4030,7 @@
 </p:sld>
 </file>
 
-<file path=ppt/slides/slide11.xml><?xml version="1.0" encoding="utf-8"?>
+<file path=ppt/slides/slide12.xml><?xml version="1.0" encoding="utf-8"?>
 <p:sld xmlns:a="http://schemas.openxmlformats.org/drawingml/2006/main" xmlns:r="http://schemas.openxmlformats.org/officeDocument/2006/relationships" xmlns:p="http://schemas.openxmlformats.org/presentationml/2006/main">
   <p:cSld>
     <p:bg>
@@ -3753,7 +4187,7 @@
 </p:sld>
 </file>
 
-<file path=ppt/slides/slide12.xml><?xml version="1.0" encoding="utf-8"?>
+<file path=ppt/slides/slide13.xml><?xml version="1.0" encoding="utf-8"?>
 <p:sld xmlns:a="http://schemas.openxmlformats.org/drawingml/2006/main" xmlns:r="http://schemas.openxmlformats.org/officeDocument/2006/relationships" xmlns:p="http://schemas.openxmlformats.org/presentationml/2006/main">
   <p:cSld>
     <p:bg>
@@ -3910,7 +4344,7 @@
 </p:sld>
 </file>
 
-<file path=ppt/slides/slide13.xml><?xml version="1.0" encoding="utf-8"?>
+<file path=ppt/slides/slide14.xml><?xml version="1.0" encoding="utf-8"?>
 <p:sld xmlns:a="http://schemas.openxmlformats.org/drawingml/2006/main" xmlns:r="http://schemas.openxmlformats.org/officeDocument/2006/relationships" xmlns:p="http://schemas.openxmlformats.org/presentationml/2006/main">
   <p:cSld>
     <p:bg>
@@ -4074,7 +4508,7 @@
 </p:sld>
 </file>
 
-<file path=ppt/slides/slide14.xml><?xml version="1.0" encoding="utf-8"?>
+<file path=ppt/slides/slide15.xml><?xml version="1.0" encoding="utf-8"?>
 <p:sld xmlns:a="http://schemas.openxmlformats.org/drawingml/2006/main" xmlns:r="http://schemas.openxmlformats.org/officeDocument/2006/relationships" xmlns:p="http://schemas.openxmlformats.org/presentationml/2006/main">
   <p:cSld>
     <p:bg>
@@ -4238,6 +4672,170 @@
         <p:cNvPr id="1" name="">
           <a:extLst>
             <a:ext uri="{FF2B5EF4-FFF2-40B4-BE49-F238E27FC236}">
+              <a16:creationId xmlns:a16="http://schemas.microsoft.com/office/drawing/2014/main" id="{D48471BC-71FA-5050-E195-E824F107A16A}"/>
+            </a:ext>
+          </a:extLst>
+        </p:cNvPr>
+        <p:cNvGrpSpPr/>
+        <p:nvPr/>
+      </p:nvGrpSpPr>
+      <p:grpSpPr>
+        <a:xfrm>
+          <a:off x="0" y="0"/>
+          <a:ext cx="0" cy="0"/>
+          <a:chOff x="0" y="0"/>
+          <a:chExt cx="0" cy="0"/>
+        </a:xfrm>
+      </p:grpSpPr>
+      <p:sp>
+        <p:nvSpPr>
+          <p:cNvPr id="3" name="Subtitle 2">
+            <a:extLst>
+              <a:ext uri="{FF2B5EF4-FFF2-40B4-BE49-F238E27FC236}">
+                <a16:creationId xmlns:a16="http://schemas.microsoft.com/office/drawing/2014/main" id="{70F4B07D-1F4C-FAA9-270A-D4E9E8B3C5D2}"/>
+              </a:ext>
+            </a:extLst>
+          </p:cNvPr>
+          <p:cNvSpPr>
+            <a:spLocks noGrp="1"/>
+          </p:cNvSpPr>
+          <p:nvPr>
+            <p:ph type="subTitle" idx="1"/>
+          </p:nvPr>
+        </p:nvSpPr>
+        <p:spPr>
+          <a:xfrm>
+            <a:off x="682831" y="497702"/>
+            <a:ext cx="10826338" cy="5862596"/>
+          </a:xfrm>
+        </p:spPr>
+        <p:txBody>
+          <a:bodyPr>
+            <a:noAutofit/>
+          </a:bodyPr>
+          <a:lstStyle/>
+          <a:p>
+            <a:endParaRPr lang="en-US" sz="4400" dirty="0">
+              <a:solidFill>
+                <a:schemeClr val="bg1"/>
+              </a:solidFill>
+              <a:latin typeface="Avenir Medium" panose="02000503020000020003" pitchFamily="2" charset="0"/>
+              <a:ea typeface="Bodoni Ornaments" pitchFamily="2" charset="0"/>
+            </a:endParaRPr>
+          </a:p>
+          <a:p>
+            <a:r>
+              <a:rPr lang="en-US" sz="4400" dirty="0">
+                <a:solidFill>
+                  <a:schemeClr val="bg1"/>
+                </a:solidFill>
+                <a:latin typeface="Avenir Medium" panose="02000503020000020003" pitchFamily="2" charset="0"/>
+                <a:ea typeface="Bodoni Ornaments" pitchFamily="2" charset="0"/>
+              </a:rPr>
+              <a:t>Praise the Lord, </a:t>
+            </a:r>
+            <a:br>
+              <a:rPr lang="en-US" sz="4400" dirty="0">
+                <a:solidFill>
+                  <a:schemeClr val="bg1"/>
+                </a:solidFill>
+                <a:latin typeface="Avenir Medium" panose="02000503020000020003" pitchFamily="2" charset="0"/>
+                <a:ea typeface="Bodoni Ornaments" pitchFamily="2" charset="0"/>
+              </a:rPr>
+            </a:br>
+            <a:endParaRPr lang="en-US" sz="4400" dirty="0">
+              <a:solidFill>
+                <a:schemeClr val="bg1"/>
+              </a:solidFill>
+              <a:latin typeface="Avenir Medium" panose="02000503020000020003" pitchFamily="2" charset="0"/>
+              <a:ea typeface="Bodoni Ornaments" pitchFamily="2" charset="0"/>
+            </a:endParaRPr>
+          </a:p>
+          <a:p>
+            <a:r>
+              <a:rPr lang="en-US" sz="4400" dirty="0">
+                <a:solidFill>
+                  <a:schemeClr val="bg1"/>
+                </a:solidFill>
+                <a:latin typeface="Avenir Medium" panose="02000503020000020003" pitchFamily="2" charset="0"/>
+                <a:ea typeface="Bodoni Ornaments" pitchFamily="2" charset="0"/>
+              </a:rPr>
+              <a:t>His mercy is more</a:t>
+            </a:r>
+          </a:p>
+          <a:p>
+            <a:endParaRPr lang="en-US" sz="4400" dirty="0">
+              <a:solidFill>
+                <a:schemeClr val="bg1"/>
+              </a:solidFill>
+              <a:latin typeface="Avenir Medium" panose="02000503020000020003" pitchFamily="2" charset="0"/>
+              <a:ea typeface="Bodoni Ornaments" pitchFamily="2" charset="0"/>
+            </a:endParaRPr>
+          </a:p>
+          <a:p>
+            <a:r>
+              <a:rPr lang="en-US" sz="4400" dirty="0">
+                <a:solidFill>
+                  <a:schemeClr val="bg1"/>
+                </a:solidFill>
+                <a:latin typeface="Avenir Medium" panose="02000503020000020003" pitchFamily="2" charset="0"/>
+                <a:ea typeface="Bodoni Ornaments" pitchFamily="2" charset="0"/>
+              </a:rPr>
+              <a:t>Stronger than darkness, </a:t>
+            </a:r>
+          </a:p>
+          <a:p>
+            <a:endParaRPr lang="en-US" sz="4400" dirty="0">
+              <a:solidFill>
+                <a:schemeClr val="bg1"/>
+              </a:solidFill>
+              <a:latin typeface="Avenir Medium" panose="02000503020000020003" pitchFamily="2" charset="0"/>
+              <a:ea typeface="Bodoni Ornaments" pitchFamily="2" charset="0"/>
+            </a:endParaRPr>
+          </a:p>
+          <a:p>
+            <a:r>
+              <a:rPr lang="en-US" sz="4400" dirty="0">
+                <a:solidFill>
+                  <a:schemeClr val="bg1"/>
+                </a:solidFill>
+                <a:latin typeface="Avenir Medium" panose="02000503020000020003" pitchFamily="2" charset="0"/>
+                <a:ea typeface="Bodoni Ornaments" pitchFamily="2" charset="0"/>
+              </a:rPr>
+              <a:t>new every morn</a:t>
+            </a:r>
+          </a:p>
+        </p:txBody>
+      </p:sp>
+    </p:spTree>
+    <p:extLst>
+      <p:ext uri="{BB962C8B-B14F-4D97-AF65-F5344CB8AC3E}">
+        <p14:creationId xmlns:p14="http://schemas.microsoft.com/office/powerpoint/2010/main" val="3414640861"/>
+      </p:ext>
+    </p:extLst>
+  </p:cSld>
+  <p:clrMapOvr>
+    <a:masterClrMapping/>
+  </p:clrMapOvr>
+</p:sld>
+</file>
+
+<file path=ppt/slides/slide3.xml><?xml version="1.0" encoding="utf-8"?>
+<p:sld xmlns:a="http://schemas.openxmlformats.org/drawingml/2006/main" xmlns:r="http://schemas.openxmlformats.org/officeDocument/2006/relationships" xmlns:p="http://schemas.openxmlformats.org/presentationml/2006/main">
+  <p:cSld>
+    <p:bg>
+      <p:bgPr>
+        <a:solidFill>
+          <a:srgbClr val="7030A0"/>
+        </a:solidFill>
+        <a:effectLst/>
+      </p:bgPr>
+    </p:bg>
+    <p:spTree>
+      <p:nvGrpSpPr>
+        <p:cNvPr id="1" name="">
+          <a:extLst>
+            <a:ext uri="{FF2B5EF4-FFF2-40B4-BE49-F238E27FC236}">
               <a16:creationId xmlns:a16="http://schemas.microsoft.com/office/drawing/2014/main" id="{FD6171DC-FEDD-4A1C-FD22-D2CB403DDC21}"/>
             </a:ext>
           </a:extLst>
@@ -4337,7 +4935,7 @@
 </p:sld>
 </file>
 
-<file path=ppt/slides/slide3.xml><?xml version="1.0" encoding="utf-8"?>
+<file path=ppt/slides/slide4.xml><?xml version="1.0" encoding="utf-8"?>
 <p:sld xmlns:a="http://schemas.openxmlformats.org/drawingml/2006/main" xmlns:r="http://schemas.openxmlformats.org/officeDocument/2006/relationships" xmlns:p="http://schemas.openxmlformats.org/presentationml/2006/main">
   <p:cSld>
     <p:bg>
@@ -4494,7 +5092,7 @@
 </p:sld>
 </file>
 
-<file path=ppt/slides/slide4.xml><?xml version="1.0" encoding="utf-8"?>
+<file path=ppt/slides/slide5.xml><?xml version="1.0" encoding="utf-8"?>
 <p:sld xmlns:a="http://schemas.openxmlformats.org/drawingml/2006/main" xmlns:r="http://schemas.openxmlformats.org/officeDocument/2006/relationships" xmlns:p="http://schemas.openxmlformats.org/presentationml/2006/main">
   <p:cSld>
     <p:bg>
@@ -4651,7 +5249,7 @@
 </p:sld>
 </file>
 
-<file path=ppt/slides/slide5.xml><?xml version="1.0" encoding="utf-8"?>
+<file path=ppt/slides/slide6.xml><?xml version="1.0" encoding="utf-8"?>
 <p:sld xmlns:a="http://schemas.openxmlformats.org/drawingml/2006/main" xmlns:r="http://schemas.openxmlformats.org/officeDocument/2006/relationships" xmlns:p="http://schemas.openxmlformats.org/presentationml/2006/main">
   <p:cSld>
     <p:bg>
@@ -4815,7 +5413,7 @@
 </p:sld>
 </file>
 
-<file path=ppt/slides/slide6.xml><?xml version="1.0" encoding="utf-8"?>
+<file path=ppt/slides/slide7.xml><?xml version="1.0" encoding="utf-8"?>
 <p:sld xmlns:a="http://schemas.openxmlformats.org/drawingml/2006/main" xmlns:r="http://schemas.openxmlformats.org/officeDocument/2006/relationships" xmlns:p="http://schemas.openxmlformats.org/presentationml/2006/main">
   <p:cSld>
     <p:bg>
@@ -4930,7 +5528,7 @@
 </p:sld>
 </file>
 
-<file path=ppt/slides/slide7.xml><?xml version="1.0" encoding="utf-8"?>
+<file path=ppt/slides/slide8.xml><?xml version="1.0" encoding="utf-8"?>
 <p:sld xmlns:a="http://schemas.openxmlformats.org/drawingml/2006/main" xmlns:r="http://schemas.openxmlformats.org/officeDocument/2006/relationships" xmlns:p="http://schemas.openxmlformats.org/presentationml/2006/main">
   <p:cSld>
     <p:bg>
@@ -5087,7 +5685,7 @@
 </p:sld>
 </file>
 
-<file path=ppt/slides/slide8.xml><?xml version="1.0" encoding="utf-8"?>
+<file path=ppt/slides/slide9.xml><?xml version="1.0" encoding="utf-8"?>
 <p:sld xmlns:a="http://schemas.openxmlformats.org/drawingml/2006/main" xmlns:r="http://schemas.openxmlformats.org/officeDocument/2006/relationships" xmlns:p="http://schemas.openxmlformats.org/presentationml/2006/main">
   <p:cSld>
     <p:bg>
@@ -5235,170 +5833,6 @@
     <p:extLst>
       <p:ext uri="{BB962C8B-B14F-4D97-AF65-F5344CB8AC3E}">
         <p14:creationId xmlns:p14="http://schemas.microsoft.com/office/powerpoint/2010/main" val="1992958983"/>
-      </p:ext>
-    </p:extLst>
-  </p:cSld>
-  <p:clrMapOvr>
-    <a:masterClrMapping/>
-  </p:clrMapOvr>
-</p:sld>
-</file>
-
-<file path=ppt/slides/slide9.xml><?xml version="1.0" encoding="utf-8"?>
-<p:sld xmlns:a="http://schemas.openxmlformats.org/drawingml/2006/main" xmlns:r="http://schemas.openxmlformats.org/officeDocument/2006/relationships" xmlns:p="http://schemas.openxmlformats.org/presentationml/2006/main">
-  <p:cSld>
-    <p:bg>
-      <p:bgPr>
-        <a:solidFill>
-          <a:srgbClr val="7030A0"/>
-        </a:solidFill>
-        <a:effectLst/>
-      </p:bgPr>
-    </p:bg>
-    <p:spTree>
-      <p:nvGrpSpPr>
-        <p:cNvPr id="1" name="">
-          <a:extLst>
-            <a:ext uri="{FF2B5EF4-FFF2-40B4-BE49-F238E27FC236}">
-              <a16:creationId xmlns:a16="http://schemas.microsoft.com/office/drawing/2014/main" id="{2F06430C-F080-BAC0-6911-7773A1C75171}"/>
-            </a:ext>
-          </a:extLst>
-        </p:cNvPr>
-        <p:cNvGrpSpPr/>
-        <p:nvPr/>
-      </p:nvGrpSpPr>
-      <p:grpSpPr>
-        <a:xfrm>
-          <a:off x="0" y="0"/>
-          <a:ext cx="0" cy="0"/>
-          <a:chOff x="0" y="0"/>
-          <a:chExt cx="0" cy="0"/>
-        </a:xfrm>
-      </p:grpSpPr>
-      <p:sp>
-        <p:nvSpPr>
-          <p:cNvPr id="3" name="Subtitle 2">
-            <a:extLst>
-              <a:ext uri="{FF2B5EF4-FFF2-40B4-BE49-F238E27FC236}">
-                <a16:creationId xmlns:a16="http://schemas.microsoft.com/office/drawing/2014/main" id="{8329FF72-2542-4B42-F83E-6F9237349C20}"/>
-              </a:ext>
-            </a:extLst>
-          </p:cNvPr>
-          <p:cNvSpPr>
-            <a:spLocks noGrp="1"/>
-          </p:cNvSpPr>
-          <p:nvPr>
-            <p:ph type="subTitle" idx="1"/>
-          </p:nvPr>
-        </p:nvSpPr>
-        <p:spPr>
-          <a:xfrm>
-            <a:off x="682831" y="497702"/>
-            <a:ext cx="10826338" cy="5862596"/>
-          </a:xfrm>
-        </p:spPr>
-        <p:txBody>
-          <a:bodyPr>
-            <a:noAutofit/>
-          </a:bodyPr>
-          <a:lstStyle/>
-          <a:p>
-            <a:endParaRPr lang="en-US" sz="4400" dirty="0">
-              <a:solidFill>
-                <a:schemeClr val="bg1"/>
-              </a:solidFill>
-              <a:latin typeface="Avenir Medium" panose="02000503020000020003" pitchFamily="2" charset="0"/>
-              <a:ea typeface="Bodoni Ornaments" pitchFamily="2" charset="0"/>
-            </a:endParaRPr>
-          </a:p>
-          <a:p>
-            <a:r>
-              <a:rPr lang="en-US" sz="4400" dirty="0">
-                <a:solidFill>
-                  <a:schemeClr val="bg1"/>
-                </a:solidFill>
-                <a:latin typeface="Avenir Medium" panose="02000503020000020003" pitchFamily="2" charset="0"/>
-                <a:ea typeface="Bodoni Ornaments" pitchFamily="2" charset="0"/>
-              </a:rPr>
-              <a:t>Praise the Lord, </a:t>
-            </a:r>
-            <a:br>
-              <a:rPr lang="en-US" sz="4400" dirty="0">
-                <a:solidFill>
-                  <a:schemeClr val="bg1"/>
-                </a:solidFill>
-                <a:latin typeface="Avenir Medium" panose="02000503020000020003" pitchFamily="2" charset="0"/>
-                <a:ea typeface="Bodoni Ornaments" pitchFamily="2" charset="0"/>
-              </a:rPr>
-            </a:br>
-            <a:endParaRPr lang="en-US" sz="4400" dirty="0">
-              <a:solidFill>
-                <a:schemeClr val="bg1"/>
-              </a:solidFill>
-              <a:latin typeface="Avenir Medium" panose="02000503020000020003" pitchFamily="2" charset="0"/>
-              <a:ea typeface="Bodoni Ornaments" pitchFamily="2" charset="0"/>
-            </a:endParaRPr>
-          </a:p>
-          <a:p>
-            <a:r>
-              <a:rPr lang="en-US" sz="4400" dirty="0">
-                <a:solidFill>
-                  <a:schemeClr val="bg1"/>
-                </a:solidFill>
-                <a:latin typeface="Avenir Medium" panose="02000503020000020003" pitchFamily="2" charset="0"/>
-                <a:ea typeface="Bodoni Ornaments" pitchFamily="2" charset="0"/>
-              </a:rPr>
-              <a:t>His mercy is more</a:t>
-            </a:r>
-          </a:p>
-          <a:p>
-            <a:endParaRPr lang="en-US" sz="4400" dirty="0">
-              <a:solidFill>
-                <a:schemeClr val="bg1"/>
-              </a:solidFill>
-              <a:latin typeface="Avenir Medium" panose="02000503020000020003" pitchFamily="2" charset="0"/>
-              <a:ea typeface="Bodoni Ornaments" pitchFamily="2" charset="0"/>
-            </a:endParaRPr>
-          </a:p>
-          <a:p>
-            <a:r>
-              <a:rPr lang="en-US" sz="4400" dirty="0">
-                <a:solidFill>
-                  <a:schemeClr val="bg1"/>
-                </a:solidFill>
-                <a:latin typeface="Avenir Medium" panose="02000503020000020003" pitchFamily="2" charset="0"/>
-                <a:ea typeface="Bodoni Ornaments" pitchFamily="2" charset="0"/>
-              </a:rPr>
-              <a:t>Stronger than darkness, </a:t>
-            </a:r>
-          </a:p>
-          <a:p>
-            <a:endParaRPr lang="en-US" sz="4400" dirty="0">
-              <a:solidFill>
-                <a:schemeClr val="bg1"/>
-              </a:solidFill>
-              <a:latin typeface="Avenir Medium" panose="02000503020000020003" pitchFamily="2" charset="0"/>
-              <a:ea typeface="Bodoni Ornaments" pitchFamily="2" charset="0"/>
-            </a:endParaRPr>
-          </a:p>
-          <a:p>
-            <a:r>
-              <a:rPr lang="en-US" sz="4400" dirty="0">
-                <a:solidFill>
-                  <a:schemeClr val="bg1"/>
-                </a:solidFill>
-                <a:latin typeface="Avenir Medium" panose="02000503020000020003" pitchFamily="2" charset="0"/>
-                <a:ea typeface="Bodoni Ornaments" pitchFamily="2" charset="0"/>
-              </a:rPr>
-              <a:t>new every morn</a:t>
-            </a:r>
-          </a:p>
-        </p:txBody>
-      </p:sp>
-    </p:spTree>
-    <p:extLst>
-      <p:ext uri="{BB962C8B-B14F-4D97-AF65-F5344CB8AC3E}">
-        <p14:creationId xmlns:p14="http://schemas.microsoft.com/office/powerpoint/2010/main" val="2300250334"/>
       </p:ext>
     </p:extLst>
   </p:cSld>

--- a/His Mercy is More.pptx
+++ b/His Mercy is More.pptx
@@ -2,26 +2,28 @@
 <file path=ppt/presentation.xml><?xml version="1.0" encoding="utf-8"?>
 <p:presentation xmlns:a="http://schemas.openxmlformats.org/drawingml/2006/main" xmlns:r="http://schemas.openxmlformats.org/officeDocument/2006/relationships" xmlns:p="http://schemas.openxmlformats.org/presentationml/2006/main" saveSubsetFonts="1" autoCompressPictures="0">
   <p:sldMasterIdLst>
-    <p:sldMasterId id="2147483648" r:id="rId1"/>
+    <p:sldMasterId id="2147483660" r:id="rId1"/>
   </p:sldMasterIdLst>
   <p:sldIdLst>
-    <p:sldId id="275" r:id="rId2"/>
-    <p:sldId id="278" r:id="rId3"/>
-    <p:sldId id="279" r:id="rId4"/>
+    <p:sldId id="274" r:id="rId2"/>
+    <p:sldId id="280" r:id="rId3"/>
+    <p:sldId id="281" r:id="rId4"/>
     <p:sldId id="282" r:id="rId5"/>
     <p:sldId id="283" r:id="rId6"/>
-    <p:sldId id="268" r:id="rId7"/>
-    <p:sldId id="286" r:id="rId8"/>
-    <p:sldId id="269" r:id="rId9"/>
+    <p:sldId id="284" r:id="rId7"/>
+    <p:sldId id="285" r:id="rId8"/>
+    <p:sldId id="286" r:id="rId9"/>
     <p:sldId id="287" r:id="rId10"/>
+    <p:sldId id="288" r:id="rId11"/>
+    <p:sldId id="289" r:id="rId12"/>
   </p:sldIdLst>
-  <p:sldSz cx="12192000" cy="6858000"/>
+  <p:sldSz cx="9144000" cy="6858000" type="screen4x3"/>
   <p:notesSz cx="6858000" cy="9144000"/>
   <p:defaultTextStyle>
     <a:defPPr>
       <a:defRPr lang="en-US"/>
     </a:defPPr>
-    <a:lvl1pPr marL="0" algn="l" defTabSz="914400" rtl="0" eaLnBrk="1" latinLnBrk="0" hangingPunct="1">
+    <a:lvl1pPr marL="0" algn="l" defTabSz="457200" rtl="0" eaLnBrk="1" latinLnBrk="0" hangingPunct="1">
       <a:defRPr sz="1800" kern="1200">
         <a:solidFill>
           <a:schemeClr val="tx1"/>
@@ -31,7 +33,7 @@
         <a:cs typeface="+mn-cs"/>
       </a:defRPr>
     </a:lvl1pPr>
-    <a:lvl2pPr marL="457200" algn="l" defTabSz="914400" rtl="0" eaLnBrk="1" latinLnBrk="0" hangingPunct="1">
+    <a:lvl2pPr marL="457200" algn="l" defTabSz="457200" rtl="0" eaLnBrk="1" latinLnBrk="0" hangingPunct="1">
       <a:defRPr sz="1800" kern="1200">
         <a:solidFill>
           <a:schemeClr val="tx1"/>
@@ -41,7 +43,7 @@
         <a:cs typeface="+mn-cs"/>
       </a:defRPr>
     </a:lvl2pPr>
-    <a:lvl3pPr marL="914400" algn="l" defTabSz="914400" rtl="0" eaLnBrk="1" latinLnBrk="0" hangingPunct="1">
+    <a:lvl3pPr marL="914400" algn="l" defTabSz="457200" rtl="0" eaLnBrk="1" latinLnBrk="0" hangingPunct="1">
       <a:defRPr sz="1800" kern="1200">
         <a:solidFill>
           <a:schemeClr val="tx1"/>
@@ -51,7 +53,7 @@
         <a:cs typeface="+mn-cs"/>
       </a:defRPr>
     </a:lvl3pPr>
-    <a:lvl4pPr marL="1371600" algn="l" defTabSz="914400" rtl="0" eaLnBrk="1" latinLnBrk="0" hangingPunct="1">
+    <a:lvl4pPr marL="1371600" algn="l" defTabSz="457200" rtl="0" eaLnBrk="1" latinLnBrk="0" hangingPunct="1">
       <a:defRPr sz="1800" kern="1200">
         <a:solidFill>
           <a:schemeClr val="tx1"/>
@@ -61,7 +63,7 @@
         <a:cs typeface="+mn-cs"/>
       </a:defRPr>
     </a:lvl4pPr>
-    <a:lvl5pPr marL="1828800" algn="l" defTabSz="914400" rtl="0" eaLnBrk="1" latinLnBrk="0" hangingPunct="1">
+    <a:lvl5pPr marL="1828800" algn="l" defTabSz="457200" rtl="0" eaLnBrk="1" latinLnBrk="0" hangingPunct="1">
       <a:defRPr sz="1800" kern="1200">
         <a:solidFill>
           <a:schemeClr val="tx1"/>
@@ -71,7 +73,7 @@
         <a:cs typeface="+mn-cs"/>
       </a:defRPr>
     </a:lvl5pPr>
-    <a:lvl6pPr marL="2286000" algn="l" defTabSz="914400" rtl="0" eaLnBrk="1" latinLnBrk="0" hangingPunct="1">
+    <a:lvl6pPr marL="2286000" algn="l" defTabSz="457200" rtl="0" eaLnBrk="1" latinLnBrk="0" hangingPunct="1">
       <a:defRPr sz="1800" kern="1200">
         <a:solidFill>
           <a:schemeClr val="tx1"/>
@@ -81,7 +83,7 @@
         <a:cs typeface="+mn-cs"/>
       </a:defRPr>
     </a:lvl6pPr>
-    <a:lvl7pPr marL="2743200" algn="l" defTabSz="914400" rtl="0" eaLnBrk="1" latinLnBrk="0" hangingPunct="1">
+    <a:lvl7pPr marL="2743200" algn="l" defTabSz="457200" rtl="0" eaLnBrk="1" latinLnBrk="0" hangingPunct="1">
       <a:defRPr sz="1800" kern="1200">
         <a:solidFill>
           <a:schemeClr val="tx1"/>
@@ -91,7 +93,7 @@
         <a:cs typeface="+mn-cs"/>
       </a:defRPr>
     </a:lvl7pPr>
-    <a:lvl8pPr marL="3200400" algn="l" defTabSz="914400" rtl="0" eaLnBrk="1" latinLnBrk="0" hangingPunct="1">
+    <a:lvl8pPr marL="3200400" algn="l" defTabSz="457200" rtl="0" eaLnBrk="1" latinLnBrk="0" hangingPunct="1">
       <a:defRPr sz="1800" kern="1200">
         <a:solidFill>
           <a:schemeClr val="tx1"/>
@@ -101,7 +103,7 @@
         <a:cs typeface="+mn-cs"/>
       </a:defRPr>
     </a:lvl8pPr>
-    <a:lvl9pPr marL="3657600" algn="l" defTabSz="914400" rtl="0" eaLnBrk="1" latinLnBrk="0" hangingPunct="1">
+    <a:lvl9pPr marL="3657600" algn="l" defTabSz="457200" rtl="0" eaLnBrk="1" latinLnBrk="0" hangingPunct="1">
       <a:defRPr sz="1800" kern="1200">
         <a:solidFill>
           <a:schemeClr val="tx1"/>
@@ -112,6 +114,11 @@
       </a:defRPr>
     </a:lvl9pPr>
   </p:defaultTextStyle>
+  <p:extLst>
+    <p:ext uri="{EFAFB233-063F-42B5-8137-9DF3F51BA10A}">
+      <p15:sldGuideLst xmlns:p15="http://schemas.microsoft.com/office/powerpoint/2012/main"/>
+    </p:ext>
+  </p:extLst>
 </p:presentation>
 </file>
 
@@ -134,13 +141,7 @@
       </p:grpSpPr>
       <p:sp>
         <p:nvSpPr>
-          <p:cNvPr id="2" name="Title 1">
-            <a:extLst>
-              <a:ext uri="{FF2B5EF4-FFF2-40B4-BE49-F238E27FC236}">
-                <a16:creationId xmlns:a16="http://schemas.microsoft.com/office/drawing/2014/main" id="{D0BE83BE-81BE-B824-69DE-2499790E8C57}"/>
-              </a:ext>
-            </a:extLst>
-          </p:cNvPr>
+          <p:cNvPr id="2" name="Title 1"/>
           <p:cNvSpPr>
             <a:spLocks noGrp="1"/>
           </p:cNvSpPr>
@@ -150,8 +151,8 @@
         </p:nvSpPr>
         <p:spPr>
           <a:xfrm>
-            <a:off x="1524000" y="1122363"/>
-            <a:ext cx="9144000" cy="2387600"/>
+            <a:off x="685800" y="1122363"/>
+            <a:ext cx="7772400" cy="2387600"/>
           </a:xfrm>
         </p:spPr>
         <p:txBody>
@@ -166,18 +167,13 @@
               <a:rPr lang="en-US"/>
               <a:t>Click to edit Master title style</a:t>
             </a:r>
-          </a:p>
-        </p:txBody>
-      </p:sp>
-      <p:sp>
-        <p:nvSpPr>
-          <p:cNvPr id="3" name="Subtitle 2">
-            <a:extLst>
-              <a:ext uri="{FF2B5EF4-FFF2-40B4-BE49-F238E27FC236}">
-                <a16:creationId xmlns:a16="http://schemas.microsoft.com/office/drawing/2014/main" id="{7DA20C57-DE2E-D519-C36C-9FDEA22216B6}"/>
-              </a:ext>
-            </a:extLst>
-          </p:cNvPr>
+            <a:endParaRPr lang="en-US" dirty="0"/>
+          </a:p>
+        </p:txBody>
+      </p:sp>
+      <p:sp>
+        <p:nvSpPr>
+          <p:cNvPr id="3" name="Subtitle 2"/>
           <p:cNvSpPr>
             <a:spLocks noGrp="1"/>
           </p:cNvSpPr>
@@ -187,8 +183,8 @@
         </p:nvSpPr>
         <p:spPr>
           <a:xfrm>
-            <a:off x="1524000" y="3602038"/>
-            <a:ext cx="9144000" cy="1655762"/>
+            <a:off x="1143000" y="3602038"/>
+            <a:ext cx="6858000" cy="1655762"/>
           </a:xfrm>
         </p:spPr>
         <p:txBody>
@@ -236,18 +232,13 @@
               <a:rPr lang="en-US"/>
               <a:t>Click to edit Master subtitle style</a:t>
             </a:r>
-          </a:p>
-        </p:txBody>
-      </p:sp>
-      <p:sp>
-        <p:nvSpPr>
-          <p:cNvPr id="4" name="Date Placeholder 3">
-            <a:extLst>
-              <a:ext uri="{FF2B5EF4-FFF2-40B4-BE49-F238E27FC236}">
-                <a16:creationId xmlns:a16="http://schemas.microsoft.com/office/drawing/2014/main" id="{27126AA0-22BB-1528-8B28-1ECF644B9509}"/>
-              </a:ext>
-            </a:extLst>
-          </p:cNvPr>
+            <a:endParaRPr lang="en-US" dirty="0"/>
+          </a:p>
+        </p:txBody>
+      </p:sp>
+      <p:sp>
+        <p:nvSpPr>
+          <p:cNvPr id="4" name="Date Placeholder 3"/>
           <p:cNvSpPr>
             <a:spLocks noGrp="1"/>
           </p:cNvSpPr>
@@ -260,9 +251,9 @@
           <a:bodyPr/>
           <a:lstStyle/>
           <a:p>
-            <a:fld id="{EB296C15-0437-4146-9190-C1B2DE9A9101}" type="datetimeFigureOut">
+            <a:fld id="{E759A0DE-F190-5444-87AC-4719D5F20D15}" type="datetimeFigureOut">
               <a:rPr lang="en-US" smtClean="0"/>
-              <a:t>5/31/26</a:t>
+              <a:t>8/8/26</a:t>
             </a:fld>
             <a:endParaRPr lang="en-US"/>
           </a:p>
@@ -270,13 +261,7 @@
       </p:sp>
       <p:sp>
         <p:nvSpPr>
-          <p:cNvPr id="5" name="Footer Placeholder 4">
-            <a:extLst>
-              <a:ext uri="{FF2B5EF4-FFF2-40B4-BE49-F238E27FC236}">
-                <a16:creationId xmlns:a16="http://schemas.microsoft.com/office/drawing/2014/main" id="{98E2D104-1FE7-4CB6-0D1E-D32F292E6AE0}"/>
-              </a:ext>
-            </a:extLst>
-          </p:cNvPr>
+          <p:cNvPr id="5" name="Footer Placeholder 4"/>
           <p:cNvSpPr>
             <a:spLocks noGrp="1"/>
           </p:cNvSpPr>
@@ -295,13 +280,7 @@
       </p:sp>
       <p:sp>
         <p:nvSpPr>
-          <p:cNvPr id="6" name="Slide Number Placeholder 5">
-            <a:extLst>
-              <a:ext uri="{FF2B5EF4-FFF2-40B4-BE49-F238E27FC236}">
-                <a16:creationId xmlns:a16="http://schemas.microsoft.com/office/drawing/2014/main" id="{5F5E6C77-7EA8-1A2F-BCEC-CA93B2D69F5E}"/>
-              </a:ext>
-            </a:extLst>
-          </p:cNvPr>
+          <p:cNvPr id="6" name="Slide Number Placeholder 5"/>
           <p:cNvSpPr>
             <a:spLocks noGrp="1"/>
           </p:cNvSpPr>
@@ -314,7 +293,7 @@
           <a:bodyPr/>
           <a:lstStyle/>
           <a:p>
-            <a:fld id="{E1E4C99C-3176-8E41-8A8D-3C46093005DC}" type="slidenum">
+            <a:fld id="{5D063D89-8794-8A41-A79B-A67E558340AA}" type="slidenum">
               <a:rPr lang="en-US" smtClean="0"/>
               <a:t>‹#›</a:t>
             </a:fld>
@@ -325,7 +304,7 @@
     </p:spTree>
     <p:extLst>
       <p:ext uri="{BB962C8B-B14F-4D97-AF65-F5344CB8AC3E}">
-        <p14:creationId xmlns:p14="http://schemas.microsoft.com/office/powerpoint/2010/main" val="702851016"/>
+        <p14:creationId xmlns:p14="http://schemas.microsoft.com/office/powerpoint/2010/main" val="87880011"/>
       </p:ext>
     </p:extLst>
   </p:cSld>
@@ -354,13 +333,7 @@
       </p:grpSpPr>
       <p:sp>
         <p:nvSpPr>
-          <p:cNvPr id="2" name="Title 1">
-            <a:extLst>
-              <a:ext uri="{FF2B5EF4-FFF2-40B4-BE49-F238E27FC236}">
-                <a16:creationId xmlns:a16="http://schemas.microsoft.com/office/drawing/2014/main" id="{BCCE301D-2986-1241-31ED-9D68F3750D17}"/>
-              </a:ext>
-            </a:extLst>
-          </p:cNvPr>
+          <p:cNvPr id="2" name="Title 1"/>
           <p:cNvSpPr>
             <a:spLocks noGrp="1"/>
           </p:cNvSpPr>
@@ -377,18 +350,13 @@
               <a:rPr lang="en-US"/>
               <a:t>Click to edit Master title style</a:t>
             </a:r>
-          </a:p>
-        </p:txBody>
-      </p:sp>
-      <p:sp>
-        <p:nvSpPr>
-          <p:cNvPr id="3" name="Vertical Text Placeholder 2">
-            <a:extLst>
-              <a:ext uri="{FF2B5EF4-FFF2-40B4-BE49-F238E27FC236}">
-                <a16:creationId xmlns:a16="http://schemas.microsoft.com/office/drawing/2014/main" id="{D116FDC9-19E4-5D2E-4FBD-4E5D908DD9DB}"/>
-              </a:ext>
-            </a:extLst>
-          </p:cNvPr>
+            <a:endParaRPr lang="en-US" dirty="0"/>
+          </a:p>
+        </p:txBody>
+      </p:sp>
+      <p:sp>
+        <p:nvSpPr>
+          <p:cNvPr id="3" name="Vertical Text Placeholder 2"/>
           <p:cNvSpPr>
             <a:spLocks noGrp="1"/>
           </p:cNvSpPr>
@@ -434,18 +402,13 @@
               <a:rPr lang="en-US"/>
               <a:t>Fifth level</a:t>
             </a:r>
-          </a:p>
-        </p:txBody>
-      </p:sp>
-      <p:sp>
-        <p:nvSpPr>
-          <p:cNvPr id="4" name="Date Placeholder 3">
-            <a:extLst>
-              <a:ext uri="{FF2B5EF4-FFF2-40B4-BE49-F238E27FC236}">
-                <a16:creationId xmlns:a16="http://schemas.microsoft.com/office/drawing/2014/main" id="{6E7FD566-2187-45A4-A432-773CDAB46166}"/>
-              </a:ext>
-            </a:extLst>
-          </p:cNvPr>
+            <a:endParaRPr lang="en-US" dirty="0"/>
+          </a:p>
+        </p:txBody>
+      </p:sp>
+      <p:sp>
+        <p:nvSpPr>
+          <p:cNvPr id="4" name="Date Placeholder 3"/>
           <p:cNvSpPr>
             <a:spLocks noGrp="1"/>
           </p:cNvSpPr>
@@ -458,9 +421,9 @@
           <a:bodyPr/>
           <a:lstStyle/>
           <a:p>
-            <a:fld id="{EB296C15-0437-4146-9190-C1B2DE9A9101}" type="datetimeFigureOut">
+            <a:fld id="{E759A0DE-F190-5444-87AC-4719D5F20D15}" type="datetimeFigureOut">
               <a:rPr lang="en-US" smtClean="0"/>
-              <a:t>5/31/26</a:t>
+              <a:t>8/8/26</a:t>
             </a:fld>
             <a:endParaRPr lang="en-US"/>
           </a:p>
@@ -468,13 +431,7 @@
       </p:sp>
       <p:sp>
         <p:nvSpPr>
-          <p:cNvPr id="5" name="Footer Placeholder 4">
-            <a:extLst>
-              <a:ext uri="{FF2B5EF4-FFF2-40B4-BE49-F238E27FC236}">
-                <a16:creationId xmlns:a16="http://schemas.microsoft.com/office/drawing/2014/main" id="{B75DA6E3-5285-19B4-EE68-5A2BB52250F8}"/>
-              </a:ext>
-            </a:extLst>
-          </p:cNvPr>
+          <p:cNvPr id="5" name="Footer Placeholder 4"/>
           <p:cNvSpPr>
             <a:spLocks noGrp="1"/>
           </p:cNvSpPr>
@@ -493,13 +450,7 @@
       </p:sp>
       <p:sp>
         <p:nvSpPr>
-          <p:cNvPr id="6" name="Slide Number Placeholder 5">
-            <a:extLst>
-              <a:ext uri="{FF2B5EF4-FFF2-40B4-BE49-F238E27FC236}">
-                <a16:creationId xmlns:a16="http://schemas.microsoft.com/office/drawing/2014/main" id="{E7D9D480-FF3B-49B7-1F77-41080B7C8AFB}"/>
-              </a:ext>
-            </a:extLst>
-          </p:cNvPr>
+          <p:cNvPr id="6" name="Slide Number Placeholder 5"/>
           <p:cNvSpPr>
             <a:spLocks noGrp="1"/>
           </p:cNvSpPr>
@@ -512,7 +463,7 @@
           <a:bodyPr/>
           <a:lstStyle/>
           <a:p>
-            <a:fld id="{E1E4C99C-3176-8E41-8A8D-3C46093005DC}" type="slidenum">
+            <a:fld id="{5D063D89-8794-8A41-A79B-A67E558340AA}" type="slidenum">
               <a:rPr lang="en-US" smtClean="0"/>
               <a:t>‹#›</a:t>
             </a:fld>
@@ -523,7 +474,7 @@
     </p:spTree>
     <p:extLst>
       <p:ext uri="{BB962C8B-B14F-4D97-AF65-F5344CB8AC3E}">
-        <p14:creationId xmlns:p14="http://schemas.microsoft.com/office/powerpoint/2010/main" val="13802073"/>
+        <p14:creationId xmlns:p14="http://schemas.microsoft.com/office/powerpoint/2010/main" val="3708245266"/>
       </p:ext>
     </p:extLst>
   </p:cSld>
@@ -552,13 +503,7 @@
       </p:grpSpPr>
       <p:sp>
         <p:nvSpPr>
-          <p:cNvPr id="2" name="Vertical Title 1">
-            <a:extLst>
-              <a:ext uri="{FF2B5EF4-FFF2-40B4-BE49-F238E27FC236}">
-                <a16:creationId xmlns:a16="http://schemas.microsoft.com/office/drawing/2014/main" id="{1BAF707A-B64F-8400-488E-D28FC0B9561B}"/>
-              </a:ext>
-            </a:extLst>
-          </p:cNvPr>
+          <p:cNvPr id="2" name="Vertical Title 1"/>
           <p:cNvSpPr>
             <a:spLocks noGrp="1"/>
           </p:cNvSpPr>
@@ -568,8 +513,8 @@
         </p:nvSpPr>
         <p:spPr>
           <a:xfrm>
-            <a:off x="8724900" y="365125"/>
-            <a:ext cx="2628900" cy="5811838"/>
+            <a:off x="6543675" y="365125"/>
+            <a:ext cx="1971675" cy="5811838"/>
           </a:xfrm>
         </p:spPr>
         <p:txBody>
@@ -580,18 +525,13 @@
               <a:rPr lang="en-US"/>
               <a:t>Click to edit Master title style</a:t>
             </a:r>
-          </a:p>
-        </p:txBody>
-      </p:sp>
-      <p:sp>
-        <p:nvSpPr>
-          <p:cNvPr id="3" name="Vertical Text Placeholder 2">
-            <a:extLst>
-              <a:ext uri="{FF2B5EF4-FFF2-40B4-BE49-F238E27FC236}">
-                <a16:creationId xmlns:a16="http://schemas.microsoft.com/office/drawing/2014/main" id="{95BFEDF6-3318-CAFA-5244-CD98F83D0FE3}"/>
-              </a:ext>
-            </a:extLst>
-          </p:cNvPr>
+            <a:endParaRPr lang="en-US" dirty="0"/>
+          </a:p>
+        </p:txBody>
+      </p:sp>
+      <p:sp>
+        <p:nvSpPr>
+          <p:cNvPr id="3" name="Vertical Text Placeholder 2"/>
           <p:cNvSpPr>
             <a:spLocks noGrp="1"/>
           </p:cNvSpPr>
@@ -601,8 +541,8 @@
         </p:nvSpPr>
         <p:spPr>
           <a:xfrm>
-            <a:off x="838200" y="365125"/>
-            <a:ext cx="7734300" cy="5811838"/>
+            <a:off x="628650" y="365125"/>
+            <a:ext cx="5800725" cy="5811838"/>
           </a:xfrm>
         </p:spPr>
         <p:txBody>
@@ -642,18 +582,13 @@
               <a:rPr lang="en-US"/>
               <a:t>Fifth level</a:t>
             </a:r>
-          </a:p>
-        </p:txBody>
-      </p:sp>
-      <p:sp>
-        <p:nvSpPr>
-          <p:cNvPr id="4" name="Date Placeholder 3">
-            <a:extLst>
-              <a:ext uri="{FF2B5EF4-FFF2-40B4-BE49-F238E27FC236}">
-                <a16:creationId xmlns:a16="http://schemas.microsoft.com/office/drawing/2014/main" id="{742AF831-96ED-B4C5-55BC-F7E3F6DD30A9}"/>
-              </a:ext>
-            </a:extLst>
-          </p:cNvPr>
+            <a:endParaRPr lang="en-US" dirty="0"/>
+          </a:p>
+        </p:txBody>
+      </p:sp>
+      <p:sp>
+        <p:nvSpPr>
+          <p:cNvPr id="4" name="Date Placeholder 3"/>
           <p:cNvSpPr>
             <a:spLocks noGrp="1"/>
           </p:cNvSpPr>
@@ -666,9 +601,9 @@
           <a:bodyPr/>
           <a:lstStyle/>
           <a:p>
-            <a:fld id="{EB296C15-0437-4146-9190-C1B2DE9A9101}" type="datetimeFigureOut">
+            <a:fld id="{E759A0DE-F190-5444-87AC-4719D5F20D15}" type="datetimeFigureOut">
               <a:rPr lang="en-US" smtClean="0"/>
-              <a:t>5/31/26</a:t>
+              <a:t>8/8/26</a:t>
             </a:fld>
             <a:endParaRPr lang="en-US"/>
           </a:p>
@@ -676,13 +611,7 @@
       </p:sp>
       <p:sp>
         <p:nvSpPr>
-          <p:cNvPr id="5" name="Footer Placeholder 4">
-            <a:extLst>
-              <a:ext uri="{FF2B5EF4-FFF2-40B4-BE49-F238E27FC236}">
-                <a16:creationId xmlns:a16="http://schemas.microsoft.com/office/drawing/2014/main" id="{0463BFB2-FB68-9BC3-7160-9C07EA7391DB}"/>
-              </a:ext>
-            </a:extLst>
-          </p:cNvPr>
+          <p:cNvPr id="5" name="Footer Placeholder 4"/>
           <p:cNvSpPr>
             <a:spLocks noGrp="1"/>
           </p:cNvSpPr>
@@ -701,13 +630,7 @@
       </p:sp>
       <p:sp>
         <p:nvSpPr>
-          <p:cNvPr id="6" name="Slide Number Placeholder 5">
-            <a:extLst>
-              <a:ext uri="{FF2B5EF4-FFF2-40B4-BE49-F238E27FC236}">
-                <a16:creationId xmlns:a16="http://schemas.microsoft.com/office/drawing/2014/main" id="{B18EE095-E0B0-0624-654F-27C457D03CD5}"/>
-              </a:ext>
-            </a:extLst>
-          </p:cNvPr>
+          <p:cNvPr id="6" name="Slide Number Placeholder 5"/>
           <p:cNvSpPr>
             <a:spLocks noGrp="1"/>
           </p:cNvSpPr>
@@ -720,7 +643,7 @@
           <a:bodyPr/>
           <a:lstStyle/>
           <a:p>
-            <a:fld id="{E1E4C99C-3176-8E41-8A8D-3C46093005DC}" type="slidenum">
+            <a:fld id="{5D063D89-8794-8A41-A79B-A67E558340AA}" type="slidenum">
               <a:rPr lang="en-US" smtClean="0"/>
               <a:t>‹#›</a:t>
             </a:fld>
@@ -731,7 +654,7 @@
     </p:spTree>
     <p:extLst>
       <p:ext uri="{BB962C8B-B14F-4D97-AF65-F5344CB8AC3E}">
-        <p14:creationId xmlns:p14="http://schemas.microsoft.com/office/powerpoint/2010/main" val="669288212"/>
+        <p14:creationId xmlns:p14="http://schemas.microsoft.com/office/powerpoint/2010/main" val="2509224612"/>
       </p:ext>
     </p:extLst>
   </p:cSld>
@@ -760,13 +683,7 @@
       </p:grpSpPr>
       <p:sp>
         <p:nvSpPr>
-          <p:cNvPr id="2" name="Title 1">
-            <a:extLst>
-              <a:ext uri="{FF2B5EF4-FFF2-40B4-BE49-F238E27FC236}">
-                <a16:creationId xmlns:a16="http://schemas.microsoft.com/office/drawing/2014/main" id="{8ACF4ABE-7055-EA3F-EA25-D752F0F4D772}"/>
-              </a:ext>
-            </a:extLst>
-          </p:cNvPr>
+          <p:cNvPr id="2" name="Title 1"/>
           <p:cNvSpPr>
             <a:spLocks noGrp="1"/>
           </p:cNvSpPr>
@@ -783,18 +700,13 @@
               <a:rPr lang="en-US"/>
               <a:t>Click to edit Master title style</a:t>
             </a:r>
-          </a:p>
-        </p:txBody>
-      </p:sp>
-      <p:sp>
-        <p:nvSpPr>
-          <p:cNvPr id="3" name="Content Placeholder 2">
-            <a:extLst>
-              <a:ext uri="{FF2B5EF4-FFF2-40B4-BE49-F238E27FC236}">
-                <a16:creationId xmlns:a16="http://schemas.microsoft.com/office/drawing/2014/main" id="{BF1F2652-BCE7-3B86-0FB4-189E1F87F36A}"/>
-              </a:ext>
-            </a:extLst>
-          </p:cNvPr>
+            <a:endParaRPr lang="en-US" dirty="0"/>
+          </a:p>
+        </p:txBody>
+      </p:sp>
+      <p:sp>
+        <p:nvSpPr>
+          <p:cNvPr id="3" name="Content Placeholder 2"/>
           <p:cNvSpPr>
             <a:spLocks noGrp="1"/>
           </p:cNvSpPr>
@@ -840,18 +752,13 @@
               <a:rPr lang="en-US"/>
               <a:t>Fifth level</a:t>
             </a:r>
-          </a:p>
-        </p:txBody>
-      </p:sp>
-      <p:sp>
-        <p:nvSpPr>
-          <p:cNvPr id="4" name="Date Placeholder 3">
-            <a:extLst>
-              <a:ext uri="{FF2B5EF4-FFF2-40B4-BE49-F238E27FC236}">
-                <a16:creationId xmlns:a16="http://schemas.microsoft.com/office/drawing/2014/main" id="{9946544C-9103-2499-716C-6446A432723B}"/>
-              </a:ext>
-            </a:extLst>
-          </p:cNvPr>
+            <a:endParaRPr lang="en-US" dirty="0"/>
+          </a:p>
+        </p:txBody>
+      </p:sp>
+      <p:sp>
+        <p:nvSpPr>
+          <p:cNvPr id="4" name="Date Placeholder 3"/>
           <p:cNvSpPr>
             <a:spLocks noGrp="1"/>
           </p:cNvSpPr>
@@ -864,9 +771,9 @@
           <a:bodyPr/>
           <a:lstStyle/>
           <a:p>
-            <a:fld id="{EB296C15-0437-4146-9190-C1B2DE9A9101}" type="datetimeFigureOut">
+            <a:fld id="{E759A0DE-F190-5444-87AC-4719D5F20D15}" type="datetimeFigureOut">
               <a:rPr lang="en-US" smtClean="0"/>
-              <a:t>5/31/26</a:t>
+              <a:t>8/8/26</a:t>
             </a:fld>
             <a:endParaRPr lang="en-US"/>
           </a:p>
@@ -874,13 +781,7 @@
       </p:sp>
       <p:sp>
         <p:nvSpPr>
-          <p:cNvPr id="5" name="Footer Placeholder 4">
-            <a:extLst>
-              <a:ext uri="{FF2B5EF4-FFF2-40B4-BE49-F238E27FC236}">
-                <a16:creationId xmlns:a16="http://schemas.microsoft.com/office/drawing/2014/main" id="{19660862-A92A-F547-5F25-D5BEC378D8B2}"/>
-              </a:ext>
-            </a:extLst>
-          </p:cNvPr>
+          <p:cNvPr id="5" name="Footer Placeholder 4"/>
           <p:cNvSpPr>
             <a:spLocks noGrp="1"/>
           </p:cNvSpPr>
@@ -899,13 +800,7 @@
       </p:sp>
       <p:sp>
         <p:nvSpPr>
-          <p:cNvPr id="6" name="Slide Number Placeholder 5">
-            <a:extLst>
-              <a:ext uri="{FF2B5EF4-FFF2-40B4-BE49-F238E27FC236}">
-                <a16:creationId xmlns:a16="http://schemas.microsoft.com/office/drawing/2014/main" id="{570D1E5F-C7F3-C2FD-9D8B-8CD6CAD01D3F}"/>
-              </a:ext>
-            </a:extLst>
-          </p:cNvPr>
+          <p:cNvPr id="6" name="Slide Number Placeholder 5"/>
           <p:cNvSpPr>
             <a:spLocks noGrp="1"/>
           </p:cNvSpPr>
@@ -918,7 +813,7 @@
           <a:bodyPr/>
           <a:lstStyle/>
           <a:p>
-            <a:fld id="{E1E4C99C-3176-8E41-8A8D-3C46093005DC}" type="slidenum">
+            <a:fld id="{5D063D89-8794-8A41-A79B-A67E558340AA}" type="slidenum">
               <a:rPr lang="en-US" smtClean="0"/>
               <a:t>‹#›</a:t>
             </a:fld>
@@ -929,7 +824,7 @@
     </p:spTree>
     <p:extLst>
       <p:ext uri="{BB962C8B-B14F-4D97-AF65-F5344CB8AC3E}">
-        <p14:creationId xmlns:p14="http://schemas.microsoft.com/office/powerpoint/2010/main" val="2160929676"/>
+        <p14:creationId xmlns:p14="http://schemas.microsoft.com/office/powerpoint/2010/main" val="4110991596"/>
       </p:ext>
     </p:extLst>
   </p:cSld>
@@ -958,13 +853,7 @@
       </p:grpSpPr>
       <p:sp>
         <p:nvSpPr>
-          <p:cNvPr id="2" name="Title 1">
-            <a:extLst>
-              <a:ext uri="{FF2B5EF4-FFF2-40B4-BE49-F238E27FC236}">
-                <a16:creationId xmlns:a16="http://schemas.microsoft.com/office/drawing/2014/main" id="{53B796AB-52E9-1A14-CF2B-58BB93D7923D}"/>
-              </a:ext>
-            </a:extLst>
-          </p:cNvPr>
+          <p:cNvPr id="2" name="Title 1"/>
           <p:cNvSpPr>
             <a:spLocks noGrp="1"/>
           </p:cNvSpPr>
@@ -974,8 +863,8 @@
         </p:nvSpPr>
         <p:spPr>
           <a:xfrm>
-            <a:off x="831850" y="1709738"/>
-            <a:ext cx="10515600" cy="2852737"/>
+            <a:off x="623888" y="1709739"/>
+            <a:ext cx="7886700" cy="2852737"/>
           </a:xfrm>
         </p:spPr>
         <p:txBody>
@@ -990,18 +879,13 @@
               <a:rPr lang="en-US"/>
               <a:t>Click to edit Master title style</a:t>
             </a:r>
-          </a:p>
-        </p:txBody>
-      </p:sp>
-      <p:sp>
-        <p:nvSpPr>
-          <p:cNvPr id="3" name="Text Placeholder 2">
-            <a:extLst>
-              <a:ext uri="{FF2B5EF4-FFF2-40B4-BE49-F238E27FC236}">
-                <a16:creationId xmlns:a16="http://schemas.microsoft.com/office/drawing/2014/main" id="{042B3976-F836-0E41-8582-D38C1AAB371C}"/>
-              </a:ext>
-            </a:extLst>
-          </p:cNvPr>
+            <a:endParaRPr lang="en-US" dirty="0"/>
+          </a:p>
+        </p:txBody>
+      </p:sp>
+      <p:sp>
+        <p:nvSpPr>
+          <p:cNvPr id="3" name="Text Placeholder 2"/>
           <p:cNvSpPr>
             <a:spLocks noGrp="1"/>
           </p:cNvSpPr>
@@ -1011,8 +895,8 @@
         </p:nvSpPr>
         <p:spPr>
           <a:xfrm>
-            <a:off x="831850" y="4589463"/>
-            <a:ext cx="10515600" cy="1500187"/>
+            <a:off x="623888" y="4589464"/>
+            <a:ext cx="7886700" cy="1500187"/>
           </a:xfrm>
         </p:spPr>
         <p:txBody>
@@ -1120,13 +1004,7 @@
       </p:sp>
       <p:sp>
         <p:nvSpPr>
-          <p:cNvPr id="4" name="Date Placeholder 3">
-            <a:extLst>
-              <a:ext uri="{FF2B5EF4-FFF2-40B4-BE49-F238E27FC236}">
-                <a16:creationId xmlns:a16="http://schemas.microsoft.com/office/drawing/2014/main" id="{C80EAF3E-41AB-E5DC-5E1D-10BFDA2108EC}"/>
-              </a:ext>
-            </a:extLst>
-          </p:cNvPr>
+          <p:cNvPr id="4" name="Date Placeholder 3"/>
           <p:cNvSpPr>
             <a:spLocks noGrp="1"/>
           </p:cNvSpPr>
@@ -1139,9 +1017,9 @@
           <a:bodyPr/>
           <a:lstStyle/>
           <a:p>
-            <a:fld id="{EB296C15-0437-4146-9190-C1B2DE9A9101}" type="datetimeFigureOut">
+            <a:fld id="{E759A0DE-F190-5444-87AC-4719D5F20D15}" type="datetimeFigureOut">
               <a:rPr lang="en-US" smtClean="0"/>
-              <a:t>5/31/26</a:t>
+              <a:t>8/8/26</a:t>
             </a:fld>
             <a:endParaRPr lang="en-US"/>
           </a:p>
@@ -1149,13 +1027,7 @@
       </p:sp>
       <p:sp>
         <p:nvSpPr>
-          <p:cNvPr id="5" name="Footer Placeholder 4">
-            <a:extLst>
-              <a:ext uri="{FF2B5EF4-FFF2-40B4-BE49-F238E27FC236}">
-                <a16:creationId xmlns:a16="http://schemas.microsoft.com/office/drawing/2014/main" id="{128D9D26-A828-BA20-FA90-FCCBF1EEF9AB}"/>
-              </a:ext>
-            </a:extLst>
-          </p:cNvPr>
+          <p:cNvPr id="5" name="Footer Placeholder 4"/>
           <p:cNvSpPr>
             <a:spLocks noGrp="1"/>
           </p:cNvSpPr>
@@ -1174,13 +1046,7 @@
       </p:sp>
       <p:sp>
         <p:nvSpPr>
-          <p:cNvPr id="6" name="Slide Number Placeholder 5">
-            <a:extLst>
-              <a:ext uri="{FF2B5EF4-FFF2-40B4-BE49-F238E27FC236}">
-                <a16:creationId xmlns:a16="http://schemas.microsoft.com/office/drawing/2014/main" id="{447BFB50-027A-9065-F632-8D771319C03A}"/>
-              </a:ext>
-            </a:extLst>
-          </p:cNvPr>
+          <p:cNvPr id="6" name="Slide Number Placeholder 5"/>
           <p:cNvSpPr>
             <a:spLocks noGrp="1"/>
           </p:cNvSpPr>
@@ -1193,7 +1059,7 @@
           <a:bodyPr/>
           <a:lstStyle/>
           <a:p>
-            <a:fld id="{E1E4C99C-3176-8E41-8A8D-3C46093005DC}" type="slidenum">
+            <a:fld id="{5D063D89-8794-8A41-A79B-A67E558340AA}" type="slidenum">
               <a:rPr lang="en-US" smtClean="0"/>
               <a:t>‹#›</a:t>
             </a:fld>
@@ -1204,7 +1070,7 @@
     </p:spTree>
     <p:extLst>
       <p:ext uri="{BB962C8B-B14F-4D97-AF65-F5344CB8AC3E}">
-        <p14:creationId xmlns:p14="http://schemas.microsoft.com/office/powerpoint/2010/main" val="2071124911"/>
+        <p14:creationId xmlns:p14="http://schemas.microsoft.com/office/powerpoint/2010/main" val="1377733004"/>
       </p:ext>
     </p:extLst>
   </p:cSld>
@@ -1233,13 +1099,7 @@
       </p:grpSpPr>
       <p:sp>
         <p:nvSpPr>
-          <p:cNvPr id="2" name="Title 1">
-            <a:extLst>
-              <a:ext uri="{FF2B5EF4-FFF2-40B4-BE49-F238E27FC236}">
-                <a16:creationId xmlns:a16="http://schemas.microsoft.com/office/drawing/2014/main" id="{D9E6FAF3-AC6C-78E3-F8EC-69D6C8F80F1D}"/>
-              </a:ext>
-            </a:extLst>
-          </p:cNvPr>
+          <p:cNvPr id="2" name="Title 1"/>
           <p:cNvSpPr>
             <a:spLocks noGrp="1"/>
           </p:cNvSpPr>
@@ -1256,18 +1116,13 @@
               <a:rPr lang="en-US"/>
               <a:t>Click to edit Master title style</a:t>
             </a:r>
-          </a:p>
-        </p:txBody>
-      </p:sp>
-      <p:sp>
-        <p:nvSpPr>
-          <p:cNvPr id="3" name="Content Placeholder 2">
-            <a:extLst>
-              <a:ext uri="{FF2B5EF4-FFF2-40B4-BE49-F238E27FC236}">
-                <a16:creationId xmlns:a16="http://schemas.microsoft.com/office/drawing/2014/main" id="{3CAAA920-DAE6-B999-AF2D-A18107C03610}"/>
-              </a:ext>
-            </a:extLst>
-          </p:cNvPr>
+            <a:endParaRPr lang="en-US" dirty="0"/>
+          </a:p>
+        </p:txBody>
+      </p:sp>
+      <p:sp>
+        <p:nvSpPr>
+          <p:cNvPr id="3" name="Content Placeholder 2"/>
           <p:cNvSpPr>
             <a:spLocks noGrp="1"/>
           </p:cNvSpPr>
@@ -1277,8 +1132,8 @@
         </p:nvSpPr>
         <p:spPr>
           <a:xfrm>
-            <a:off x="838200" y="1825625"/>
-            <a:ext cx="5181600" cy="4351338"/>
+            <a:off x="628650" y="1825625"/>
+            <a:ext cx="3886200" cy="4351338"/>
           </a:xfrm>
         </p:spPr>
         <p:txBody>
@@ -1318,18 +1173,13 @@
               <a:rPr lang="en-US"/>
               <a:t>Fifth level</a:t>
             </a:r>
-          </a:p>
-        </p:txBody>
-      </p:sp>
-      <p:sp>
-        <p:nvSpPr>
-          <p:cNvPr id="4" name="Content Placeholder 3">
-            <a:extLst>
-              <a:ext uri="{FF2B5EF4-FFF2-40B4-BE49-F238E27FC236}">
-                <a16:creationId xmlns:a16="http://schemas.microsoft.com/office/drawing/2014/main" id="{275A42E4-5275-A25A-D208-4F894E38FD13}"/>
-              </a:ext>
-            </a:extLst>
-          </p:cNvPr>
+            <a:endParaRPr lang="en-US" dirty="0"/>
+          </a:p>
+        </p:txBody>
+      </p:sp>
+      <p:sp>
+        <p:nvSpPr>
+          <p:cNvPr id="4" name="Content Placeholder 3"/>
           <p:cNvSpPr>
             <a:spLocks noGrp="1"/>
           </p:cNvSpPr>
@@ -1339,8 +1189,8 @@
         </p:nvSpPr>
         <p:spPr>
           <a:xfrm>
-            <a:off x="6172200" y="1825625"/>
-            <a:ext cx="5181600" cy="4351338"/>
+            <a:off x="4629150" y="1825625"/>
+            <a:ext cx="3886200" cy="4351338"/>
           </a:xfrm>
         </p:spPr>
         <p:txBody>
@@ -1380,18 +1230,13 @@
               <a:rPr lang="en-US"/>
               <a:t>Fifth level</a:t>
             </a:r>
-          </a:p>
-        </p:txBody>
-      </p:sp>
-      <p:sp>
-        <p:nvSpPr>
-          <p:cNvPr id="5" name="Date Placeholder 4">
-            <a:extLst>
-              <a:ext uri="{FF2B5EF4-FFF2-40B4-BE49-F238E27FC236}">
-                <a16:creationId xmlns:a16="http://schemas.microsoft.com/office/drawing/2014/main" id="{2650E202-210B-757C-3FCF-C5BD961B29BA}"/>
-              </a:ext>
-            </a:extLst>
-          </p:cNvPr>
+            <a:endParaRPr lang="en-US" dirty="0"/>
+          </a:p>
+        </p:txBody>
+      </p:sp>
+      <p:sp>
+        <p:nvSpPr>
+          <p:cNvPr id="5" name="Date Placeholder 4"/>
           <p:cNvSpPr>
             <a:spLocks noGrp="1"/>
           </p:cNvSpPr>
@@ -1404,9 +1249,9 @@
           <a:bodyPr/>
           <a:lstStyle/>
           <a:p>
-            <a:fld id="{EB296C15-0437-4146-9190-C1B2DE9A9101}" type="datetimeFigureOut">
+            <a:fld id="{E759A0DE-F190-5444-87AC-4719D5F20D15}" type="datetimeFigureOut">
               <a:rPr lang="en-US" smtClean="0"/>
-              <a:t>5/31/26</a:t>
+              <a:t>8/8/26</a:t>
             </a:fld>
             <a:endParaRPr lang="en-US"/>
           </a:p>
@@ -1414,13 +1259,7 @@
       </p:sp>
       <p:sp>
         <p:nvSpPr>
-          <p:cNvPr id="6" name="Footer Placeholder 5">
-            <a:extLst>
-              <a:ext uri="{FF2B5EF4-FFF2-40B4-BE49-F238E27FC236}">
-                <a16:creationId xmlns:a16="http://schemas.microsoft.com/office/drawing/2014/main" id="{BF0AEF82-4664-591C-00C3-8D06B1007A26}"/>
-              </a:ext>
-            </a:extLst>
-          </p:cNvPr>
+          <p:cNvPr id="6" name="Footer Placeholder 5"/>
           <p:cNvSpPr>
             <a:spLocks noGrp="1"/>
           </p:cNvSpPr>
@@ -1439,13 +1278,7 @@
       </p:sp>
       <p:sp>
         <p:nvSpPr>
-          <p:cNvPr id="7" name="Slide Number Placeholder 6">
-            <a:extLst>
-              <a:ext uri="{FF2B5EF4-FFF2-40B4-BE49-F238E27FC236}">
-                <a16:creationId xmlns:a16="http://schemas.microsoft.com/office/drawing/2014/main" id="{EE42AB5B-3D08-8CD7-990A-BF0CC161F802}"/>
-              </a:ext>
-            </a:extLst>
-          </p:cNvPr>
+          <p:cNvPr id="7" name="Slide Number Placeholder 6"/>
           <p:cNvSpPr>
             <a:spLocks noGrp="1"/>
           </p:cNvSpPr>
@@ -1458,7 +1291,7 @@
           <a:bodyPr/>
           <a:lstStyle/>
           <a:p>
-            <a:fld id="{E1E4C99C-3176-8E41-8A8D-3C46093005DC}" type="slidenum">
+            <a:fld id="{5D063D89-8794-8A41-A79B-A67E558340AA}" type="slidenum">
               <a:rPr lang="en-US" smtClean="0"/>
               <a:t>‹#›</a:t>
             </a:fld>
@@ -1469,7 +1302,7 @@
     </p:spTree>
     <p:extLst>
       <p:ext uri="{BB962C8B-B14F-4D97-AF65-F5344CB8AC3E}">
-        <p14:creationId xmlns:p14="http://schemas.microsoft.com/office/powerpoint/2010/main" val="3590850872"/>
+        <p14:creationId xmlns:p14="http://schemas.microsoft.com/office/powerpoint/2010/main" val="2120275962"/>
       </p:ext>
     </p:extLst>
   </p:cSld>
@@ -1498,13 +1331,7 @@
       </p:grpSpPr>
       <p:sp>
         <p:nvSpPr>
-          <p:cNvPr id="2" name="Title 1">
-            <a:extLst>
-              <a:ext uri="{FF2B5EF4-FFF2-40B4-BE49-F238E27FC236}">
-                <a16:creationId xmlns:a16="http://schemas.microsoft.com/office/drawing/2014/main" id="{7624AC68-9B6A-884A-C32B-FB399A08872C}"/>
-              </a:ext>
-            </a:extLst>
-          </p:cNvPr>
+          <p:cNvPr id="2" name="Title 1"/>
           <p:cNvSpPr>
             <a:spLocks noGrp="1"/>
           </p:cNvSpPr>
@@ -1514,8 +1341,8 @@
         </p:nvSpPr>
         <p:spPr>
           <a:xfrm>
-            <a:off x="839788" y="365125"/>
-            <a:ext cx="10515600" cy="1325563"/>
+            <a:off x="629841" y="365126"/>
+            <a:ext cx="7886700" cy="1325563"/>
           </a:xfrm>
         </p:spPr>
         <p:txBody>
@@ -1526,18 +1353,13 @@
               <a:rPr lang="en-US"/>
               <a:t>Click to edit Master title style</a:t>
             </a:r>
-          </a:p>
-        </p:txBody>
-      </p:sp>
-      <p:sp>
-        <p:nvSpPr>
-          <p:cNvPr id="3" name="Text Placeholder 2">
-            <a:extLst>
-              <a:ext uri="{FF2B5EF4-FFF2-40B4-BE49-F238E27FC236}">
-                <a16:creationId xmlns:a16="http://schemas.microsoft.com/office/drawing/2014/main" id="{40FE2201-6554-36A7-12B8-2BCE3F3BAD2A}"/>
-              </a:ext>
-            </a:extLst>
-          </p:cNvPr>
+            <a:endParaRPr lang="en-US" dirty="0"/>
+          </a:p>
+        </p:txBody>
+      </p:sp>
+      <p:sp>
+        <p:nvSpPr>
+          <p:cNvPr id="3" name="Text Placeholder 2"/>
           <p:cNvSpPr>
             <a:spLocks noGrp="1"/>
           </p:cNvSpPr>
@@ -1547,8 +1369,8 @@
         </p:nvSpPr>
         <p:spPr>
           <a:xfrm>
-            <a:off x="839788" y="1681163"/>
-            <a:ext cx="5157787" cy="823912"/>
+            <a:off x="629842" y="1681163"/>
+            <a:ext cx="3868340" cy="823912"/>
           </a:xfrm>
         </p:spPr>
         <p:txBody>
@@ -1602,13 +1424,7 @@
       </p:sp>
       <p:sp>
         <p:nvSpPr>
-          <p:cNvPr id="4" name="Content Placeholder 3">
-            <a:extLst>
-              <a:ext uri="{FF2B5EF4-FFF2-40B4-BE49-F238E27FC236}">
-                <a16:creationId xmlns:a16="http://schemas.microsoft.com/office/drawing/2014/main" id="{4400C810-9948-9BEB-DAE4-4F0637FB84D0}"/>
-              </a:ext>
-            </a:extLst>
-          </p:cNvPr>
+          <p:cNvPr id="4" name="Content Placeholder 3"/>
           <p:cNvSpPr>
             <a:spLocks noGrp="1"/>
           </p:cNvSpPr>
@@ -1618,8 +1434,8 @@
         </p:nvSpPr>
         <p:spPr>
           <a:xfrm>
-            <a:off x="839788" y="2505075"/>
-            <a:ext cx="5157787" cy="3684588"/>
+            <a:off x="629842" y="2505075"/>
+            <a:ext cx="3868340" cy="3684588"/>
           </a:xfrm>
         </p:spPr>
         <p:txBody>
@@ -1659,18 +1475,13 @@
               <a:rPr lang="en-US"/>
               <a:t>Fifth level</a:t>
             </a:r>
-          </a:p>
-        </p:txBody>
-      </p:sp>
-      <p:sp>
-        <p:nvSpPr>
-          <p:cNvPr id="5" name="Text Placeholder 4">
-            <a:extLst>
-              <a:ext uri="{FF2B5EF4-FFF2-40B4-BE49-F238E27FC236}">
-                <a16:creationId xmlns:a16="http://schemas.microsoft.com/office/drawing/2014/main" id="{9BB9BCD5-B011-5E02-1668-0E6745DF2477}"/>
-              </a:ext>
-            </a:extLst>
-          </p:cNvPr>
+            <a:endParaRPr lang="en-US" dirty="0"/>
+          </a:p>
+        </p:txBody>
+      </p:sp>
+      <p:sp>
+        <p:nvSpPr>
+          <p:cNvPr id="5" name="Text Placeholder 4"/>
           <p:cNvSpPr>
             <a:spLocks noGrp="1"/>
           </p:cNvSpPr>
@@ -1680,8 +1491,8 @@
         </p:nvSpPr>
         <p:spPr>
           <a:xfrm>
-            <a:off x="6172200" y="1681163"/>
-            <a:ext cx="5183188" cy="823912"/>
+            <a:off x="4629150" y="1681163"/>
+            <a:ext cx="3887391" cy="823912"/>
           </a:xfrm>
         </p:spPr>
         <p:txBody>
@@ -1735,13 +1546,7 @@
       </p:sp>
       <p:sp>
         <p:nvSpPr>
-          <p:cNvPr id="6" name="Content Placeholder 5">
-            <a:extLst>
-              <a:ext uri="{FF2B5EF4-FFF2-40B4-BE49-F238E27FC236}">
-                <a16:creationId xmlns:a16="http://schemas.microsoft.com/office/drawing/2014/main" id="{87B84336-9DAD-AB1E-901A-139934CC361C}"/>
-              </a:ext>
-            </a:extLst>
-          </p:cNvPr>
+          <p:cNvPr id="6" name="Content Placeholder 5"/>
           <p:cNvSpPr>
             <a:spLocks noGrp="1"/>
           </p:cNvSpPr>
@@ -1751,8 +1556,8 @@
         </p:nvSpPr>
         <p:spPr>
           <a:xfrm>
-            <a:off x="6172200" y="2505075"/>
-            <a:ext cx="5183188" cy="3684588"/>
+            <a:off x="4629150" y="2505075"/>
+            <a:ext cx="3887391" cy="3684588"/>
           </a:xfrm>
         </p:spPr>
         <p:txBody>
@@ -1792,18 +1597,13 @@
               <a:rPr lang="en-US"/>
               <a:t>Fifth level</a:t>
             </a:r>
-          </a:p>
-        </p:txBody>
-      </p:sp>
-      <p:sp>
-        <p:nvSpPr>
-          <p:cNvPr id="7" name="Date Placeholder 6">
-            <a:extLst>
-              <a:ext uri="{FF2B5EF4-FFF2-40B4-BE49-F238E27FC236}">
-                <a16:creationId xmlns:a16="http://schemas.microsoft.com/office/drawing/2014/main" id="{7B7CD205-A122-0AA8-4EA4-A2392FAC5A7A}"/>
-              </a:ext>
-            </a:extLst>
-          </p:cNvPr>
+            <a:endParaRPr lang="en-US" dirty="0"/>
+          </a:p>
+        </p:txBody>
+      </p:sp>
+      <p:sp>
+        <p:nvSpPr>
+          <p:cNvPr id="7" name="Date Placeholder 6"/>
           <p:cNvSpPr>
             <a:spLocks noGrp="1"/>
           </p:cNvSpPr>
@@ -1816,9 +1616,9 @@
           <a:bodyPr/>
           <a:lstStyle/>
           <a:p>
-            <a:fld id="{EB296C15-0437-4146-9190-C1B2DE9A9101}" type="datetimeFigureOut">
+            <a:fld id="{E759A0DE-F190-5444-87AC-4719D5F20D15}" type="datetimeFigureOut">
               <a:rPr lang="en-US" smtClean="0"/>
-              <a:t>5/31/26</a:t>
+              <a:t>8/8/26</a:t>
             </a:fld>
             <a:endParaRPr lang="en-US"/>
           </a:p>
@@ -1826,13 +1626,7 @@
       </p:sp>
       <p:sp>
         <p:nvSpPr>
-          <p:cNvPr id="8" name="Footer Placeholder 7">
-            <a:extLst>
-              <a:ext uri="{FF2B5EF4-FFF2-40B4-BE49-F238E27FC236}">
-                <a16:creationId xmlns:a16="http://schemas.microsoft.com/office/drawing/2014/main" id="{3222C21B-FD21-1144-FD1A-22D2EEF0B514}"/>
-              </a:ext>
-            </a:extLst>
-          </p:cNvPr>
+          <p:cNvPr id="8" name="Footer Placeholder 7"/>
           <p:cNvSpPr>
             <a:spLocks noGrp="1"/>
           </p:cNvSpPr>
@@ -1851,13 +1645,7 @@
       </p:sp>
       <p:sp>
         <p:nvSpPr>
-          <p:cNvPr id="9" name="Slide Number Placeholder 8">
-            <a:extLst>
-              <a:ext uri="{FF2B5EF4-FFF2-40B4-BE49-F238E27FC236}">
-                <a16:creationId xmlns:a16="http://schemas.microsoft.com/office/drawing/2014/main" id="{3CE07714-262B-2BA2-D086-82FB28D99587}"/>
-              </a:ext>
-            </a:extLst>
-          </p:cNvPr>
+          <p:cNvPr id="9" name="Slide Number Placeholder 8"/>
           <p:cNvSpPr>
             <a:spLocks noGrp="1"/>
           </p:cNvSpPr>
@@ -1870,7 +1658,7 @@
           <a:bodyPr/>
           <a:lstStyle/>
           <a:p>
-            <a:fld id="{E1E4C99C-3176-8E41-8A8D-3C46093005DC}" type="slidenum">
+            <a:fld id="{5D063D89-8794-8A41-A79B-A67E558340AA}" type="slidenum">
               <a:rPr lang="en-US" smtClean="0"/>
               <a:t>‹#›</a:t>
             </a:fld>
@@ -1881,7 +1669,7 @@
     </p:spTree>
     <p:extLst>
       <p:ext uri="{BB962C8B-B14F-4D97-AF65-F5344CB8AC3E}">
-        <p14:creationId xmlns:p14="http://schemas.microsoft.com/office/powerpoint/2010/main" val="1248290921"/>
+        <p14:creationId xmlns:p14="http://schemas.microsoft.com/office/powerpoint/2010/main" val="3458719147"/>
       </p:ext>
     </p:extLst>
   </p:cSld>
@@ -1910,13 +1698,7 @@
       </p:grpSpPr>
       <p:sp>
         <p:nvSpPr>
-          <p:cNvPr id="2" name="Title 1">
-            <a:extLst>
-              <a:ext uri="{FF2B5EF4-FFF2-40B4-BE49-F238E27FC236}">
-                <a16:creationId xmlns:a16="http://schemas.microsoft.com/office/drawing/2014/main" id="{71378928-B5C0-BF70-12D9-9C5698405F31}"/>
-              </a:ext>
-            </a:extLst>
-          </p:cNvPr>
+          <p:cNvPr id="2" name="Title 1"/>
           <p:cNvSpPr>
             <a:spLocks noGrp="1"/>
           </p:cNvSpPr>
@@ -1933,18 +1715,13 @@
               <a:rPr lang="en-US"/>
               <a:t>Click to edit Master title style</a:t>
             </a:r>
-          </a:p>
-        </p:txBody>
-      </p:sp>
-      <p:sp>
-        <p:nvSpPr>
-          <p:cNvPr id="3" name="Date Placeholder 2">
-            <a:extLst>
-              <a:ext uri="{FF2B5EF4-FFF2-40B4-BE49-F238E27FC236}">
-                <a16:creationId xmlns:a16="http://schemas.microsoft.com/office/drawing/2014/main" id="{0970EF20-976A-8BA6-F107-7C3BC22FF89F}"/>
-              </a:ext>
-            </a:extLst>
-          </p:cNvPr>
+            <a:endParaRPr lang="en-US" dirty="0"/>
+          </a:p>
+        </p:txBody>
+      </p:sp>
+      <p:sp>
+        <p:nvSpPr>
+          <p:cNvPr id="3" name="Date Placeholder 2"/>
           <p:cNvSpPr>
             <a:spLocks noGrp="1"/>
           </p:cNvSpPr>
@@ -1957,9 +1734,9 @@
           <a:bodyPr/>
           <a:lstStyle/>
           <a:p>
-            <a:fld id="{EB296C15-0437-4146-9190-C1B2DE9A9101}" type="datetimeFigureOut">
+            <a:fld id="{E759A0DE-F190-5444-87AC-4719D5F20D15}" type="datetimeFigureOut">
               <a:rPr lang="en-US" smtClean="0"/>
-              <a:t>5/31/26</a:t>
+              <a:t>8/8/26</a:t>
             </a:fld>
             <a:endParaRPr lang="en-US"/>
           </a:p>
@@ -1967,13 +1744,7 @@
       </p:sp>
       <p:sp>
         <p:nvSpPr>
-          <p:cNvPr id="4" name="Footer Placeholder 3">
-            <a:extLst>
-              <a:ext uri="{FF2B5EF4-FFF2-40B4-BE49-F238E27FC236}">
-                <a16:creationId xmlns:a16="http://schemas.microsoft.com/office/drawing/2014/main" id="{C8C8792A-D2EF-78E9-D602-456CE45BCB86}"/>
-              </a:ext>
-            </a:extLst>
-          </p:cNvPr>
+          <p:cNvPr id="4" name="Footer Placeholder 3"/>
           <p:cNvSpPr>
             <a:spLocks noGrp="1"/>
           </p:cNvSpPr>
@@ -1992,13 +1763,7 @@
       </p:sp>
       <p:sp>
         <p:nvSpPr>
-          <p:cNvPr id="5" name="Slide Number Placeholder 4">
-            <a:extLst>
-              <a:ext uri="{FF2B5EF4-FFF2-40B4-BE49-F238E27FC236}">
-                <a16:creationId xmlns:a16="http://schemas.microsoft.com/office/drawing/2014/main" id="{E0F64BB0-7F10-ECD3-B745-84DCEFDD6AD5}"/>
-              </a:ext>
-            </a:extLst>
-          </p:cNvPr>
+          <p:cNvPr id="5" name="Slide Number Placeholder 4"/>
           <p:cNvSpPr>
             <a:spLocks noGrp="1"/>
           </p:cNvSpPr>
@@ -2011,7 +1776,7 @@
           <a:bodyPr/>
           <a:lstStyle/>
           <a:p>
-            <a:fld id="{E1E4C99C-3176-8E41-8A8D-3C46093005DC}" type="slidenum">
+            <a:fld id="{5D063D89-8794-8A41-A79B-A67E558340AA}" type="slidenum">
               <a:rPr lang="en-US" smtClean="0"/>
               <a:t>‹#›</a:t>
             </a:fld>
@@ -2022,7 +1787,7 @@
     </p:spTree>
     <p:extLst>
       <p:ext uri="{BB962C8B-B14F-4D97-AF65-F5344CB8AC3E}">
-        <p14:creationId xmlns:p14="http://schemas.microsoft.com/office/powerpoint/2010/main" val="1106616191"/>
+        <p14:creationId xmlns:p14="http://schemas.microsoft.com/office/powerpoint/2010/main" val="337610149"/>
       </p:ext>
     </p:extLst>
   </p:cSld>
@@ -2051,13 +1816,7 @@
       </p:grpSpPr>
       <p:sp>
         <p:nvSpPr>
-          <p:cNvPr id="2" name="Date Placeholder 1">
-            <a:extLst>
-              <a:ext uri="{FF2B5EF4-FFF2-40B4-BE49-F238E27FC236}">
-                <a16:creationId xmlns:a16="http://schemas.microsoft.com/office/drawing/2014/main" id="{93BA3B16-4349-5A36-CAB9-832C1AAF2E60}"/>
-              </a:ext>
-            </a:extLst>
-          </p:cNvPr>
+          <p:cNvPr id="2" name="Date Placeholder 1"/>
           <p:cNvSpPr>
             <a:spLocks noGrp="1"/>
           </p:cNvSpPr>
@@ -2070,9 +1829,9 @@
           <a:bodyPr/>
           <a:lstStyle/>
           <a:p>
-            <a:fld id="{EB296C15-0437-4146-9190-C1B2DE9A9101}" type="datetimeFigureOut">
+            <a:fld id="{E759A0DE-F190-5444-87AC-4719D5F20D15}" type="datetimeFigureOut">
               <a:rPr lang="en-US" smtClean="0"/>
-              <a:t>5/31/26</a:t>
+              <a:t>8/8/26</a:t>
             </a:fld>
             <a:endParaRPr lang="en-US"/>
           </a:p>
@@ -2080,13 +1839,7 @@
       </p:sp>
       <p:sp>
         <p:nvSpPr>
-          <p:cNvPr id="3" name="Footer Placeholder 2">
-            <a:extLst>
-              <a:ext uri="{FF2B5EF4-FFF2-40B4-BE49-F238E27FC236}">
-                <a16:creationId xmlns:a16="http://schemas.microsoft.com/office/drawing/2014/main" id="{0298383F-AAC4-FC28-0E50-56561D174183}"/>
-              </a:ext>
-            </a:extLst>
-          </p:cNvPr>
+          <p:cNvPr id="3" name="Footer Placeholder 2"/>
           <p:cNvSpPr>
             <a:spLocks noGrp="1"/>
           </p:cNvSpPr>
@@ -2105,13 +1858,7 @@
       </p:sp>
       <p:sp>
         <p:nvSpPr>
-          <p:cNvPr id="4" name="Slide Number Placeholder 3">
-            <a:extLst>
-              <a:ext uri="{FF2B5EF4-FFF2-40B4-BE49-F238E27FC236}">
-                <a16:creationId xmlns:a16="http://schemas.microsoft.com/office/drawing/2014/main" id="{A2FD2489-95BD-4DC2-B33E-AF3FF6A1B230}"/>
-              </a:ext>
-            </a:extLst>
-          </p:cNvPr>
+          <p:cNvPr id="4" name="Slide Number Placeholder 3"/>
           <p:cNvSpPr>
             <a:spLocks noGrp="1"/>
           </p:cNvSpPr>
@@ -2124,7 +1871,7 @@
           <a:bodyPr/>
           <a:lstStyle/>
           <a:p>
-            <a:fld id="{E1E4C99C-3176-8E41-8A8D-3C46093005DC}" type="slidenum">
+            <a:fld id="{5D063D89-8794-8A41-A79B-A67E558340AA}" type="slidenum">
               <a:rPr lang="en-US" smtClean="0"/>
               <a:t>‹#›</a:t>
             </a:fld>
@@ -2135,7 +1882,7 @@
     </p:spTree>
     <p:extLst>
       <p:ext uri="{BB962C8B-B14F-4D97-AF65-F5344CB8AC3E}">
-        <p14:creationId xmlns:p14="http://schemas.microsoft.com/office/powerpoint/2010/main" val="3578168418"/>
+        <p14:creationId xmlns:p14="http://schemas.microsoft.com/office/powerpoint/2010/main" val="3955326277"/>
       </p:ext>
     </p:extLst>
   </p:cSld>
@@ -2164,13 +1911,7 @@
       </p:grpSpPr>
       <p:sp>
         <p:nvSpPr>
-          <p:cNvPr id="2" name="Title 1">
-            <a:extLst>
-              <a:ext uri="{FF2B5EF4-FFF2-40B4-BE49-F238E27FC236}">
-                <a16:creationId xmlns:a16="http://schemas.microsoft.com/office/drawing/2014/main" id="{B9673422-F9B1-B667-FE90-964E95ACB4E6}"/>
-              </a:ext>
-            </a:extLst>
-          </p:cNvPr>
+          <p:cNvPr id="2" name="Title 1"/>
           <p:cNvSpPr>
             <a:spLocks noGrp="1"/>
           </p:cNvSpPr>
@@ -2180,8 +1921,8 @@
         </p:nvSpPr>
         <p:spPr>
           <a:xfrm>
-            <a:off x="839788" y="457200"/>
-            <a:ext cx="3932237" cy="1600200"/>
+            <a:off x="629841" y="457200"/>
+            <a:ext cx="2949178" cy="1600200"/>
           </a:xfrm>
         </p:spPr>
         <p:txBody>
@@ -2196,18 +1937,13 @@
               <a:rPr lang="en-US"/>
               <a:t>Click to edit Master title style</a:t>
             </a:r>
-          </a:p>
-        </p:txBody>
-      </p:sp>
-      <p:sp>
-        <p:nvSpPr>
-          <p:cNvPr id="3" name="Content Placeholder 2">
-            <a:extLst>
-              <a:ext uri="{FF2B5EF4-FFF2-40B4-BE49-F238E27FC236}">
-                <a16:creationId xmlns:a16="http://schemas.microsoft.com/office/drawing/2014/main" id="{92C3B837-386F-4F37-31BE-92F6C7A6EA20}"/>
-              </a:ext>
-            </a:extLst>
-          </p:cNvPr>
+            <a:endParaRPr lang="en-US" dirty="0"/>
+          </a:p>
+        </p:txBody>
+      </p:sp>
+      <p:sp>
+        <p:nvSpPr>
+          <p:cNvPr id="3" name="Content Placeholder 2"/>
           <p:cNvSpPr>
             <a:spLocks noGrp="1"/>
           </p:cNvSpPr>
@@ -2217,8 +1953,8 @@
         </p:nvSpPr>
         <p:spPr>
           <a:xfrm>
-            <a:off x="5183188" y="987425"/>
-            <a:ext cx="6172200" cy="4873625"/>
+            <a:off x="3887391" y="987426"/>
+            <a:ext cx="4629150" cy="4873625"/>
           </a:xfrm>
         </p:spPr>
         <p:txBody>
@@ -2286,18 +2022,13 @@
               <a:rPr lang="en-US"/>
               <a:t>Fifth level</a:t>
             </a:r>
-          </a:p>
-        </p:txBody>
-      </p:sp>
-      <p:sp>
-        <p:nvSpPr>
-          <p:cNvPr id="4" name="Text Placeholder 3">
-            <a:extLst>
-              <a:ext uri="{FF2B5EF4-FFF2-40B4-BE49-F238E27FC236}">
-                <a16:creationId xmlns:a16="http://schemas.microsoft.com/office/drawing/2014/main" id="{840ED40E-D8F3-F611-6AB4-B2FBD8A26BD6}"/>
-              </a:ext>
-            </a:extLst>
-          </p:cNvPr>
+            <a:endParaRPr lang="en-US" dirty="0"/>
+          </a:p>
+        </p:txBody>
+      </p:sp>
+      <p:sp>
+        <p:nvSpPr>
+          <p:cNvPr id="4" name="Text Placeholder 3"/>
           <p:cNvSpPr>
             <a:spLocks noGrp="1"/>
           </p:cNvSpPr>
@@ -2307,8 +2038,8 @@
         </p:nvSpPr>
         <p:spPr>
           <a:xfrm>
-            <a:off x="839788" y="2057400"/>
-            <a:ext cx="3932237" cy="3811588"/>
+            <a:off x="629841" y="2057400"/>
+            <a:ext cx="2949178" cy="3811588"/>
           </a:xfrm>
         </p:spPr>
         <p:txBody>
@@ -2362,13 +2093,7 @@
       </p:sp>
       <p:sp>
         <p:nvSpPr>
-          <p:cNvPr id="5" name="Date Placeholder 4">
-            <a:extLst>
-              <a:ext uri="{FF2B5EF4-FFF2-40B4-BE49-F238E27FC236}">
-                <a16:creationId xmlns:a16="http://schemas.microsoft.com/office/drawing/2014/main" id="{4BA87103-7304-9671-B373-1A7EF0C64D9B}"/>
-              </a:ext>
-            </a:extLst>
-          </p:cNvPr>
+          <p:cNvPr id="5" name="Date Placeholder 4"/>
           <p:cNvSpPr>
             <a:spLocks noGrp="1"/>
           </p:cNvSpPr>
@@ -2381,9 +2106,9 @@
           <a:bodyPr/>
           <a:lstStyle/>
           <a:p>
-            <a:fld id="{EB296C15-0437-4146-9190-C1B2DE9A9101}" type="datetimeFigureOut">
+            <a:fld id="{E759A0DE-F190-5444-87AC-4719D5F20D15}" type="datetimeFigureOut">
               <a:rPr lang="en-US" smtClean="0"/>
-              <a:t>5/31/26</a:t>
+              <a:t>8/8/26</a:t>
             </a:fld>
             <a:endParaRPr lang="en-US"/>
           </a:p>
@@ -2391,13 +2116,7 @@
       </p:sp>
       <p:sp>
         <p:nvSpPr>
-          <p:cNvPr id="6" name="Footer Placeholder 5">
-            <a:extLst>
-              <a:ext uri="{FF2B5EF4-FFF2-40B4-BE49-F238E27FC236}">
-                <a16:creationId xmlns:a16="http://schemas.microsoft.com/office/drawing/2014/main" id="{4EB1A218-F218-C5F3-3F35-277E2D282F22}"/>
-              </a:ext>
-            </a:extLst>
-          </p:cNvPr>
+          <p:cNvPr id="6" name="Footer Placeholder 5"/>
           <p:cNvSpPr>
             <a:spLocks noGrp="1"/>
           </p:cNvSpPr>
@@ -2416,13 +2135,7 @@
       </p:sp>
       <p:sp>
         <p:nvSpPr>
-          <p:cNvPr id="7" name="Slide Number Placeholder 6">
-            <a:extLst>
-              <a:ext uri="{FF2B5EF4-FFF2-40B4-BE49-F238E27FC236}">
-                <a16:creationId xmlns:a16="http://schemas.microsoft.com/office/drawing/2014/main" id="{13A2EF44-DA9E-0F91-D052-803189F9B644}"/>
-              </a:ext>
-            </a:extLst>
-          </p:cNvPr>
+          <p:cNvPr id="7" name="Slide Number Placeholder 6"/>
           <p:cNvSpPr>
             <a:spLocks noGrp="1"/>
           </p:cNvSpPr>
@@ -2435,7 +2148,7 @@
           <a:bodyPr/>
           <a:lstStyle/>
           <a:p>
-            <a:fld id="{E1E4C99C-3176-8E41-8A8D-3C46093005DC}" type="slidenum">
+            <a:fld id="{5D063D89-8794-8A41-A79B-A67E558340AA}" type="slidenum">
               <a:rPr lang="en-US" smtClean="0"/>
               <a:t>‹#›</a:t>
             </a:fld>
@@ -2446,7 +2159,7 @@
     </p:spTree>
     <p:extLst>
       <p:ext uri="{BB962C8B-B14F-4D97-AF65-F5344CB8AC3E}">
-        <p14:creationId xmlns:p14="http://schemas.microsoft.com/office/powerpoint/2010/main" val="739873079"/>
+        <p14:creationId xmlns:p14="http://schemas.microsoft.com/office/powerpoint/2010/main" val="3914498153"/>
       </p:ext>
     </p:extLst>
   </p:cSld>
@@ -2475,13 +2188,7 @@
       </p:grpSpPr>
       <p:sp>
         <p:nvSpPr>
-          <p:cNvPr id="2" name="Title 1">
-            <a:extLst>
-              <a:ext uri="{FF2B5EF4-FFF2-40B4-BE49-F238E27FC236}">
-                <a16:creationId xmlns:a16="http://schemas.microsoft.com/office/drawing/2014/main" id="{752C9BB2-1DC6-919D-12AC-045F97706C67}"/>
-              </a:ext>
-            </a:extLst>
-          </p:cNvPr>
+          <p:cNvPr id="2" name="Title 1"/>
           <p:cNvSpPr>
             <a:spLocks noGrp="1"/>
           </p:cNvSpPr>
@@ -2491,8 +2198,8 @@
         </p:nvSpPr>
         <p:spPr>
           <a:xfrm>
-            <a:off x="839788" y="457200"/>
-            <a:ext cx="3932237" cy="1600200"/>
+            <a:off x="629841" y="457200"/>
+            <a:ext cx="2949178" cy="1600200"/>
           </a:xfrm>
         </p:spPr>
         <p:txBody>
@@ -2507,20 +2214,15 @@
               <a:rPr lang="en-US"/>
               <a:t>Click to edit Master title style</a:t>
             </a:r>
-          </a:p>
-        </p:txBody>
-      </p:sp>
-      <p:sp>
-        <p:nvSpPr>
-          <p:cNvPr id="3" name="Picture Placeholder 2">
-            <a:extLst>
-              <a:ext uri="{FF2B5EF4-FFF2-40B4-BE49-F238E27FC236}">
-                <a16:creationId xmlns:a16="http://schemas.microsoft.com/office/drawing/2014/main" id="{F23004D2-32BC-549F-29D7-D1431CE476D7}"/>
-              </a:ext>
-            </a:extLst>
-          </p:cNvPr>
-          <p:cNvSpPr>
-            <a:spLocks noGrp="1"/>
+            <a:endParaRPr lang="en-US" dirty="0"/>
+          </a:p>
+        </p:txBody>
+      </p:sp>
+      <p:sp>
+        <p:nvSpPr>
+          <p:cNvPr id="3" name="Picture Placeholder 2"/>
+          <p:cNvSpPr>
+            <a:spLocks noGrp="1" noChangeAspect="1"/>
           </p:cNvSpPr>
           <p:nvPr>
             <p:ph type="pic" idx="1"/>
@@ -2528,8 +2230,73 @@
         </p:nvSpPr>
         <p:spPr>
           <a:xfrm>
-            <a:off x="5183188" y="987425"/>
-            <a:ext cx="6172200" cy="4873625"/>
+            <a:off x="3887391" y="987426"/>
+            <a:ext cx="4629150" cy="4873625"/>
+          </a:xfrm>
+        </p:spPr>
+        <p:txBody>
+          <a:bodyPr anchor="t"/>
+          <a:lstStyle>
+            <a:lvl1pPr marL="0" indent="0">
+              <a:buNone/>
+              <a:defRPr sz="3200"/>
+            </a:lvl1pPr>
+            <a:lvl2pPr marL="457200" indent="0">
+              <a:buNone/>
+              <a:defRPr sz="2800"/>
+            </a:lvl2pPr>
+            <a:lvl3pPr marL="914400" indent="0">
+              <a:buNone/>
+              <a:defRPr sz="2400"/>
+            </a:lvl3pPr>
+            <a:lvl4pPr marL="1371600" indent="0">
+              <a:buNone/>
+              <a:defRPr sz="2000"/>
+            </a:lvl4pPr>
+            <a:lvl5pPr marL="1828800" indent="0">
+              <a:buNone/>
+              <a:defRPr sz="2000"/>
+            </a:lvl5pPr>
+            <a:lvl6pPr marL="2286000" indent="0">
+              <a:buNone/>
+              <a:defRPr sz="2000"/>
+            </a:lvl6pPr>
+            <a:lvl7pPr marL="2743200" indent="0">
+              <a:buNone/>
+              <a:defRPr sz="2000"/>
+            </a:lvl7pPr>
+            <a:lvl8pPr marL="3200400" indent="0">
+              <a:buNone/>
+              <a:defRPr sz="2000"/>
+            </a:lvl8pPr>
+            <a:lvl9pPr marL="3657600" indent="0">
+              <a:buNone/>
+              <a:defRPr sz="2000"/>
+            </a:lvl9pPr>
+          </a:lstStyle>
+          <a:p>
+            <a:r>
+              <a:rPr lang="en-US"/>
+              <a:t>Click icon to add picture</a:t>
+            </a:r>
+            <a:endParaRPr lang="en-US" dirty="0"/>
+          </a:p>
+        </p:txBody>
+      </p:sp>
+      <p:sp>
+        <p:nvSpPr>
+          <p:cNvPr id="4" name="Text Placeholder 3"/>
+          <p:cNvSpPr>
+            <a:spLocks noGrp="1"/>
+          </p:cNvSpPr>
+          <p:nvPr>
+            <p:ph type="body" sz="half" idx="2"/>
+          </p:nvPr>
+        </p:nvSpPr>
+        <p:spPr>
+          <a:xfrm>
+            <a:off x="629841" y="2057400"/>
+            <a:ext cx="2949178" cy="3811588"/>
           </a:xfrm>
         </p:spPr>
         <p:txBody>
@@ -2537,73 +2304,6 @@
           <a:lstStyle>
             <a:lvl1pPr marL="0" indent="0">
               <a:buNone/>
-              <a:defRPr sz="3200"/>
-            </a:lvl1pPr>
-            <a:lvl2pPr marL="457200" indent="0">
-              <a:buNone/>
-              <a:defRPr sz="2800"/>
-            </a:lvl2pPr>
-            <a:lvl3pPr marL="914400" indent="0">
-              <a:buNone/>
-              <a:defRPr sz="2400"/>
-            </a:lvl3pPr>
-            <a:lvl4pPr marL="1371600" indent="0">
-              <a:buNone/>
-              <a:defRPr sz="2000"/>
-            </a:lvl4pPr>
-            <a:lvl5pPr marL="1828800" indent="0">
-              <a:buNone/>
-              <a:defRPr sz="2000"/>
-            </a:lvl5pPr>
-            <a:lvl6pPr marL="2286000" indent="0">
-              <a:buNone/>
-              <a:defRPr sz="2000"/>
-            </a:lvl6pPr>
-            <a:lvl7pPr marL="2743200" indent="0">
-              <a:buNone/>
-              <a:defRPr sz="2000"/>
-            </a:lvl7pPr>
-            <a:lvl8pPr marL="3200400" indent="0">
-              <a:buNone/>
-              <a:defRPr sz="2000"/>
-            </a:lvl8pPr>
-            <a:lvl9pPr marL="3657600" indent="0">
-              <a:buNone/>
-              <a:defRPr sz="2000"/>
-            </a:lvl9pPr>
-          </a:lstStyle>
-          <a:p>
-            <a:endParaRPr lang="en-US"/>
-          </a:p>
-        </p:txBody>
-      </p:sp>
-      <p:sp>
-        <p:nvSpPr>
-          <p:cNvPr id="4" name="Text Placeholder 3">
-            <a:extLst>
-              <a:ext uri="{FF2B5EF4-FFF2-40B4-BE49-F238E27FC236}">
-                <a16:creationId xmlns:a16="http://schemas.microsoft.com/office/drawing/2014/main" id="{FD21BC66-3485-C44B-0E15-B6DACEDBD3B0}"/>
-              </a:ext>
-            </a:extLst>
-          </p:cNvPr>
-          <p:cNvSpPr>
-            <a:spLocks noGrp="1"/>
-          </p:cNvSpPr>
-          <p:nvPr>
-            <p:ph type="body" sz="half" idx="2"/>
-          </p:nvPr>
-        </p:nvSpPr>
-        <p:spPr>
-          <a:xfrm>
-            <a:off x="839788" y="2057400"/>
-            <a:ext cx="3932237" cy="3811588"/>
-          </a:xfrm>
-        </p:spPr>
-        <p:txBody>
-          <a:bodyPr/>
-          <a:lstStyle>
-            <a:lvl1pPr marL="0" indent="0">
-              <a:buNone/>
               <a:defRPr sz="1600"/>
             </a:lvl1pPr>
             <a:lvl2pPr marL="457200" indent="0">
@@ -2650,13 +2350,7 @@
       </p:sp>
       <p:sp>
         <p:nvSpPr>
-          <p:cNvPr id="5" name="Date Placeholder 4">
-            <a:extLst>
-              <a:ext uri="{FF2B5EF4-FFF2-40B4-BE49-F238E27FC236}">
-                <a16:creationId xmlns:a16="http://schemas.microsoft.com/office/drawing/2014/main" id="{8FC2FF00-7DED-39FB-C6E0-0DF43C3C5C37}"/>
-              </a:ext>
-            </a:extLst>
-          </p:cNvPr>
+          <p:cNvPr id="5" name="Date Placeholder 4"/>
           <p:cNvSpPr>
             <a:spLocks noGrp="1"/>
           </p:cNvSpPr>
@@ -2669,9 +2363,9 @@
           <a:bodyPr/>
           <a:lstStyle/>
           <a:p>
-            <a:fld id="{EB296C15-0437-4146-9190-C1B2DE9A9101}" type="datetimeFigureOut">
+            <a:fld id="{E759A0DE-F190-5444-87AC-4719D5F20D15}" type="datetimeFigureOut">
               <a:rPr lang="en-US" smtClean="0"/>
-              <a:t>5/31/26</a:t>
+              <a:t>8/8/26</a:t>
             </a:fld>
             <a:endParaRPr lang="en-US"/>
           </a:p>
@@ -2679,13 +2373,7 @@
       </p:sp>
       <p:sp>
         <p:nvSpPr>
-          <p:cNvPr id="6" name="Footer Placeholder 5">
-            <a:extLst>
-              <a:ext uri="{FF2B5EF4-FFF2-40B4-BE49-F238E27FC236}">
-                <a16:creationId xmlns:a16="http://schemas.microsoft.com/office/drawing/2014/main" id="{12D3B69F-DC9A-C402-92CB-1A379F219DD3}"/>
-              </a:ext>
-            </a:extLst>
-          </p:cNvPr>
+          <p:cNvPr id="6" name="Footer Placeholder 5"/>
           <p:cNvSpPr>
             <a:spLocks noGrp="1"/>
           </p:cNvSpPr>
@@ -2704,13 +2392,7 @@
       </p:sp>
       <p:sp>
         <p:nvSpPr>
-          <p:cNvPr id="7" name="Slide Number Placeholder 6">
-            <a:extLst>
-              <a:ext uri="{FF2B5EF4-FFF2-40B4-BE49-F238E27FC236}">
-                <a16:creationId xmlns:a16="http://schemas.microsoft.com/office/drawing/2014/main" id="{8F955C9C-EC1F-2DEF-7C8C-8DF4CBE12248}"/>
-              </a:ext>
-            </a:extLst>
-          </p:cNvPr>
+          <p:cNvPr id="7" name="Slide Number Placeholder 6"/>
           <p:cNvSpPr>
             <a:spLocks noGrp="1"/>
           </p:cNvSpPr>
@@ -2723,7 +2405,7 @@
           <a:bodyPr/>
           <a:lstStyle/>
           <a:p>
-            <a:fld id="{E1E4C99C-3176-8E41-8A8D-3C46093005DC}" type="slidenum">
+            <a:fld id="{5D063D89-8794-8A41-A79B-A67E558340AA}" type="slidenum">
               <a:rPr lang="en-US" smtClean="0"/>
               <a:t>‹#›</a:t>
             </a:fld>
@@ -2734,7 +2416,7 @@
     </p:spTree>
     <p:extLst>
       <p:ext uri="{BB962C8B-B14F-4D97-AF65-F5344CB8AC3E}">
-        <p14:creationId xmlns:p14="http://schemas.microsoft.com/office/powerpoint/2010/main" val="2353039786"/>
+        <p14:creationId xmlns:p14="http://schemas.microsoft.com/office/powerpoint/2010/main" val="3657460948"/>
       </p:ext>
     </p:extLst>
   </p:cSld>
@@ -2768,13 +2450,7 @@
       </p:grpSpPr>
       <p:sp>
         <p:nvSpPr>
-          <p:cNvPr id="2" name="Title Placeholder 1">
-            <a:extLst>
-              <a:ext uri="{FF2B5EF4-FFF2-40B4-BE49-F238E27FC236}">
-                <a16:creationId xmlns:a16="http://schemas.microsoft.com/office/drawing/2014/main" id="{EB60D22B-73A9-DDB1-5435-00161BEC7084}"/>
-              </a:ext>
-            </a:extLst>
-          </p:cNvPr>
+          <p:cNvPr id="2" name="Title Placeholder 1"/>
           <p:cNvSpPr>
             <a:spLocks noGrp="1"/>
           </p:cNvSpPr>
@@ -2784,8 +2460,8 @@
         </p:nvSpPr>
         <p:spPr>
           <a:xfrm>
-            <a:off x="838200" y="365125"/>
-            <a:ext cx="10515600" cy="1325563"/>
+            <a:off x="628650" y="365126"/>
+            <a:ext cx="7886700" cy="1325563"/>
           </a:xfrm>
           <a:prstGeom prst="rect">
             <a:avLst/>
@@ -2801,18 +2477,13 @@
               <a:rPr lang="en-US"/>
               <a:t>Click to edit Master title style</a:t>
             </a:r>
-          </a:p>
-        </p:txBody>
-      </p:sp>
-      <p:sp>
-        <p:nvSpPr>
-          <p:cNvPr id="3" name="Text Placeholder 2">
-            <a:extLst>
-              <a:ext uri="{FF2B5EF4-FFF2-40B4-BE49-F238E27FC236}">
-                <a16:creationId xmlns:a16="http://schemas.microsoft.com/office/drawing/2014/main" id="{013BAF68-D3E3-69DA-379A-67AF6BF8258C}"/>
-              </a:ext>
-            </a:extLst>
-          </p:cNvPr>
+            <a:endParaRPr lang="en-US" dirty="0"/>
+          </a:p>
+        </p:txBody>
+      </p:sp>
+      <p:sp>
+        <p:nvSpPr>
+          <p:cNvPr id="3" name="Text Placeholder 2"/>
           <p:cNvSpPr>
             <a:spLocks noGrp="1"/>
           </p:cNvSpPr>
@@ -2822,8 +2493,8 @@
         </p:nvSpPr>
         <p:spPr>
           <a:xfrm>
-            <a:off x="838200" y="1825625"/>
-            <a:ext cx="10515600" cy="4351338"/>
+            <a:off x="628650" y="1825625"/>
+            <a:ext cx="7886700" cy="4351338"/>
           </a:xfrm>
           <a:prstGeom prst="rect">
             <a:avLst/>
@@ -2868,18 +2539,13 @@
               <a:rPr lang="en-US"/>
               <a:t>Fifth level</a:t>
             </a:r>
-          </a:p>
-        </p:txBody>
-      </p:sp>
-      <p:sp>
-        <p:nvSpPr>
-          <p:cNvPr id="4" name="Date Placeholder 3">
-            <a:extLst>
-              <a:ext uri="{FF2B5EF4-FFF2-40B4-BE49-F238E27FC236}">
-                <a16:creationId xmlns:a16="http://schemas.microsoft.com/office/drawing/2014/main" id="{95876765-1CB4-5B0B-0842-1967D3B44DD6}"/>
-              </a:ext>
-            </a:extLst>
-          </p:cNvPr>
+            <a:endParaRPr lang="en-US" dirty="0"/>
+          </a:p>
+        </p:txBody>
+      </p:sp>
+      <p:sp>
+        <p:nvSpPr>
+          <p:cNvPr id="4" name="Date Placeholder 3"/>
           <p:cNvSpPr>
             <a:spLocks noGrp="1"/>
           </p:cNvSpPr>
@@ -2889,8 +2555,8 @@
         </p:nvSpPr>
         <p:spPr>
           <a:xfrm>
-            <a:off x="838200" y="6356350"/>
-            <a:ext cx="2743200" cy="365125"/>
+            <a:off x="628650" y="6356351"/>
+            <a:ext cx="2057400" cy="365125"/>
           </a:xfrm>
           <a:prstGeom prst="rect">
             <a:avLst/>
@@ -2910,9 +2576,9 @@
             </a:lvl1pPr>
           </a:lstStyle>
           <a:p>
-            <a:fld id="{EB296C15-0437-4146-9190-C1B2DE9A9101}" type="datetimeFigureOut">
+            <a:fld id="{E759A0DE-F190-5444-87AC-4719D5F20D15}" type="datetimeFigureOut">
               <a:rPr lang="en-US" smtClean="0"/>
-              <a:t>5/31/26</a:t>
+              <a:t>8/8/26</a:t>
             </a:fld>
             <a:endParaRPr lang="en-US"/>
           </a:p>
@@ -2920,13 +2586,7 @@
       </p:sp>
       <p:sp>
         <p:nvSpPr>
-          <p:cNvPr id="5" name="Footer Placeholder 4">
-            <a:extLst>
-              <a:ext uri="{FF2B5EF4-FFF2-40B4-BE49-F238E27FC236}">
-                <a16:creationId xmlns:a16="http://schemas.microsoft.com/office/drawing/2014/main" id="{BCB48C1D-5B4B-885D-6825-C294454C2DA7}"/>
-              </a:ext>
-            </a:extLst>
-          </p:cNvPr>
+          <p:cNvPr id="5" name="Footer Placeholder 4"/>
           <p:cNvSpPr>
             <a:spLocks noGrp="1"/>
           </p:cNvSpPr>
@@ -2936,8 +2596,8 @@
         </p:nvSpPr>
         <p:spPr>
           <a:xfrm>
-            <a:off x="4038600" y="6356350"/>
-            <a:ext cx="4114800" cy="365125"/>
+            <a:off x="3028950" y="6356351"/>
+            <a:ext cx="3086100" cy="365125"/>
           </a:xfrm>
           <a:prstGeom prst="rect">
             <a:avLst/>
@@ -2963,13 +2623,7 @@
       </p:sp>
       <p:sp>
         <p:nvSpPr>
-          <p:cNvPr id="6" name="Slide Number Placeholder 5">
-            <a:extLst>
-              <a:ext uri="{FF2B5EF4-FFF2-40B4-BE49-F238E27FC236}">
-                <a16:creationId xmlns:a16="http://schemas.microsoft.com/office/drawing/2014/main" id="{B8FB6782-76FA-4E2D-657E-F224E8E1F71D}"/>
-              </a:ext>
-            </a:extLst>
-          </p:cNvPr>
+          <p:cNvPr id="6" name="Slide Number Placeholder 5"/>
           <p:cNvSpPr>
             <a:spLocks noGrp="1"/>
           </p:cNvSpPr>
@@ -2979,8 +2633,8 @@
         </p:nvSpPr>
         <p:spPr>
           <a:xfrm>
-            <a:off x="8610600" y="6356350"/>
-            <a:ext cx="2743200" cy="365125"/>
+            <a:off x="6457950" y="6356351"/>
+            <a:ext cx="2057400" cy="365125"/>
           </a:xfrm>
           <a:prstGeom prst="rect">
             <a:avLst/>
@@ -3000,7 +2654,7 @@
             </a:lvl1pPr>
           </a:lstStyle>
           <a:p>
-            <a:fld id="{E1E4C99C-3176-8E41-8A8D-3C46093005DC}" type="slidenum">
+            <a:fld id="{5D063D89-8794-8A41-A79B-A67E558340AA}" type="slidenum">
               <a:rPr lang="en-US" smtClean="0"/>
               <a:t>‹#›</a:t>
             </a:fld>
@@ -3011,23 +2665,23 @@
     </p:spTree>
     <p:extLst>
       <p:ext uri="{BB962C8B-B14F-4D97-AF65-F5344CB8AC3E}">
-        <p14:creationId xmlns:p14="http://schemas.microsoft.com/office/powerpoint/2010/main" val="3823466276"/>
+        <p14:creationId xmlns:p14="http://schemas.microsoft.com/office/powerpoint/2010/main" val="48467931"/>
       </p:ext>
     </p:extLst>
   </p:cSld>
   <p:clrMap bg1="lt1" tx1="dk1" bg2="lt2" tx2="dk2" accent1="accent1" accent2="accent2" accent3="accent3" accent4="accent4" accent5="accent5" accent6="accent6" hlink="hlink" folHlink="folHlink"/>
   <p:sldLayoutIdLst>
-    <p:sldLayoutId id="2147483649" r:id="rId1"/>
-    <p:sldLayoutId id="2147483650" r:id="rId2"/>
-    <p:sldLayoutId id="2147483651" r:id="rId3"/>
-    <p:sldLayoutId id="2147483652" r:id="rId4"/>
-    <p:sldLayoutId id="2147483653" r:id="rId5"/>
-    <p:sldLayoutId id="2147483654" r:id="rId6"/>
-    <p:sldLayoutId id="2147483655" r:id="rId7"/>
-    <p:sldLayoutId id="2147483656" r:id="rId8"/>
-    <p:sldLayoutId id="2147483657" r:id="rId9"/>
-    <p:sldLayoutId id="2147483658" r:id="rId10"/>
-    <p:sldLayoutId id="2147483659" r:id="rId11"/>
+    <p:sldLayoutId id="2147483661" r:id="rId1"/>
+    <p:sldLayoutId id="2147483662" r:id="rId2"/>
+    <p:sldLayoutId id="2147483663" r:id="rId3"/>
+    <p:sldLayoutId id="2147483664" r:id="rId4"/>
+    <p:sldLayoutId id="2147483665" r:id="rId5"/>
+    <p:sldLayoutId id="2147483666" r:id="rId6"/>
+    <p:sldLayoutId id="2147483667" r:id="rId7"/>
+    <p:sldLayoutId id="2147483668" r:id="rId8"/>
+    <p:sldLayoutId id="2147483669" r:id="rId9"/>
+    <p:sldLayoutId id="2147483670" r:id="rId10"/>
+    <p:sldLayoutId id="2147483671" r:id="rId11"/>
   </p:sldLayoutIdLst>
   <p:txStyles>
     <p:titleStyle>
@@ -3318,7 +2972,7 @@
     <p:bg>
       <p:bgPr>
         <a:solidFill>
-          <a:schemeClr val="bg1"/>
+          <a:schemeClr val="tx1"/>
         </a:solidFill>
         <a:effectLst/>
       </p:bgPr>
@@ -3328,7 +2982,7 @@
         <p:cNvPr id="1" name="">
           <a:extLst>
             <a:ext uri="{FF2B5EF4-FFF2-40B4-BE49-F238E27FC236}">
-              <a16:creationId xmlns:a16="http://schemas.microsoft.com/office/drawing/2014/main" id="{8EC6DE33-751C-92B4-7B0B-7315139E6835}"/>
+              <a16:creationId xmlns:a16="http://schemas.microsoft.com/office/drawing/2014/main" id="{0C7F1709-70D9-7011-5D92-F7E57F5604D0}"/>
             </a:ext>
           </a:extLst>
         </p:cNvPr>
@@ -3343,468 +2997,453 @@
           <a:chExt cx="0" cy="0"/>
         </a:xfrm>
       </p:grpSpPr>
-      <p:sp useBgFill="1">
-        <p:nvSpPr>
-          <p:cNvPr id="9" name="Rectangle 8">
+      <p:sp>
+        <p:nvSpPr>
+          <p:cNvPr id="3" name="Subtitle 2">
             <a:extLst>
               <a:ext uri="{FF2B5EF4-FFF2-40B4-BE49-F238E27FC236}">
-                <a16:creationId xmlns:a16="http://schemas.microsoft.com/office/drawing/2014/main" id="{E91DC736-0EF8-4F87-9146-EBF1D2EE4D3D}"/>
-              </a:ext>
-              <a:ext uri="{C183D7F6-B498-43B3-948B-1728B52AA6E4}">
-                <adec:decorative xmlns:adec="http://schemas.microsoft.com/office/drawing/2017/decorative" val="1"/>
+                <a16:creationId xmlns:a16="http://schemas.microsoft.com/office/drawing/2014/main" id="{C25DBF04-8174-1226-1E95-AC7FB0F1B0E0}"/>
               </a:ext>
             </a:extLst>
           </p:cNvPr>
           <p:cNvSpPr>
-            <a:spLocks noGrp="1" noRot="1" noChangeAspect="1" noMove="1" noResize="1" noEditPoints="1" noAdjustHandles="1" noChangeArrowheads="1" noChangeShapeType="1" noTextEdit="1"/>
-          </p:cNvSpPr>
-          <p:nvPr>
-            <p:extLst>
-              <p:ext uri="{386F3935-93C4-4BCD-93E2-E3B085C9AB24}">
-                <p16:designElem xmlns:p16="http://schemas.microsoft.com/office/powerpoint/2015/main" val="1"/>
-              </p:ext>
-            </p:extLst>
+            <a:spLocks noGrp="1"/>
+          </p:cNvSpPr>
+          <p:nvPr>
+            <p:ph type="subTitle" idx="1"/>
           </p:nvPr>
         </p:nvSpPr>
         <p:spPr>
           <a:xfrm>
-            <a:off x="0" y="0"/>
-            <a:ext cx="12192000" cy="6858000"/>
+            <a:off x="84221" y="213360"/>
+            <a:ext cx="8891337" cy="6416040"/>
+          </a:xfrm>
+        </p:spPr>
+        <p:txBody>
+          <a:bodyPr>
+            <a:noAutofit/>
+          </a:bodyPr>
+          <a:lstStyle/>
+          <a:p>
+            <a:pPr algn="l"/>
+            <a:r>
+              <a:rPr lang="en-US" sz="6600" dirty="0">
+                <a:solidFill>
+                  <a:schemeClr val="bg1"/>
+                </a:solidFill>
+                <a:latin typeface="Avenir Medium" panose="02000503020000020003" pitchFamily="2" charset="0"/>
+                <a:ea typeface="Bodoni Ornaments" pitchFamily="2" charset="0"/>
+              </a:rPr>
+              <a:t>His Mercy Is More</a:t>
+            </a:r>
+          </a:p>
+        </p:txBody>
+      </p:sp>
+      <p:sp>
+        <p:nvSpPr>
+          <p:cNvPr id="2" name="TextBox 1">
+            <a:extLst>
+              <a:ext uri="{FF2B5EF4-FFF2-40B4-BE49-F238E27FC236}">
+                <a16:creationId xmlns:a16="http://schemas.microsoft.com/office/drawing/2014/main" id="{D83C3F84-7CD6-C8FC-E1D7-5140DCEA942D}"/>
+              </a:ext>
+            </a:extLst>
+          </p:cNvPr>
+          <p:cNvSpPr txBox="1"/>
+          <p:nvPr/>
+        </p:nvSpPr>
+        <p:spPr>
+          <a:xfrm>
+            <a:off x="168442" y="5444311"/>
+            <a:ext cx="8807115" cy="1200329"/>
           </a:xfrm>
           <a:prstGeom prst="rect">
             <a:avLst/>
           </a:prstGeom>
-          <a:ln>
-            <a:noFill/>
-          </a:ln>
+          <a:noFill/>
         </p:spPr>
-        <p:style>
-          <a:lnRef idx="2">
-            <a:schemeClr val="accent1">
-              <a:shade val="50000"/>
-            </a:schemeClr>
-          </a:lnRef>
-          <a:fillRef idx="1">
-            <a:schemeClr val="accent1"/>
-          </a:fillRef>
-          <a:effectRef idx="0">
-            <a:schemeClr val="accent1"/>
-          </a:effectRef>
-          <a:fontRef idx="minor">
-            <a:schemeClr val="lt1"/>
-          </a:fontRef>
-        </p:style>
-        <p:txBody>
-          <a:bodyPr rtlCol="0" anchor="ctr"/>
-          <a:lstStyle/>
-          <a:p>
-            <a:pPr marL="0" marR="0" lvl="0" indent="0" algn="ctr" defTabSz="914400" rtl="0" eaLnBrk="1" fontAlgn="auto" latinLnBrk="0" hangingPunct="1">
-              <a:lnSpc>
-                <a:spcPct val="100000"/>
-              </a:lnSpc>
-              <a:spcBef>
-                <a:spcPts val="0"/>
-              </a:spcBef>
-              <a:spcAft>
-                <a:spcPts val="0"/>
-              </a:spcAft>
-              <a:buClrTx/>
-              <a:buSzTx/>
-              <a:buFontTx/>
-              <a:buNone/>
-              <a:tabLst/>
-              <a:defRPr/>
-            </a:pPr>
-            <a:endParaRPr kumimoji="0" lang="en-US" sz="1800" b="0" i="0" u="none" strike="noStrike" kern="1200" cap="none" spc="0" normalizeH="0" baseline="0" noProof="0">
-              <a:ln>
-                <a:noFill/>
-              </a:ln>
-              <a:solidFill>
-                <a:prstClr val="white"/>
-              </a:solidFill>
-              <a:effectLst/>
-              <a:uLnTx/>
-              <a:uFillTx/>
-              <a:latin typeface="Aptos" panose="02110004020202020204"/>
-              <a:ea typeface="+mn-ea"/>
-              <a:cs typeface="+mn-cs"/>
-            </a:endParaRPr>
-          </a:p>
-        </p:txBody>
-      </p:sp>
-      <p:pic>
-        <p:nvPicPr>
-          <p:cNvPr id="4" name="Picture 3" descr="A mountain range reflected in a lake&#10;&#10;AI-generated content may be incorrect.">
+        <p:txBody>
+          <a:bodyPr wrap="square" rtlCol="0">
+            <a:spAutoFit/>
+          </a:bodyPr>
+          <a:lstStyle/>
+          <a:p>
+            <a:pPr algn="ctr"/>
+            <a:r>
+              <a:rPr lang="en-US" dirty="0">
+                <a:solidFill>
+                  <a:schemeClr val="bg1"/>
+                </a:solidFill>
+              </a:rPr>
+              <a:t>Words &amp; Musci Matt Boswell and Matt Papa in (2016)</a:t>
+            </a:r>
+          </a:p>
+          <a:p>
+            <a:pPr algn="ctr"/>
+            <a:r>
+              <a:rPr lang="en-US" dirty="0">
+                <a:solidFill>
+                  <a:schemeClr val="bg1"/>
+                </a:solidFill>
+              </a:rPr>
+              <a:t>© Messenger Hymns and Love Your Enemies Publishing (Administered by Music Services, Inc.)</a:t>
+            </a:r>
+          </a:p>
+          <a:p>
+            <a:pPr algn="ctr"/>
+            <a:r>
+              <a:rPr lang="en-US" dirty="0">
+                <a:solidFill>
+                  <a:schemeClr val="bg1"/>
+                </a:solidFill>
+              </a:rPr>
+              <a:t>CCLI License #137776</a:t>
+            </a:r>
+          </a:p>
+        </p:txBody>
+      </p:sp>
+    </p:spTree>
+    <p:extLst>
+      <p:ext uri="{BB962C8B-B14F-4D97-AF65-F5344CB8AC3E}">
+        <p14:creationId xmlns:p14="http://schemas.microsoft.com/office/powerpoint/2010/main" val="3164163406"/>
+      </p:ext>
+    </p:extLst>
+  </p:cSld>
+  <p:clrMapOvr>
+    <a:masterClrMapping/>
+  </p:clrMapOvr>
+</p:sld>
+</file>
+
+<file path=ppt/slides/slide10.xml><?xml version="1.0" encoding="utf-8"?>
+<p:sld xmlns:a="http://schemas.openxmlformats.org/drawingml/2006/main" xmlns:r="http://schemas.openxmlformats.org/officeDocument/2006/relationships" xmlns:p="http://schemas.openxmlformats.org/presentationml/2006/main">
+  <p:cSld>
+    <p:bg>
+      <p:bgPr>
+        <a:solidFill>
+          <a:schemeClr val="tx1"/>
+        </a:solidFill>
+        <a:effectLst/>
+      </p:bgPr>
+    </p:bg>
+    <p:spTree>
+      <p:nvGrpSpPr>
+        <p:cNvPr id="1" name="">
+          <a:extLst>
+            <a:ext uri="{FF2B5EF4-FFF2-40B4-BE49-F238E27FC236}">
+              <a16:creationId xmlns:a16="http://schemas.microsoft.com/office/drawing/2014/main" id="{D12A5CBD-9433-55FB-9219-617D6ADC1363}"/>
+            </a:ext>
+          </a:extLst>
+        </p:cNvPr>
+        <p:cNvGrpSpPr/>
+        <p:nvPr/>
+      </p:nvGrpSpPr>
+      <p:grpSpPr>
+        <a:xfrm>
+          <a:off x="0" y="0"/>
+          <a:ext cx="0" cy="0"/>
+          <a:chOff x="0" y="0"/>
+          <a:chExt cx="0" cy="0"/>
+        </a:xfrm>
+      </p:grpSpPr>
+      <p:sp>
+        <p:nvSpPr>
+          <p:cNvPr id="3" name="Subtitle 2">
             <a:extLst>
               <a:ext uri="{FF2B5EF4-FFF2-40B4-BE49-F238E27FC236}">
-                <a16:creationId xmlns:a16="http://schemas.microsoft.com/office/drawing/2014/main" id="{98BA084F-0CF8-8D13-165C-DA40FA2749B1}"/>
+                <a16:creationId xmlns:a16="http://schemas.microsoft.com/office/drawing/2014/main" id="{6FD5CFD7-2E17-B8A9-AD4D-18068B5D0EA6}"/>
               </a:ext>
             </a:extLst>
           </p:cNvPr>
-          <p:cNvPicPr>
-            <a:picLocks noChangeAspect="1"/>
-          </p:cNvPicPr>
-          <p:nvPr/>
-        </p:nvPicPr>
-        <p:blipFill>
-          <a:blip r:embed="rId2"/>
-          <a:srcRect l="11719" r="17612" b="9091"/>
-          <a:stretch>
-            <a:fillRect/>
-          </a:stretch>
-        </p:blipFill>
+          <p:cNvSpPr>
+            <a:spLocks noGrp="1"/>
+          </p:cNvSpPr>
+          <p:nvPr>
+            <p:ph type="subTitle" idx="1"/>
+          </p:nvPr>
+        </p:nvSpPr>
         <p:spPr>
           <a:xfrm>
-            <a:off x="3523488" y="10"/>
-            <a:ext cx="8668512" cy="6857990"/>
+            <a:off x="84221" y="213360"/>
+            <a:ext cx="8891337" cy="6416040"/>
           </a:xfrm>
-          <a:prstGeom prst="rect">
-            <a:avLst/>
-          </a:prstGeom>
         </p:spPr>
-      </p:pic>
-      <p:sp>
-        <p:nvSpPr>
-          <p:cNvPr id="11" name="Rectangle 10">
+        <p:txBody>
+          <a:bodyPr>
+            <a:noAutofit/>
+          </a:bodyPr>
+          <a:lstStyle/>
+          <a:p>
+            <a:endParaRPr lang="en-US" sz="4400" dirty="0">
+              <a:solidFill>
+                <a:schemeClr val="bg1"/>
+              </a:solidFill>
+              <a:latin typeface="Avenir Medium" panose="02000503020000020003" pitchFamily="2" charset="0"/>
+              <a:ea typeface="Bodoni Ornaments" pitchFamily="2" charset="0"/>
+            </a:endParaRPr>
+          </a:p>
+          <a:p>
+            <a:r>
+              <a:rPr lang="en-US" sz="4400" dirty="0">
+                <a:solidFill>
+                  <a:schemeClr val="bg1"/>
+                </a:solidFill>
+                <a:latin typeface="Avenir Medium" panose="02000503020000020003" pitchFamily="2" charset="0"/>
+                <a:ea typeface="Bodoni Ornaments" pitchFamily="2" charset="0"/>
+              </a:rPr>
+              <a:t>We stood 'neath a debt </a:t>
+            </a:r>
+          </a:p>
+          <a:p>
+            <a:r>
+              <a:rPr lang="en-US" sz="4400" dirty="0">
+                <a:solidFill>
+                  <a:schemeClr val="bg1"/>
+                </a:solidFill>
+                <a:latin typeface="Avenir Medium" panose="02000503020000020003" pitchFamily="2" charset="0"/>
+                <a:ea typeface="Bodoni Ornaments" pitchFamily="2" charset="0"/>
+              </a:rPr>
+              <a:t>we could never afford</a:t>
+            </a:r>
+          </a:p>
+          <a:p>
+            <a:endParaRPr lang="en-US" sz="4400" dirty="0">
+              <a:solidFill>
+                <a:schemeClr val="bg1"/>
+              </a:solidFill>
+              <a:latin typeface="Avenir Medium" panose="02000503020000020003" pitchFamily="2" charset="0"/>
+              <a:ea typeface="Bodoni Ornaments" pitchFamily="2" charset="0"/>
+            </a:endParaRPr>
+          </a:p>
+          <a:p>
+            <a:r>
+              <a:rPr lang="en-US" sz="4400" dirty="0">
+                <a:solidFill>
+                  <a:schemeClr val="bg1"/>
+                </a:solidFill>
+                <a:latin typeface="Avenir Medium" panose="02000503020000020003" pitchFamily="2" charset="0"/>
+                <a:ea typeface="Bodoni Ornaments" pitchFamily="2" charset="0"/>
+              </a:rPr>
+              <a:t>Our sins they are many, </a:t>
+            </a:r>
+          </a:p>
+          <a:p>
+            <a:r>
+              <a:rPr lang="en-US" sz="4400" dirty="0">
+                <a:solidFill>
+                  <a:schemeClr val="bg1"/>
+                </a:solidFill>
+                <a:latin typeface="Avenir Medium" panose="02000503020000020003" pitchFamily="2" charset="0"/>
+                <a:ea typeface="Bodoni Ornaments" pitchFamily="2" charset="0"/>
+              </a:rPr>
+              <a:t>His mercy is more</a:t>
+            </a:r>
+          </a:p>
+          <a:p>
+            <a:endParaRPr lang="en-US" sz="4400" dirty="0">
+              <a:solidFill>
+                <a:schemeClr val="bg1"/>
+              </a:solidFill>
+              <a:latin typeface="Avenir Medium" panose="02000503020000020003" pitchFamily="2" charset="0"/>
+              <a:ea typeface="Bodoni Ornaments" pitchFamily="2" charset="0"/>
+            </a:endParaRPr>
+          </a:p>
+        </p:txBody>
+      </p:sp>
+    </p:spTree>
+    <p:extLst>
+      <p:ext uri="{BB962C8B-B14F-4D97-AF65-F5344CB8AC3E}">
+        <p14:creationId xmlns:p14="http://schemas.microsoft.com/office/powerpoint/2010/main" val="1638430628"/>
+      </p:ext>
+    </p:extLst>
+  </p:cSld>
+  <p:clrMapOvr>
+    <a:masterClrMapping/>
+  </p:clrMapOvr>
+</p:sld>
+</file>
+
+<file path=ppt/slides/slide11.xml><?xml version="1.0" encoding="utf-8"?>
+<p:sld xmlns:a="http://schemas.openxmlformats.org/drawingml/2006/main" xmlns:r="http://schemas.openxmlformats.org/officeDocument/2006/relationships" xmlns:p="http://schemas.openxmlformats.org/presentationml/2006/main">
+  <p:cSld>
+    <p:bg>
+      <p:bgPr>
+        <a:solidFill>
+          <a:schemeClr val="tx1"/>
+        </a:solidFill>
+        <a:effectLst/>
+      </p:bgPr>
+    </p:bg>
+    <p:spTree>
+      <p:nvGrpSpPr>
+        <p:cNvPr id="1" name="">
+          <a:extLst>
+            <a:ext uri="{FF2B5EF4-FFF2-40B4-BE49-F238E27FC236}">
+              <a16:creationId xmlns:a16="http://schemas.microsoft.com/office/drawing/2014/main" id="{7E94477A-88DB-79D4-D478-C0ADA1A2AEE1}"/>
+            </a:ext>
+          </a:extLst>
+        </p:cNvPr>
+        <p:cNvGrpSpPr/>
+        <p:nvPr/>
+      </p:nvGrpSpPr>
+      <p:grpSpPr>
+        <a:xfrm>
+          <a:off x="0" y="0"/>
+          <a:ext cx="0" cy="0"/>
+          <a:chOff x="0" y="0"/>
+          <a:chExt cx="0" cy="0"/>
+        </a:xfrm>
+      </p:grpSpPr>
+      <p:sp>
+        <p:nvSpPr>
+          <p:cNvPr id="3" name="Subtitle 2">
             <a:extLst>
               <a:ext uri="{FF2B5EF4-FFF2-40B4-BE49-F238E27FC236}">
-                <a16:creationId xmlns:a16="http://schemas.microsoft.com/office/drawing/2014/main" id="{097CD68E-23E3-4007-8847-CD0944C4F7BE}"/>
-              </a:ext>
-              <a:ext uri="{C183D7F6-B498-43B3-948B-1728B52AA6E4}">
-                <adec:decorative xmlns:adec="http://schemas.microsoft.com/office/drawing/2017/decorative" val="1"/>
+                <a16:creationId xmlns:a16="http://schemas.microsoft.com/office/drawing/2014/main" id="{DFF35AD6-7068-BA91-8DAE-3E2CB44CE82A}"/>
               </a:ext>
             </a:extLst>
           </p:cNvPr>
           <p:cNvSpPr>
-            <a:spLocks noGrp="1" noRot="1" noChangeAspect="1" noMove="1" noResize="1" noEditPoints="1" noAdjustHandles="1" noChangeArrowheads="1" noChangeShapeType="1" noTextEdit="1"/>
-          </p:cNvSpPr>
-          <p:nvPr>
-            <p:extLst>
-              <p:ext uri="{386F3935-93C4-4BCD-93E2-E3B085C9AB24}">
-                <p16:designElem xmlns:p16="http://schemas.microsoft.com/office/powerpoint/2015/main" val="1"/>
-              </p:ext>
-            </p:extLst>
+            <a:spLocks noGrp="1"/>
+          </p:cNvSpPr>
+          <p:nvPr>
+            <p:ph type="subTitle" idx="1"/>
           </p:nvPr>
         </p:nvSpPr>
         <p:spPr>
           <a:xfrm>
-            <a:off x="0" y="0"/>
-            <a:ext cx="9756601" cy="6858000"/>
-          </a:xfrm>
-          <a:prstGeom prst="rect">
-            <a:avLst/>
-          </a:prstGeom>
-          <a:gradFill>
-            <a:gsLst>
-              <a:gs pos="58000">
-                <a:schemeClr val="bg1"/>
-              </a:gs>
-              <a:gs pos="35000">
-                <a:schemeClr val="bg1">
-                  <a:alpha val="79000"/>
-                </a:schemeClr>
-              </a:gs>
-              <a:gs pos="19000">
-                <a:schemeClr val="bg1">
-                  <a:alpha val="38000"/>
-                </a:schemeClr>
-              </a:gs>
-              <a:gs pos="0">
-                <a:schemeClr val="bg1">
-                  <a:alpha val="0"/>
-                </a:schemeClr>
-              </a:gs>
-              <a:gs pos="100000">
-                <a:schemeClr val="bg1"/>
-              </a:gs>
-            </a:gsLst>
-            <a:lin ang="10800000" scaled="0"/>
-          </a:gradFill>
-          <a:ln>
-            <a:noFill/>
-          </a:ln>
-        </p:spPr>
-        <p:style>
-          <a:lnRef idx="2">
-            <a:schemeClr val="accent1">
-              <a:shade val="50000"/>
-            </a:schemeClr>
-          </a:lnRef>
-          <a:fillRef idx="1">
-            <a:schemeClr val="accent1"/>
-          </a:fillRef>
-          <a:effectRef idx="0">
-            <a:schemeClr val="accent1"/>
-          </a:effectRef>
-          <a:fontRef idx="minor">
-            <a:schemeClr val="lt1"/>
-          </a:fontRef>
-        </p:style>
-        <p:txBody>
-          <a:bodyPr rtlCol="0" anchor="ctr"/>
-          <a:lstStyle/>
-          <a:p>
-            <a:pPr marL="0" marR="0" lvl="0" indent="0" algn="ctr" defTabSz="914400" rtl="0" eaLnBrk="1" fontAlgn="auto" latinLnBrk="0" hangingPunct="1">
-              <a:lnSpc>
-                <a:spcPct val="100000"/>
-              </a:lnSpc>
-              <a:spcBef>
-                <a:spcPts val="0"/>
-              </a:spcBef>
-              <a:spcAft>
-                <a:spcPts val="0"/>
-              </a:spcAft>
-              <a:buClrTx/>
-              <a:buSzTx/>
-              <a:buFontTx/>
-              <a:buNone/>
-              <a:tabLst/>
-              <a:defRPr/>
-            </a:pPr>
-            <a:endParaRPr kumimoji="0" lang="en-US" sz="1800" b="0" i="0" u="none" strike="noStrike" kern="1200" cap="none" spc="0" normalizeH="0" baseline="0" noProof="0" dirty="0">
-              <a:ln>
-                <a:noFill/>
-              </a:ln>
-              <a:solidFill>
-                <a:prstClr val="white"/>
-              </a:solidFill>
-              <a:effectLst/>
-              <a:uLnTx/>
-              <a:uFillTx/>
-              <a:latin typeface="Aptos" panose="02110004020202020204"/>
-              <a:ea typeface="+mn-ea"/>
-              <a:cs typeface="+mn-cs"/>
-            </a:endParaRPr>
-          </a:p>
-        </p:txBody>
-      </p:sp>
-      <p:sp>
-        <p:nvSpPr>
-          <p:cNvPr id="3" name="Subtitle 2">
-            <a:extLst>
-              <a:ext uri="{FF2B5EF4-FFF2-40B4-BE49-F238E27FC236}">
-                <a16:creationId xmlns:a16="http://schemas.microsoft.com/office/drawing/2014/main" id="{9D925259-27FF-FECE-3C92-C339F33447E1}"/>
-              </a:ext>
-            </a:extLst>
-          </p:cNvPr>
-          <p:cNvSpPr>
-            <a:spLocks noGrp="1"/>
-          </p:cNvSpPr>
-          <p:nvPr>
-            <p:ph type="subTitle" idx="1"/>
-          </p:nvPr>
-        </p:nvSpPr>
-        <p:spPr>
-          <a:xfrm>
-            <a:off x="477980" y="4872922"/>
-            <a:ext cx="4497781" cy="1208141"/>
+            <a:off x="84221" y="213360"/>
+            <a:ext cx="8891337" cy="6416040"/>
           </a:xfrm>
         </p:spPr>
         <p:txBody>
           <a:bodyPr>
-            <a:normAutofit/>
+            <a:noAutofit/>
           </a:bodyPr>
           <a:lstStyle/>
           <a:p>
-            <a:pPr algn="l"/>
-            <a:endParaRPr lang="en-US" sz="2000" dirty="0">
+            <a:endParaRPr lang="en-US" sz="4400" dirty="0">
+              <a:solidFill>
+                <a:schemeClr val="bg1"/>
+              </a:solidFill>
               <a:latin typeface="Avenir Medium" panose="02000503020000020003" pitchFamily="2" charset="0"/>
               <a:ea typeface="Bodoni Ornaments" pitchFamily="2" charset="0"/>
             </a:endParaRPr>
           </a:p>
           <a:p>
-            <a:pPr algn="l"/>
-            <a:r>
-              <a:rPr lang="en-US" sz="4000" i="1" dirty="0">
-                <a:latin typeface="Avenir Oblique" panose="02000503020000020003" pitchFamily="2" charset="0"/>
+            <a:r>
+              <a:rPr lang="en-US" sz="4400" dirty="0">
+                <a:solidFill>
+                  <a:schemeClr val="bg1"/>
+                </a:solidFill>
+                <a:latin typeface="Avenir Medium" panose="02000503020000020003" pitchFamily="2" charset="0"/>
                 <a:ea typeface="Bodoni Ornaments" pitchFamily="2" charset="0"/>
               </a:rPr>
-              <a:t>His Mercy is More</a:t>
-            </a:r>
-          </a:p>
-        </p:txBody>
-      </p:sp>
-      <p:sp>
-        <p:nvSpPr>
-          <p:cNvPr id="13" name="Rectangle 12">
-            <a:extLst>
-              <a:ext uri="{FF2B5EF4-FFF2-40B4-BE49-F238E27FC236}">
-                <a16:creationId xmlns:a16="http://schemas.microsoft.com/office/drawing/2014/main" id="{AF2F604E-43BE-4DC3-B983-E071523364F8}"/>
-              </a:ext>
-              <a:ext uri="{C183D7F6-B498-43B3-948B-1728B52AA6E4}">
-                <adec:decorative xmlns:adec="http://schemas.microsoft.com/office/drawing/2017/decorative" val="1"/>
-              </a:ext>
-            </a:extLst>
-          </p:cNvPr>
-          <p:cNvSpPr>
-            <a:spLocks noGrp="1" noRot="1" noChangeAspect="1" noMove="1" noResize="1" noEditPoints="1" noAdjustHandles="1" noChangeArrowheads="1" noChangeShapeType="1" noTextEdit="1"/>
-          </p:cNvSpPr>
-          <p:nvPr>
-            <p:extLst>
-              <p:ext uri="{386F3935-93C4-4BCD-93E2-E3B085C9AB24}">
-                <p16:designElem xmlns:p16="http://schemas.microsoft.com/office/powerpoint/2015/main" val="1"/>
-              </p:ext>
-            </p:extLst>
-          </p:nvPr>
-        </p:nvSpPr>
-        <p:spPr>
-          <a:xfrm rot="5400000">
-            <a:off x="759921" y="346791"/>
-            <a:ext cx="146304" cy="704088"/>
-          </a:xfrm>
-          <a:prstGeom prst="rect">
-            <a:avLst/>
-          </a:prstGeom>
-          <a:solidFill>
-            <a:schemeClr val="accent2"/>
-          </a:solidFill>
-          <a:ln>
-            <a:noFill/>
-          </a:ln>
-        </p:spPr>
-        <p:style>
-          <a:lnRef idx="2">
-            <a:schemeClr val="accent1">
-              <a:shade val="50000"/>
-            </a:schemeClr>
-          </a:lnRef>
-          <a:fillRef idx="1">
-            <a:schemeClr val="accent1"/>
-          </a:fillRef>
-          <a:effectRef idx="0">
-            <a:schemeClr val="accent1"/>
-          </a:effectRef>
-          <a:fontRef idx="minor">
-            <a:schemeClr val="lt1"/>
-          </a:fontRef>
-        </p:style>
-        <p:txBody>
-          <a:bodyPr rtlCol="0" anchor="ctr"/>
-          <a:lstStyle/>
-          <a:p>
-            <a:pPr marL="0" marR="0" lvl="0" indent="0" algn="ctr" defTabSz="914400" rtl="0" eaLnBrk="1" fontAlgn="auto" latinLnBrk="0" hangingPunct="1">
-              <a:lnSpc>
-                <a:spcPct val="100000"/>
-              </a:lnSpc>
-              <a:spcBef>
-                <a:spcPts val="0"/>
-              </a:spcBef>
-              <a:spcAft>
-                <a:spcPts val="0"/>
-              </a:spcAft>
-              <a:buClrTx/>
-              <a:buSzTx/>
-              <a:buFontTx/>
-              <a:buNone/>
-              <a:tabLst/>
-              <a:defRPr/>
-            </a:pPr>
-            <a:endParaRPr kumimoji="0" lang="en-US" sz="1800" b="0" i="0" u="none" strike="noStrike" kern="1200" cap="none" spc="0" normalizeH="0" baseline="0" noProof="0">
-              <a:ln>
-                <a:noFill/>
-              </a:ln>
+              <a:t>Praise the Lord,</a:t>
+            </a:r>
+          </a:p>
+          <a:p>
+            <a:r>
+              <a:rPr lang="en-US" sz="4400" dirty="0">
+                <a:solidFill>
+                  <a:schemeClr val="bg1"/>
+                </a:solidFill>
+                <a:latin typeface="Avenir Medium" panose="02000503020000020003" pitchFamily="2" charset="0"/>
+                <a:ea typeface="Bodoni Ornaments" pitchFamily="2" charset="0"/>
+              </a:rPr>
+              <a:t>His mercy is more</a:t>
+            </a:r>
+          </a:p>
+          <a:p>
+            <a:endParaRPr lang="en-US" sz="4400" dirty="0">
               <a:solidFill>
-                <a:prstClr val="white"/>
+                <a:schemeClr val="bg1"/>
               </a:solidFill>
-              <a:effectLst/>
-              <a:uLnTx/>
-              <a:uFillTx/>
-              <a:latin typeface="Calibri" panose="020F0502020204030204"/>
-              <a:ea typeface="+mn-ea"/>
-              <a:cs typeface="+mn-cs"/>
+              <a:latin typeface="Avenir Medium" panose="02000503020000020003" pitchFamily="2" charset="0"/>
+              <a:ea typeface="Bodoni Ornaments" pitchFamily="2" charset="0"/>
             </a:endParaRPr>
           </a:p>
-        </p:txBody>
-      </p:sp>
-      <p:sp>
-        <p:nvSpPr>
-          <p:cNvPr id="15" name="Rectangle 14">
-            <a:extLst>
-              <a:ext uri="{FF2B5EF4-FFF2-40B4-BE49-F238E27FC236}">
-                <a16:creationId xmlns:a16="http://schemas.microsoft.com/office/drawing/2014/main" id="{08C9B587-E65E-4B52-B37C-ABEBB6E87928}"/>
-              </a:ext>
-              <a:ext uri="{C183D7F6-B498-43B3-948B-1728B52AA6E4}">
-                <adec:decorative xmlns:adec="http://schemas.microsoft.com/office/drawing/2017/decorative" val="1"/>
-              </a:ext>
-            </a:extLst>
-          </p:cNvPr>
-          <p:cNvSpPr>
-            <a:spLocks noGrp="1" noRot="1" noChangeAspect="1" noMove="1" noResize="1" noEditPoints="1" noAdjustHandles="1" noChangeArrowheads="1" noChangeShapeType="1" noTextEdit="1"/>
-          </p:cNvSpPr>
-          <p:nvPr>
-            <p:extLst>
-              <p:ext uri="{386F3935-93C4-4BCD-93E2-E3B085C9AB24}">
-                <p16:designElem xmlns:p16="http://schemas.microsoft.com/office/powerpoint/2015/main" val="1"/>
-              </p:ext>
-            </p:extLst>
-          </p:nvPr>
-        </p:nvSpPr>
-        <p:spPr>
-          <a:xfrm>
-            <a:off x="481029" y="4546920"/>
-            <a:ext cx="3977640" cy="18288"/>
-          </a:xfrm>
-          <a:prstGeom prst="rect">
-            <a:avLst/>
-          </a:prstGeom>
-          <a:solidFill>
-            <a:srgbClr val="D5D5D5"/>
-          </a:solidFill>
-          <a:ln w="3175">
-            <a:noFill/>
-          </a:ln>
-          <a:effectLst/>
-        </p:spPr>
-        <p:style>
-          <a:lnRef idx="2">
-            <a:schemeClr val="accent1">
-              <a:shade val="50000"/>
-            </a:schemeClr>
-          </a:lnRef>
-          <a:fillRef idx="1">
-            <a:schemeClr val="accent1"/>
-          </a:fillRef>
-          <a:effectRef idx="0">
-            <a:schemeClr val="accent1"/>
-          </a:effectRef>
-          <a:fontRef idx="minor">
-            <a:schemeClr val="lt1"/>
-          </a:fontRef>
-        </p:style>
-        <p:txBody>
-          <a:bodyPr rtlCol="0" anchor="ctr"/>
-          <a:lstStyle/>
-          <a:p>
-            <a:pPr marL="0" marR="0" lvl="0" indent="0" algn="ctr" defTabSz="914400" rtl="0" eaLnBrk="1" fontAlgn="auto" latinLnBrk="0" hangingPunct="1">
-              <a:lnSpc>
-                <a:spcPct val="100000"/>
-              </a:lnSpc>
-              <a:spcBef>
-                <a:spcPts val="0"/>
-              </a:spcBef>
-              <a:spcAft>
-                <a:spcPts val="0"/>
-              </a:spcAft>
-              <a:buClrTx/>
-              <a:buSzTx/>
-              <a:buFontTx/>
-              <a:buNone/>
-              <a:tabLst/>
-              <a:defRPr/>
-            </a:pPr>
-            <a:endParaRPr kumimoji="0" lang="en-US" sz="1800" b="0" i="0" u="none" strike="noStrike" kern="1200" cap="none" spc="0" normalizeH="0" baseline="0" noProof="0">
-              <a:ln>
-                <a:noFill/>
-              </a:ln>
+          <a:p>
+            <a:r>
+              <a:rPr lang="en-US" sz="4400" dirty="0">
+                <a:solidFill>
+                  <a:schemeClr val="bg1"/>
+                </a:solidFill>
+                <a:latin typeface="Avenir Medium" panose="02000503020000020003" pitchFamily="2" charset="0"/>
+                <a:ea typeface="Bodoni Ornaments" pitchFamily="2" charset="0"/>
+              </a:rPr>
+              <a:t>Stronger than darkness, </a:t>
+            </a:r>
+          </a:p>
+          <a:p>
+            <a:r>
+              <a:rPr lang="en-US" sz="4400" dirty="0">
+                <a:solidFill>
+                  <a:schemeClr val="bg1"/>
+                </a:solidFill>
+                <a:latin typeface="Avenir Medium" panose="02000503020000020003" pitchFamily="2" charset="0"/>
+                <a:ea typeface="Bodoni Ornaments" pitchFamily="2" charset="0"/>
+              </a:rPr>
+              <a:t>new every morn</a:t>
+            </a:r>
+          </a:p>
+          <a:p>
+            <a:endParaRPr lang="en-US" sz="4400" dirty="0">
               <a:solidFill>
-                <a:prstClr val="white"/>
+                <a:schemeClr val="bg1"/>
               </a:solidFill>
-              <a:effectLst/>
-              <a:uLnTx/>
-              <a:uFillTx/>
-              <a:latin typeface="Calibri" panose="020F0502020204030204"/>
-              <a:ea typeface="+mn-ea"/>
-              <a:cs typeface="+mn-cs"/>
+              <a:latin typeface="Avenir Medium" panose="02000503020000020003" pitchFamily="2" charset="0"/>
+              <a:ea typeface="Bodoni Ornaments" pitchFamily="2" charset="0"/>
+            </a:endParaRPr>
+          </a:p>
+          <a:p>
+            <a:r>
+              <a:rPr lang="en-US" sz="4400" dirty="0">
+                <a:solidFill>
+                  <a:schemeClr val="bg1"/>
+                </a:solidFill>
+                <a:latin typeface="Avenir Medium" panose="02000503020000020003" pitchFamily="2" charset="0"/>
+                <a:ea typeface="Bodoni Ornaments" pitchFamily="2" charset="0"/>
+              </a:rPr>
+              <a:t>Our sins they are many, </a:t>
+            </a:r>
+          </a:p>
+          <a:p>
+            <a:r>
+              <a:rPr lang="en-US" sz="4400" dirty="0">
+                <a:solidFill>
+                  <a:schemeClr val="bg1"/>
+                </a:solidFill>
+                <a:latin typeface="Avenir Medium" panose="02000503020000020003" pitchFamily="2" charset="0"/>
+                <a:ea typeface="Bodoni Ornaments" pitchFamily="2" charset="0"/>
+              </a:rPr>
+              <a:t>His mercy is more</a:t>
+            </a:r>
+          </a:p>
+          <a:p>
+            <a:endParaRPr lang="en-US" sz="4400" dirty="0">
+              <a:solidFill>
+                <a:schemeClr val="bg1"/>
+              </a:solidFill>
+              <a:latin typeface="Avenir Medium" panose="02000503020000020003" pitchFamily="2" charset="0"/>
+              <a:ea typeface="Bodoni Ornaments" pitchFamily="2" charset="0"/>
+            </a:endParaRPr>
+          </a:p>
+          <a:p>
+            <a:endParaRPr lang="en-US" sz="4400" dirty="0">
+              <a:solidFill>
+                <a:schemeClr val="bg1"/>
+              </a:solidFill>
+              <a:latin typeface="Avenir Medium" panose="02000503020000020003" pitchFamily="2" charset="0"/>
+              <a:ea typeface="Bodoni Ornaments" pitchFamily="2" charset="0"/>
+            </a:endParaRPr>
+          </a:p>
+          <a:p>
+            <a:endParaRPr lang="en-US" sz="4400" dirty="0">
+              <a:solidFill>
+                <a:schemeClr val="bg1"/>
+              </a:solidFill>
+              <a:latin typeface="Avenir Medium" panose="02000503020000020003" pitchFamily="2" charset="0"/>
+              <a:ea typeface="Bodoni Ornaments" pitchFamily="2" charset="0"/>
             </a:endParaRPr>
           </a:p>
         </p:txBody>
@@ -3812,7 +3451,7 @@
     </p:spTree>
     <p:extLst>
       <p:ext uri="{BB962C8B-B14F-4D97-AF65-F5344CB8AC3E}">
-        <p14:creationId xmlns:p14="http://schemas.microsoft.com/office/powerpoint/2010/main" val="3104095367"/>
+        <p14:creationId xmlns:p14="http://schemas.microsoft.com/office/powerpoint/2010/main" val="3843892680"/>
       </p:ext>
     </p:extLst>
   </p:cSld>
@@ -3828,7 +3467,7 @@
     <p:bg>
       <p:bgPr>
         <a:solidFill>
-          <a:schemeClr val="accent1"/>
+          <a:schemeClr val="tx1"/>
         </a:solidFill>
         <a:effectLst/>
       </p:bgPr>
@@ -3838,7 +3477,7 @@
         <p:cNvPr id="1" name="">
           <a:extLst>
             <a:ext uri="{FF2B5EF4-FFF2-40B4-BE49-F238E27FC236}">
-              <a16:creationId xmlns:a16="http://schemas.microsoft.com/office/drawing/2014/main" id="{43ACF013-4574-2AD0-7BFD-6E771B7E5C0B}"/>
+              <a16:creationId xmlns:a16="http://schemas.microsoft.com/office/drawing/2014/main" id="{6B6DDA4A-E03B-8556-59B3-18DA3B2D1967}"/>
             </a:ext>
           </a:extLst>
         </p:cNvPr>
@@ -3858,7 +3497,7 @@
           <p:cNvPr id="3" name="Subtitle 2">
             <a:extLst>
               <a:ext uri="{FF2B5EF4-FFF2-40B4-BE49-F238E27FC236}">
-                <a16:creationId xmlns:a16="http://schemas.microsoft.com/office/drawing/2014/main" id="{F0FD9A51-1655-DF8C-52C5-2398AD7832C4}"/>
+                <a16:creationId xmlns:a16="http://schemas.microsoft.com/office/drawing/2014/main" id="{2618750F-9082-0A6E-6D44-28074BD5F0A4}"/>
               </a:ext>
             </a:extLst>
           </p:cNvPr>
@@ -3871,8 +3510,8 @@
         </p:nvSpPr>
         <p:spPr>
           <a:xfrm>
-            <a:off x="682831" y="497702"/>
-            <a:ext cx="10826338" cy="5862596"/>
+            <a:off x="84221" y="213360"/>
+            <a:ext cx="8891337" cy="6416040"/>
           </a:xfrm>
         </p:spPr>
         <p:txBody>
@@ -3898,7 +3537,19 @@
                 <a:latin typeface="Avenir Medium" panose="02000503020000020003" pitchFamily="2" charset="0"/>
                 <a:ea typeface="Bodoni Ornaments" pitchFamily="2" charset="0"/>
               </a:rPr>
-              <a:t>What love could remember, </a:t>
+              <a:t>Praise the Lord,</a:t>
+            </a:r>
+          </a:p>
+          <a:p>
+            <a:r>
+              <a:rPr lang="en-US" sz="4400" dirty="0">
+                <a:solidFill>
+                  <a:schemeClr val="bg1"/>
+                </a:solidFill>
+                <a:latin typeface="Avenir Medium" panose="02000503020000020003" pitchFamily="2" charset="0"/>
+                <a:ea typeface="Bodoni Ornaments" pitchFamily="2" charset="0"/>
+              </a:rPr>
+              <a:t>His mercy is more</a:t>
             </a:r>
           </a:p>
           <a:p>
@@ -3919,7 +3570,19 @@
                 <a:latin typeface="Avenir Medium" panose="02000503020000020003" pitchFamily="2" charset="0"/>
                 <a:ea typeface="Bodoni Ornaments" pitchFamily="2" charset="0"/>
               </a:rPr>
-              <a:t>no wrongs we have done</a:t>
+              <a:t>Stronger than darkness, </a:t>
+            </a:r>
+          </a:p>
+          <a:p>
+            <a:r>
+              <a:rPr lang="en-US" sz="4400" dirty="0">
+                <a:solidFill>
+                  <a:schemeClr val="bg1"/>
+                </a:solidFill>
+                <a:latin typeface="Avenir Medium" panose="02000503020000020003" pitchFamily="2" charset="0"/>
+                <a:ea typeface="Bodoni Ornaments" pitchFamily="2" charset="0"/>
+              </a:rPr>
+              <a:t>new every morn</a:t>
             </a:r>
           </a:p>
           <a:p>
@@ -3940,7 +3603,19 @@
                 <a:latin typeface="Avenir Medium" panose="02000503020000020003" pitchFamily="2" charset="0"/>
                 <a:ea typeface="Bodoni Ornaments" pitchFamily="2" charset="0"/>
               </a:rPr>
-              <a:t>Omniscient all-knowing, </a:t>
+              <a:t>Our sins they are many, </a:t>
+            </a:r>
+          </a:p>
+          <a:p>
+            <a:r>
+              <a:rPr lang="en-US" sz="4400" dirty="0">
+                <a:solidFill>
+                  <a:schemeClr val="bg1"/>
+                </a:solidFill>
+                <a:latin typeface="Avenir Medium" panose="02000503020000020003" pitchFamily="2" charset="0"/>
+                <a:ea typeface="Bodoni Ornaments" pitchFamily="2" charset="0"/>
+              </a:rPr>
+              <a:t>His mercy is more</a:t>
             </a:r>
           </a:p>
           <a:p>
@@ -3953,23 +3628,29 @@
             </a:endParaRPr>
           </a:p>
           <a:p>
-            <a:r>
-              <a:rPr lang="en-US" sz="4400" dirty="0">
-                <a:solidFill>
-                  <a:schemeClr val="bg1"/>
-                </a:solidFill>
-                <a:latin typeface="Avenir Medium" panose="02000503020000020003" pitchFamily="2" charset="0"/>
-                <a:ea typeface="Bodoni Ornaments" pitchFamily="2" charset="0"/>
-              </a:rPr>
-              <a:t>He counts not their sum</a:t>
-            </a:r>
+            <a:endParaRPr lang="en-US" sz="4400" dirty="0">
+              <a:solidFill>
+                <a:schemeClr val="bg1"/>
+              </a:solidFill>
+              <a:latin typeface="Avenir Medium" panose="02000503020000020003" pitchFamily="2" charset="0"/>
+              <a:ea typeface="Bodoni Ornaments" pitchFamily="2" charset="0"/>
+            </a:endParaRPr>
+          </a:p>
+          <a:p>
+            <a:endParaRPr lang="en-US" sz="4400" dirty="0">
+              <a:solidFill>
+                <a:schemeClr val="bg1"/>
+              </a:solidFill>
+              <a:latin typeface="Avenir Medium" panose="02000503020000020003" pitchFamily="2" charset="0"/>
+              <a:ea typeface="Bodoni Ornaments" pitchFamily="2" charset="0"/>
+            </a:endParaRPr>
           </a:p>
         </p:txBody>
       </p:sp>
     </p:spTree>
     <p:extLst>
       <p:ext uri="{BB962C8B-B14F-4D97-AF65-F5344CB8AC3E}">
-        <p14:creationId xmlns:p14="http://schemas.microsoft.com/office/powerpoint/2010/main" val="1606047208"/>
+        <p14:creationId xmlns:p14="http://schemas.microsoft.com/office/powerpoint/2010/main" val="2164526557"/>
       </p:ext>
     </p:extLst>
   </p:cSld>
@@ -3985,7 +3666,7 @@
     <p:bg>
       <p:bgPr>
         <a:solidFill>
-          <a:schemeClr val="accent1"/>
+          <a:schemeClr val="tx1"/>
         </a:solidFill>
         <a:effectLst/>
       </p:bgPr>
@@ -3995,7 +3676,7 @@
         <p:cNvPr id="1" name="">
           <a:extLst>
             <a:ext uri="{FF2B5EF4-FFF2-40B4-BE49-F238E27FC236}">
-              <a16:creationId xmlns:a16="http://schemas.microsoft.com/office/drawing/2014/main" id="{501D25B2-8BCB-DC3F-C1EC-DFADB7077289}"/>
+              <a16:creationId xmlns:a16="http://schemas.microsoft.com/office/drawing/2014/main" id="{B68579A6-F40B-1A3E-B86E-8261F8A93004}"/>
             </a:ext>
           </a:extLst>
         </p:cNvPr>
@@ -4015,7 +3696,7 @@
           <p:cNvPr id="3" name="Subtitle 2">
             <a:extLst>
               <a:ext uri="{FF2B5EF4-FFF2-40B4-BE49-F238E27FC236}">
-                <a16:creationId xmlns:a16="http://schemas.microsoft.com/office/drawing/2014/main" id="{1B7A9E97-41D2-88BA-DCF7-7F8873869E94}"/>
+                <a16:creationId xmlns:a16="http://schemas.microsoft.com/office/drawing/2014/main" id="{FBCDA21B-FE9E-0E98-A953-DC57E447DF9C}"/>
               </a:ext>
             </a:extLst>
           </p:cNvPr>
@@ -4028,8 +3709,8 @@
         </p:nvSpPr>
         <p:spPr>
           <a:xfrm>
-            <a:off x="682831" y="497702"/>
-            <a:ext cx="10826338" cy="5862596"/>
+            <a:off x="84221" y="213360"/>
+            <a:ext cx="8891337" cy="6416040"/>
           </a:xfrm>
         </p:spPr>
         <p:txBody>
@@ -4047,18 +3728,6 @@
             </a:endParaRPr>
           </a:p>
           <a:p>
-            <a:r>
-              <a:rPr lang="en-US" sz="4400" dirty="0">
-                <a:solidFill>
-                  <a:schemeClr val="bg1"/>
-                </a:solidFill>
-                <a:latin typeface="Avenir Medium" panose="02000503020000020003" pitchFamily="2" charset="0"/>
-                <a:ea typeface="Bodoni Ornaments" pitchFamily="2" charset="0"/>
-              </a:rPr>
-              <a:t>Thrown into a sea, </a:t>
-            </a:r>
-          </a:p>
-          <a:p>
             <a:endParaRPr lang="en-US" sz="4400" dirty="0">
               <a:solidFill>
                 <a:schemeClr val="bg1"/>
@@ -4076,7 +3745,19 @@
                 <a:latin typeface="Avenir Medium" panose="02000503020000020003" pitchFamily="2" charset="0"/>
                 <a:ea typeface="Bodoni Ornaments" pitchFamily="2" charset="0"/>
               </a:rPr>
-              <a:t>without bottom or shore</a:t>
+              <a:t>What love could remember, </a:t>
+            </a:r>
+          </a:p>
+          <a:p>
+            <a:r>
+              <a:rPr lang="en-US" sz="4400" dirty="0">
+                <a:solidFill>
+                  <a:schemeClr val="bg1"/>
+                </a:solidFill>
+                <a:latin typeface="Avenir Medium" panose="02000503020000020003" pitchFamily="2" charset="0"/>
+                <a:ea typeface="Bodoni Ornaments" pitchFamily="2" charset="0"/>
+              </a:rPr>
+              <a:t>no wrongs we have done</a:t>
             </a:r>
           </a:p>
           <a:p>
@@ -4097,7 +3778,19 @@
                 <a:latin typeface="Avenir Medium" panose="02000503020000020003" pitchFamily="2" charset="0"/>
                 <a:ea typeface="Bodoni Ornaments" pitchFamily="2" charset="0"/>
               </a:rPr>
-              <a:t>Our sins they are many, </a:t>
+              <a:t>Omniscient all-knowing, </a:t>
+            </a:r>
+          </a:p>
+          <a:p>
+            <a:r>
+              <a:rPr lang="en-US" sz="4400" dirty="0">
+                <a:solidFill>
+                  <a:schemeClr val="bg1"/>
+                </a:solidFill>
+                <a:latin typeface="Avenir Medium" panose="02000503020000020003" pitchFamily="2" charset="0"/>
+                <a:ea typeface="Bodoni Ornaments" pitchFamily="2" charset="0"/>
+              </a:rPr>
+              <a:t>He counts not their sum</a:t>
             </a:r>
           </a:p>
           <a:p>
@@ -4109,24 +3802,12 @@
               <a:ea typeface="Bodoni Ornaments" pitchFamily="2" charset="0"/>
             </a:endParaRPr>
           </a:p>
-          <a:p>
-            <a:r>
-              <a:rPr lang="en-US" sz="4400" dirty="0">
-                <a:solidFill>
-                  <a:schemeClr val="bg1"/>
-                </a:solidFill>
-                <a:latin typeface="Avenir Medium" panose="02000503020000020003" pitchFamily="2" charset="0"/>
-                <a:ea typeface="Bodoni Ornaments" pitchFamily="2" charset="0"/>
-              </a:rPr>
-              <a:t>His mercy is more</a:t>
-            </a:r>
-          </a:p>
         </p:txBody>
       </p:sp>
     </p:spTree>
     <p:extLst>
       <p:ext uri="{BB962C8B-B14F-4D97-AF65-F5344CB8AC3E}">
-        <p14:creationId xmlns:p14="http://schemas.microsoft.com/office/powerpoint/2010/main" val="2964281957"/>
+        <p14:creationId xmlns:p14="http://schemas.microsoft.com/office/powerpoint/2010/main" val="1674232681"/>
       </p:ext>
     </p:extLst>
   </p:cSld>
@@ -4142,7 +3823,7 @@
     <p:bg>
       <p:bgPr>
         <a:solidFill>
-          <a:schemeClr val="accent1"/>
+          <a:schemeClr val="tx1"/>
         </a:solidFill>
         <a:effectLst/>
       </p:bgPr>
@@ -4152,7 +3833,7 @@
         <p:cNvPr id="1" name="">
           <a:extLst>
             <a:ext uri="{FF2B5EF4-FFF2-40B4-BE49-F238E27FC236}">
-              <a16:creationId xmlns:a16="http://schemas.microsoft.com/office/drawing/2014/main" id="{CEAA817F-60B4-9AB9-EFC4-AAC3AA9B0C8E}"/>
+              <a16:creationId xmlns:a16="http://schemas.microsoft.com/office/drawing/2014/main" id="{BEA400D9-91AC-C740-378B-4CA05FD132E1}"/>
             </a:ext>
           </a:extLst>
         </p:cNvPr>
@@ -4172,7 +3853,7 @@
           <p:cNvPr id="3" name="Subtitle 2">
             <a:extLst>
               <a:ext uri="{FF2B5EF4-FFF2-40B4-BE49-F238E27FC236}">
-                <a16:creationId xmlns:a16="http://schemas.microsoft.com/office/drawing/2014/main" id="{17607DF9-90AB-0EC9-1C9C-C71ABF2ECBB6}"/>
+                <a16:creationId xmlns:a16="http://schemas.microsoft.com/office/drawing/2014/main" id="{C49C6225-A45A-181F-6FC7-92A1B7714A8A}"/>
               </a:ext>
             </a:extLst>
           </p:cNvPr>
@@ -4185,8 +3866,8 @@
         </p:nvSpPr>
         <p:spPr>
           <a:xfrm>
-            <a:off x="682831" y="497702"/>
-            <a:ext cx="10826338" cy="5862596"/>
+            <a:off x="84221" y="213360"/>
+            <a:ext cx="8891337" cy="6416040"/>
           </a:xfrm>
         </p:spPr>
         <p:txBody>
@@ -4212,7 +3893,19 @@
                 <a:latin typeface="Avenir Medium" panose="02000503020000020003" pitchFamily="2" charset="0"/>
                 <a:ea typeface="Bodoni Ornaments" pitchFamily="2" charset="0"/>
               </a:rPr>
-              <a:t>What patience would wait as we </a:t>
+              <a:t>Thrown into a sea, </a:t>
+            </a:r>
+          </a:p>
+          <a:p>
+            <a:r>
+              <a:rPr lang="en-US" sz="4400" dirty="0">
+                <a:solidFill>
+                  <a:schemeClr val="bg1"/>
+                </a:solidFill>
+                <a:latin typeface="Avenir Medium" panose="02000503020000020003" pitchFamily="2" charset="0"/>
+                <a:ea typeface="Bodoni Ornaments" pitchFamily="2" charset="0"/>
+              </a:rPr>
+              <a:t>without bottom or shore</a:t>
             </a:r>
           </a:p>
           <a:p>
@@ -4233,7 +3926,19 @@
                 <a:latin typeface="Avenir Medium" panose="02000503020000020003" pitchFamily="2" charset="0"/>
                 <a:ea typeface="Bodoni Ornaments" pitchFamily="2" charset="0"/>
               </a:rPr>
-              <a:t>constantly roam</a:t>
+              <a:t>Our sins they are many, </a:t>
+            </a:r>
+          </a:p>
+          <a:p>
+            <a:r>
+              <a:rPr lang="en-US" sz="4400" dirty="0">
+                <a:solidFill>
+                  <a:schemeClr val="bg1"/>
+                </a:solidFill>
+                <a:latin typeface="Avenir Medium" panose="02000503020000020003" pitchFamily="2" charset="0"/>
+                <a:ea typeface="Bodoni Ornaments" pitchFamily="2" charset="0"/>
+              </a:rPr>
+              <a:t>His mercy is more</a:t>
             </a:r>
           </a:p>
           <a:p>
@@ -4245,45 +3950,12 @@
               <a:ea typeface="Bodoni Ornaments" pitchFamily="2" charset="0"/>
             </a:endParaRPr>
           </a:p>
-          <a:p>
-            <a:r>
-              <a:rPr lang="en-US" sz="4400" dirty="0">
-                <a:solidFill>
-                  <a:schemeClr val="bg1"/>
-                </a:solidFill>
-                <a:latin typeface="Avenir Medium" panose="02000503020000020003" pitchFamily="2" charset="0"/>
-                <a:ea typeface="Bodoni Ornaments" pitchFamily="2" charset="0"/>
-              </a:rPr>
-              <a:t>What Father so tender </a:t>
-            </a:r>
-          </a:p>
-          <a:p>
-            <a:endParaRPr lang="en-US" sz="4400" dirty="0">
-              <a:solidFill>
-                <a:schemeClr val="bg1"/>
-              </a:solidFill>
-              <a:latin typeface="Avenir Medium" panose="02000503020000020003" pitchFamily="2" charset="0"/>
-              <a:ea typeface="Bodoni Ornaments" pitchFamily="2" charset="0"/>
-            </a:endParaRPr>
-          </a:p>
-          <a:p>
-            <a:r>
-              <a:rPr lang="en-US" sz="4400" dirty="0">
-                <a:solidFill>
-                  <a:schemeClr val="bg1"/>
-                </a:solidFill>
-                <a:latin typeface="Avenir Medium" panose="02000503020000020003" pitchFamily="2" charset="0"/>
-                <a:ea typeface="Bodoni Ornaments" pitchFamily="2" charset="0"/>
-              </a:rPr>
-              <a:t>is calling us home</a:t>
-            </a:r>
-          </a:p>
         </p:txBody>
       </p:sp>
     </p:spTree>
     <p:extLst>
       <p:ext uri="{BB962C8B-B14F-4D97-AF65-F5344CB8AC3E}">
-        <p14:creationId xmlns:p14="http://schemas.microsoft.com/office/powerpoint/2010/main" val="3536714320"/>
+        <p14:creationId xmlns:p14="http://schemas.microsoft.com/office/powerpoint/2010/main" val="218160180"/>
       </p:ext>
     </p:extLst>
   </p:cSld>
@@ -4299,7 +3971,7 @@
     <p:bg>
       <p:bgPr>
         <a:solidFill>
-          <a:schemeClr val="accent1"/>
+          <a:schemeClr val="tx1"/>
         </a:solidFill>
         <a:effectLst/>
       </p:bgPr>
@@ -4309,7 +3981,7 @@
         <p:cNvPr id="1" name="">
           <a:extLst>
             <a:ext uri="{FF2B5EF4-FFF2-40B4-BE49-F238E27FC236}">
-              <a16:creationId xmlns:a16="http://schemas.microsoft.com/office/drawing/2014/main" id="{4AB9699A-1C08-9EFB-9CF2-08D5FBAFF29C}"/>
+              <a16:creationId xmlns:a16="http://schemas.microsoft.com/office/drawing/2014/main" id="{63A942B7-048B-66A4-83B8-8FD107193933}"/>
             </a:ext>
           </a:extLst>
         </p:cNvPr>
@@ -4329,7 +4001,7 @@
           <p:cNvPr id="3" name="Subtitle 2">
             <a:extLst>
               <a:ext uri="{FF2B5EF4-FFF2-40B4-BE49-F238E27FC236}">
-                <a16:creationId xmlns:a16="http://schemas.microsoft.com/office/drawing/2014/main" id="{4357661B-3091-0E01-24FD-4DA1D80815B0}"/>
+                <a16:creationId xmlns:a16="http://schemas.microsoft.com/office/drawing/2014/main" id="{E98A517A-BB0F-4CC6-0F2F-56379A3668C6}"/>
               </a:ext>
             </a:extLst>
           </p:cNvPr>
@@ -4342,8 +4014,8 @@
         </p:nvSpPr>
         <p:spPr>
           <a:xfrm>
-            <a:off x="682831" y="497702"/>
-            <a:ext cx="10826338" cy="5862596"/>
+            <a:off x="84221" y="213360"/>
+            <a:ext cx="8891337" cy="6416040"/>
           </a:xfrm>
         </p:spPr>
         <p:txBody>
@@ -4369,7 +4041,19 @@
                 <a:latin typeface="Avenir Medium" panose="02000503020000020003" pitchFamily="2" charset="0"/>
                 <a:ea typeface="Bodoni Ornaments" pitchFamily="2" charset="0"/>
               </a:rPr>
-              <a:t>He welcomes the weakest, </a:t>
+              <a:t>Praise the Lord,</a:t>
+            </a:r>
+          </a:p>
+          <a:p>
+            <a:r>
+              <a:rPr lang="en-US" sz="4400" dirty="0">
+                <a:solidFill>
+                  <a:schemeClr val="bg1"/>
+                </a:solidFill>
+                <a:latin typeface="Avenir Medium" panose="02000503020000020003" pitchFamily="2" charset="0"/>
+                <a:ea typeface="Bodoni Ornaments" pitchFamily="2" charset="0"/>
+              </a:rPr>
+              <a:t>His mercy is more</a:t>
             </a:r>
           </a:p>
           <a:p>
@@ -4390,7 +4074,19 @@
                 <a:latin typeface="Avenir Medium" panose="02000503020000020003" pitchFamily="2" charset="0"/>
                 <a:ea typeface="Bodoni Ornaments" pitchFamily="2" charset="0"/>
               </a:rPr>
-              <a:t>the vilest, the poor</a:t>
+              <a:t>Stronger than darkness, </a:t>
+            </a:r>
+          </a:p>
+          <a:p>
+            <a:r>
+              <a:rPr lang="en-US" sz="4400" dirty="0">
+                <a:solidFill>
+                  <a:schemeClr val="bg1"/>
+                </a:solidFill>
+                <a:latin typeface="Avenir Medium" panose="02000503020000020003" pitchFamily="2" charset="0"/>
+                <a:ea typeface="Bodoni Ornaments" pitchFamily="2" charset="0"/>
+              </a:rPr>
+              <a:t>new every morn</a:t>
             </a:r>
           </a:p>
           <a:p>
@@ -4415,6 +4111,18 @@
             </a:r>
           </a:p>
           <a:p>
+            <a:r>
+              <a:rPr lang="en-US" sz="4400" dirty="0">
+                <a:solidFill>
+                  <a:schemeClr val="bg1"/>
+                </a:solidFill>
+                <a:latin typeface="Avenir Medium" panose="02000503020000020003" pitchFamily="2" charset="0"/>
+                <a:ea typeface="Bodoni Ornaments" pitchFamily="2" charset="0"/>
+              </a:rPr>
+              <a:t>His mercy is more</a:t>
+            </a:r>
+          </a:p>
+          <a:p>
             <a:endParaRPr lang="en-US" sz="4400" dirty="0">
               <a:solidFill>
                 <a:schemeClr val="bg1"/>
@@ -4424,23 +4132,29 @@
             </a:endParaRPr>
           </a:p>
           <a:p>
-            <a:r>
-              <a:rPr lang="en-US" sz="4400" dirty="0">
-                <a:solidFill>
-                  <a:schemeClr val="bg1"/>
-                </a:solidFill>
-                <a:latin typeface="Avenir Medium" panose="02000503020000020003" pitchFamily="2" charset="0"/>
-                <a:ea typeface="Bodoni Ornaments" pitchFamily="2" charset="0"/>
-              </a:rPr>
-              <a:t>His mercy is more</a:t>
-            </a:r>
+            <a:endParaRPr lang="en-US" sz="4400" dirty="0">
+              <a:solidFill>
+                <a:schemeClr val="bg1"/>
+              </a:solidFill>
+              <a:latin typeface="Avenir Medium" panose="02000503020000020003" pitchFamily="2" charset="0"/>
+              <a:ea typeface="Bodoni Ornaments" pitchFamily="2" charset="0"/>
+            </a:endParaRPr>
+          </a:p>
+          <a:p>
+            <a:endParaRPr lang="en-US" sz="4400" dirty="0">
+              <a:solidFill>
+                <a:schemeClr val="bg1"/>
+              </a:solidFill>
+              <a:latin typeface="Avenir Medium" panose="02000503020000020003" pitchFamily="2" charset="0"/>
+              <a:ea typeface="Bodoni Ornaments" pitchFamily="2" charset="0"/>
+            </a:endParaRPr>
           </a:p>
         </p:txBody>
       </p:sp>
     </p:spTree>
     <p:extLst>
       <p:ext uri="{BB962C8B-B14F-4D97-AF65-F5344CB8AC3E}">
-        <p14:creationId xmlns:p14="http://schemas.microsoft.com/office/powerpoint/2010/main" val="1992958983"/>
+        <p14:creationId xmlns:p14="http://schemas.microsoft.com/office/powerpoint/2010/main" val="2918366120"/>
       </p:ext>
     </p:extLst>
   </p:cSld>
@@ -4456,7 +4170,7 @@
     <p:bg>
       <p:bgPr>
         <a:solidFill>
-          <a:schemeClr val="accent1"/>
+          <a:schemeClr val="tx1"/>
         </a:solidFill>
         <a:effectLst/>
       </p:bgPr>
@@ -4466,7 +4180,7 @@
         <p:cNvPr id="1" name="">
           <a:extLst>
             <a:ext uri="{FF2B5EF4-FFF2-40B4-BE49-F238E27FC236}">
-              <a16:creationId xmlns:a16="http://schemas.microsoft.com/office/drawing/2014/main" id="{8DB28804-0296-2F6C-62C2-18A0239C9107}"/>
+              <a16:creationId xmlns:a16="http://schemas.microsoft.com/office/drawing/2014/main" id="{A783A98D-D0B9-D960-1235-F74B6EB224AF}"/>
             </a:ext>
           </a:extLst>
         </p:cNvPr>
@@ -4486,7 +4200,7 @@
           <p:cNvPr id="3" name="Subtitle 2">
             <a:extLst>
               <a:ext uri="{FF2B5EF4-FFF2-40B4-BE49-F238E27FC236}">
-                <a16:creationId xmlns:a16="http://schemas.microsoft.com/office/drawing/2014/main" id="{5813D3C6-E285-880B-ACB9-52B26040EE65}"/>
+                <a16:creationId xmlns:a16="http://schemas.microsoft.com/office/drawing/2014/main" id="{44A0ED31-74E0-F379-5957-AFDB3FA1A621}"/>
               </a:ext>
             </a:extLst>
           </p:cNvPr>
@@ -4499,8 +4213,8 @@
         </p:nvSpPr>
         <p:spPr>
           <a:xfrm>
-            <a:off x="682831" y="497702"/>
-            <a:ext cx="10826338" cy="5862596"/>
+            <a:off x="84221" y="213360"/>
+            <a:ext cx="8891337" cy="6416040"/>
           </a:xfrm>
         </p:spPr>
         <p:txBody>
@@ -4526,7 +4240,7 @@
                 <a:latin typeface="Avenir Medium" panose="02000503020000020003" pitchFamily="2" charset="0"/>
                 <a:ea typeface="Bodoni Ornaments" pitchFamily="2" charset="0"/>
               </a:rPr>
-              <a:t>What riches of kindness </a:t>
+              <a:t>What patience would wait as we constantly roam</a:t>
             </a:r>
           </a:p>
           <a:p>
@@ -4547,7 +4261,19 @@
                 <a:latin typeface="Avenir Medium" panose="02000503020000020003" pitchFamily="2" charset="0"/>
                 <a:ea typeface="Bodoni Ornaments" pitchFamily="2" charset="0"/>
               </a:rPr>
-              <a:t>He lavished on us</a:t>
+              <a:t>What Father so tender </a:t>
+            </a:r>
+          </a:p>
+          <a:p>
+            <a:r>
+              <a:rPr lang="en-US" sz="4400" dirty="0">
+                <a:solidFill>
+                  <a:schemeClr val="bg1"/>
+                </a:solidFill>
+                <a:latin typeface="Avenir Medium" panose="02000503020000020003" pitchFamily="2" charset="0"/>
+                <a:ea typeface="Bodoni Ornaments" pitchFamily="2" charset="0"/>
+              </a:rPr>
+              <a:t>is calling us home</a:t>
             </a:r>
           </a:p>
           <a:p>
@@ -4559,45 +4285,12 @@
               <a:ea typeface="Bodoni Ornaments" pitchFamily="2" charset="0"/>
             </a:endParaRPr>
           </a:p>
-          <a:p>
-            <a:r>
-              <a:rPr lang="en-US" sz="4400" dirty="0">
-                <a:solidFill>
-                  <a:schemeClr val="bg1"/>
-                </a:solidFill>
-                <a:latin typeface="Avenir Medium" panose="02000503020000020003" pitchFamily="2" charset="0"/>
-                <a:ea typeface="Bodoni Ornaments" pitchFamily="2" charset="0"/>
-              </a:rPr>
-              <a:t>His blood was the payment, </a:t>
-            </a:r>
-          </a:p>
-          <a:p>
-            <a:endParaRPr lang="en-US" sz="4400" dirty="0">
-              <a:solidFill>
-                <a:schemeClr val="bg1"/>
-              </a:solidFill>
-              <a:latin typeface="Avenir Medium" panose="02000503020000020003" pitchFamily="2" charset="0"/>
-              <a:ea typeface="Bodoni Ornaments" pitchFamily="2" charset="0"/>
-            </a:endParaRPr>
-          </a:p>
-          <a:p>
-            <a:r>
-              <a:rPr lang="en-US" sz="4400" dirty="0">
-                <a:solidFill>
-                  <a:schemeClr val="bg1"/>
-                </a:solidFill>
-                <a:latin typeface="Avenir Medium" panose="02000503020000020003" pitchFamily="2" charset="0"/>
-                <a:ea typeface="Bodoni Ornaments" pitchFamily="2" charset="0"/>
-              </a:rPr>
-              <a:t>His life was the cost</a:t>
-            </a:r>
-          </a:p>
         </p:txBody>
       </p:sp>
     </p:spTree>
     <p:extLst>
       <p:ext uri="{BB962C8B-B14F-4D97-AF65-F5344CB8AC3E}">
-        <p14:creationId xmlns:p14="http://schemas.microsoft.com/office/powerpoint/2010/main" val="1157592653"/>
+        <p14:creationId xmlns:p14="http://schemas.microsoft.com/office/powerpoint/2010/main" val="4197806785"/>
       </p:ext>
     </p:extLst>
   </p:cSld>
@@ -4613,7 +4306,7 @@
     <p:bg>
       <p:bgPr>
         <a:solidFill>
-          <a:schemeClr val="accent1"/>
+          <a:schemeClr val="tx1"/>
         </a:solidFill>
         <a:effectLst/>
       </p:bgPr>
@@ -4623,7 +4316,7 @@
         <p:cNvPr id="1" name="">
           <a:extLst>
             <a:ext uri="{FF2B5EF4-FFF2-40B4-BE49-F238E27FC236}">
-              <a16:creationId xmlns:a16="http://schemas.microsoft.com/office/drawing/2014/main" id="{2FE6B65D-96F1-5B6D-9D9A-933A4AAB94A5}"/>
+              <a16:creationId xmlns:a16="http://schemas.microsoft.com/office/drawing/2014/main" id="{5620B8B3-FF34-E99C-D5CC-C97B7EBA1FB4}"/>
             </a:ext>
           </a:extLst>
         </p:cNvPr>
@@ -4643,7 +4336,7 @@
           <p:cNvPr id="3" name="Subtitle 2">
             <a:extLst>
               <a:ext uri="{FF2B5EF4-FFF2-40B4-BE49-F238E27FC236}">
-                <a16:creationId xmlns:a16="http://schemas.microsoft.com/office/drawing/2014/main" id="{B27DBBAA-2033-906F-4C36-5619AE08FF31}"/>
+                <a16:creationId xmlns:a16="http://schemas.microsoft.com/office/drawing/2014/main" id="{4305550C-EE96-53CE-8827-C61B7C303B5C}"/>
               </a:ext>
             </a:extLst>
           </p:cNvPr>
@@ -4656,8 +4349,8 @@
         </p:nvSpPr>
         <p:spPr>
           <a:xfrm>
-            <a:off x="682831" y="497702"/>
-            <a:ext cx="10826338" cy="5862596"/>
+            <a:off x="84221" y="213360"/>
+            <a:ext cx="8891337" cy="6416040"/>
           </a:xfrm>
         </p:spPr>
         <p:txBody>
@@ -4683,7 +4376,19 @@
                 <a:latin typeface="Avenir Medium" panose="02000503020000020003" pitchFamily="2" charset="0"/>
                 <a:ea typeface="Bodoni Ornaments" pitchFamily="2" charset="0"/>
               </a:rPr>
-              <a:t>We stood 'neath a debt </a:t>
+              <a:t>He welcomes the weakest, </a:t>
+            </a:r>
+          </a:p>
+          <a:p>
+            <a:r>
+              <a:rPr lang="en-US" sz="4400" dirty="0">
+                <a:solidFill>
+                  <a:schemeClr val="bg1"/>
+                </a:solidFill>
+                <a:latin typeface="Avenir Medium" panose="02000503020000020003" pitchFamily="2" charset="0"/>
+                <a:ea typeface="Bodoni Ornaments" pitchFamily="2" charset="0"/>
+              </a:rPr>
+              <a:t>the vilest, the poor</a:t>
             </a:r>
           </a:p>
           <a:p>
@@ -4704,7 +4409,19 @@
                 <a:latin typeface="Avenir Medium" panose="02000503020000020003" pitchFamily="2" charset="0"/>
                 <a:ea typeface="Bodoni Ornaments" pitchFamily="2" charset="0"/>
               </a:rPr>
-              <a:t>we could never afford</a:t>
+              <a:t>Our sins they are many, </a:t>
+            </a:r>
+          </a:p>
+          <a:p>
+            <a:r>
+              <a:rPr lang="en-US" sz="4400" dirty="0">
+                <a:solidFill>
+                  <a:schemeClr val="bg1"/>
+                </a:solidFill>
+                <a:latin typeface="Avenir Medium" panose="02000503020000020003" pitchFamily="2" charset="0"/>
+                <a:ea typeface="Bodoni Ornaments" pitchFamily="2" charset="0"/>
+              </a:rPr>
+              <a:t>His mercy is more</a:t>
             </a:r>
           </a:p>
           <a:p>
@@ -4716,45 +4433,12 @@
               <a:ea typeface="Bodoni Ornaments" pitchFamily="2" charset="0"/>
             </a:endParaRPr>
           </a:p>
-          <a:p>
-            <a:r>
-              <a:rPr lang="en-US" sz="4400" dirty="0">
-                <a:solidFill>
-                  <a:schemeClr val="bg1"/>
-                </a:solidFill>
-                <a:latin typeface="Avenir Medium" panose="02000503020000020003" pitchFamily="2" charset="0"/>
-                <a:ea typeface="Bodoni Ornaments" pitchFamily="2" charset="0"/>
-              </a:rPr>
-              <a:t>Our sins they are many, </a:t>
-            </a:r>
-          </a:p>
-          <a:p>
-            <a:endParaRPr lang="en-US" sz="4400" dirty="0">
-              <a:solidFill>
-                <a:schemeClr val="bg1"/>
-              </a:solidFill>
-              <a:latin typeface="Avenir Medium" panose="02000503020000020003" pitchFamily="2" charset="0"/>
-              <a:ea typeface="Bodoni Ornaments" pitchFamily="2" charset="0"/>
-            </a:endParaRPr>
-          </a:p>
-          <a:p>
-            <a:r>
-              <a:rPr lang="en-US" sz="4400" dirty="0">
-                <a:solidFill>
-                  <a:schemeClr val="bg1"/>
-                </a:solidFill>
-                <a:latin typeface="Avenir Medium" panose="02000503020000020003" pitchFamily="2" charset="0"/>
-                <a:ea typeface="Bodoni Ornaments" pitchFamily="2" charset="0"/>
-              </a:rPr>
-              <a:t>His mercy is more</a:t>
-            </a:r>
-          </a:p>
         </p:txBody>
       </p:sp>
     </p:spTree>
     <p:extLst>
       <p:ext uri="{BB962C8B-B14F-4D97-AF65-F5344CB8AC3E}">
-        <p14:creationId xmlns:p14="http://schemas.microsoft.com/office/powerpoint/2010/main" val="1169012159"/>
+        <p14:creationId xmlns:p14="http://schemas.microsoft.com/office/powerpoint/2010/main" val="834857670"/>
       </p:ext>
     </p:extLst>
   </p:cSld>
@@ -4770,7 +4454,7 @@
     <p:bg>
       <p:bgPr>
         <a:solidFill>
-          <a:srgbClr val="7030A0"/>
+          <a:schemeClr val="tx1"/>
         </a:solidFill>
         <a:effectLst/>
       </p:bgPr>
@@ -4780,7 +4464,7 @@
         <p:cNvPr id="1" name="">
           <a:extLst>
             <a:ext uri="{FF2B5EF4-FFF2-40B4-BE49-F238E27FC236}">
-              <a16:creationId xmlns:a16="http://schemas.microsoft.com/office/drawing/2014/main" id="{C2EA5D3B-5A31-5698-7DF9-54DDEFAC9173}"/>
+              <a16:creationId xmlns:a16="http://schemas.microsoft.com/office/drawing/2014/main" id="{66E0F6E0-FEFA-9F57-1DF6-F215E44678D8}"/>
             </a:ext>
           </a:extLst>
         </p:cNvPr>
@@ -4800,7 +4484,7 @@
           <p:cNvPr id="3" name="Subtitle 2">
             <a:extLst>
               <a:ext uri="{FF2B5EF4-FFF2-40B4-BE49-F238E27FC236}">
-                <a16:creationId xmlns:a16="http://schemas.microsoft.com/office/drawing/2014/main" id="{8198300B-F415-10BF-A959-7056D317E1FC}"/>
+                <a16:creationId xmlns:a16="http://schemas.microsoft.com/office/drawing/2014/main" id="{5BD44CC7-EBEF-5573-A5E0-482C171670F6}"/>
               </a:ext>
             </a:extLst>
           </p:cNvPr>
@@ -4813,8 +4497,8 @@
         </p:nvSpPr>
         <p:spPr>
           <a:xfrm>
-            <a:off x="682831" y="497702"/>
-            <a:ext cx="10826338" cy="5862596"/>
+            <a:off x="84221" y="213360"/>
+            <a:ext cx="8891337" cy="6416040"/>
           </a:xfrm>
         </p:spPr>
         <p:txBody>
@@ -4840,9 +4524,11 @@
                 <a:latin typeface="Avenir Medium" panose="02000503020000020003" pitchFamily="2" charset="0"/>
                 <a:ea typeface="Bodoni Ornaments" pitchFamily="2" charset="0"/>
               </a:rPr>
-              <a:t>Praise the Lord, </a:t>
-            </a:r>
-            <a:br>
+              <a:t>Praise the Lord,</a:t>
+            </a:r>
+          </a:p>
+          <a:p>
+            <a:r>
               <a:rPr lang="en-US" sz="4400" dirty="0">
                 <a:solidFill>
                   <a:schemeClr val="bg1"/>
@@ -4850,7 +4536,10 @@
                 <a:latin typeface="Avenir Medium" panose="02000503020000020003" pitchFamily="2" charset="0"/>
                 <a:ea typeface="Bodoni Ornaments" pitchFamily="2" charset="0"/>
               </a:rPr>
-            </a:br>
+              <a:t>His mercy is more</a:t>
+            </a:r>
+          </a:p>
+          <a:p>
             <a:endParaRPr lang="en-US" sz="4400" dirty="0">
               <a:solidFill>
                 <a:schemeClr val="bg1"/>
@@ -4868,7 +4557,19 @@
                 <a:latin typeface="Avenir Medium" panose="02000503020000020003" pitchFamily="2" charset="0"/>
                 <a:ea typeface="Bodoni Ornaments" pitchFamily="2" charset="0"/>
               </a:rPr>
-              <a:t>His mercy is more</a:t>
+              <a:t>Stronger than darkness, </a:t>
+            </a:r>
+          </a:p>
+          <a:p>
+            <a:r>
+              <a:rPr lang="en-US" sz="4400" dirty="0">
+                <a:solidFill>
+                  <a:schemeClr val="bg1"/>
+                </a:solidFill>
+                <a:latin typeface="Avenir Medium" panose="02000503020000020003" pitchFamily="2" charset="0"/>
+                <a:ea typeface="Bodoni Ornaments" pitchFamily="2" charset="0"/>
+              </a:rPr>
+              <a:t>new every morn</a:t>
             </a:r>
           </a:p>
           <a:p>
@@ -4889,7 +4590,19 @@
                 <a:latin typeface="Avenir Medium" panose="02000503020000020003" pitchFamily="2" charset="0"/>
                 <a:ea typeface="Bodoni Ornaments" pitchFamily="2" charset="0"/>
               </a:rPr>
-              <a:t>Stronger than darkness, </a:t>
+              <a:t>Our sins they are many, </a:t>
+            </a:r>
+          </a:p>
+          <a:p>
+            <a:r>
+              <a:rPr lang="en-US" sz="4400" dirty="0">
+                <a:solidFill>
+                  <a:schemeClr val="bg1"/>
+                </a:solidFill>
+                <a:latin typeface="Avenir Medium" panose="02000503020000020003" pitchFamily="2" charset="0"/>
+                <a:ea typeface="Bodoni Ornaments" pitchFamily="2" charset="0"/>
+              </a:rPr>
+              <a:t>His mercy is more</a:t>
             </a:r>
           </a:p>
           <a:p>
@@ -4902,23 +4615,29 @@
             </a:endParaRPr>
           </a:p>
           <a:p>
-            <a:r>
-              <a:rPr lang="en-US" sz="4400" dirty="0">
-                <a:solidFill>
-                  <a:schemeClr val="bg1"/>
-                </a:solidFill>
-                <a:latin typeface="Avenir Medium" panose="02000503020000020003" pitchFamily="2" charset="0"/>
-                <a:ea typeface="Bodoni Ornaments" pitchFamily="2" charset="0"/>
-              </a:rPr>
-              <a:t>new every morn</a:t>
-            </a:r>
+            <a:endParaRPr lang="en-US" sz="4400" dirty="0">
+              <a:solidFill>
+                <a:schemeClr val="bg1"/>
+              </a:solidFill>
+              <a:latin typeface="Avenir Medium" panose="02000503020000020003" pitchFamily="2" charset="0"/>
+              <a:ea typeface="Bodoni Ornaments" pitchFamily="2" charset="0"/>
+            </a:endParaRPr>
+          </a:p>
+          <a:p>
+            <a:endParaRPr lang="en-US" sz="4400" dirty="0">
+              <a:solidFill>
+                <a:schemeClr val="bg1"/>
+              </a:solidFill>
+              <a:latin typeface="Avenir Medium" panose="02000503020000020003" pitchFamily="2" charset="0"/>
+              <a:ea typeface="Bodoni Ornaments" pitchFamily="2" charset="0"/>
+            </a:endParaRPr>
           </a:p>
         </p:txBody>
       </p:sp>
     </p:spTree>
     <p:extLst>
       <p:ext uri="{BB962C8B-B14F-4D97-AF65-F5344CB8AC3E}">
-        <p14:creationId xmlns:p14="http://schemas.microsoft.com/office/powerpoint/2010/main" val="3938360840"/>
+        <p14:creationId xmlns:p14="http://schemas.microsoft.com/office/powerpoint/2010/main" val="1612110456"/>
       </p:ext>
     </p:extLst>
   </p:cSld>
@@ -4934,7 +4653,7 @@
     <p:bg>
       <p:bgPr>
         <a:solidFill>
-          <a:srgbClr val="7030A0"/>
+          <a:schemeClr val="tx1"/>
         </a:solidFill>
         <a:effectLst/>
       </p:bgPr>
@@ -4944,7 +4663,7 @@
         <p:cNvPr id="1" name="">
           <a:extLst>
             <a:ext uri="{FF2B5EF4-FFF2-40B4-BE49-F238E27FC236}">
-              <a16:creationId xmlns:a16="http://schemas.microsoft.com/office/drawing/2014/main" id="{9877808D-1E46-8C81-5D76-B14D1413F0AC}"/>
+              <a16:creationId xmlns:a16="http://schemas.microsoft.com/office/drawing/2014/main" id="{0CD036F9-AB35-4E75-9880-ADCDD5BD4FAA}"/>
             </a:ext>
           </a:extLst>
         </p:cNvPr>
@@ -4964,7 +4683,7 @@
           <p:cNvPr id="3" name="Subtitle 2">
             <a:extLst>
               <a:ext uri="{FF2B5EF4-FFF2-40B4-BE49-F238E27FC236}">
-                <a16:creationId xmlns:a16="http://schemas.microsoft.com/office/drawing/2014/main" id="{06E42776-788D-F826-6994-B48B153D96FD}"/>
+                <a16:creationId xmlns:a16="http://schemas.microsoft.com/office/drawing/2014/main" id="{62E7E448-C72E-8A6E-E063-E00AE74682C4}"/>
               </a:ext>
             </a:extLst>
           </p:cNvPr>
@@ -4977,8 +4696,8 @@
         </p:nvSpPr>
         <p:spPr>
           <a:xfrm>
-            <a:off x="682831" y="497702"/>
-            <a:ext cx="10826338" cy="5862596"/>
+            <a:off x="84221" y="213360"/>
+            <a:ext cx="8891337" cy="6416040"/>
           </a:xfrm>
         </p:spPr>
         <p:txBody>
@@ -5004,7 +4723,7 @@
                 <a:latin typeface="Avenir Medium" panose="02000503020000020003" pitchFamily="2" charset="0"/>
                 <a:ea typeface="Bodoni Ornaments" pitchFamily="2" charset="0"/>
               </a:rPr>
-              <a:t>Our sins they are many, </a:t>
+              <a:t>What riches of kindness </a:t>
             </a:r>
           </a:p>
           <a:p>
@@ -5016,7 +4735,7 @@
                 <a:latin typeface="Avenir Medium" panose="02000503020000020003" pitchFamily="2" charset="0"/>
                 <a:ea typeface="Bodoni Ornaments" pitchFamily="2" charset="0"/>
               </a:rPr>
-              <a:t>His mercy is more</a:t>
+              <a:t>He lavished on us</a:t>
             </a:r>
           </a:p>
           <a:p>
@@ -5037,7 +4756,7 @@
                 <a:latin typeface="Avenir Medium" panose="02000503020000020003" pitchFamily="2" charset="0"/>
                 <a:ea typeface="Bodoni Ornaments" pitchFamily="2" charset="0"/>
               </a:rPr>
-              <a:t>Our sins they are many, </a:t>
+              <a:t>His blood was the payment, </a:t>
             </a:r>
           </a:p>
           <a:p>
@@ -5049,7 +4768,7 @@
                 <a:latin typeface="Avenir Medium" panose="02000503020000020003" pitchFamily="2" charset="0"/>
                 <a:ea typeface="Bodoni Ornaments" pitchFamily="2" charset="0"/>
               </a:rPr>
-              <a:t>His mercy is more</a:t>
+              <a:t>His life was the cost</a:t>
             </a:r>
           </a:p>
           <a:p>
@@ -5066,7 +4785,7 @@
     </p:spTree>
     <p:extLst>
       <p:ext uri="{BB962C8B-B14F-4D97-AF65-F5344CB8AC3E}">
-        <p14:creationId xmlns:p14="http://schemas.microsoft.com/office/powerpoint/2010/main" val="404716244"/>
+        <p14:creationId xmlns:p14="http://schemas.microsoft.com/office/powerpoint/2010/main" val="3607307"/>
       </p:ext>
     </p:extLst>
   </p:cSld>
@@ -5079,7 +4798,7 @@
 <file path=ppt/theme/theme1.xml><?xml version="1.0" encoding="utf-8"?>
 <a:theme xmlns:a="http://schemas.openxmlformats.org/drawingml/2006/main" name="Office Theme">
   <a:themeElements>
-    <a:clrScheme name="Office">
+    <a:clrScheme name="Office Theme">
       <a:dk1>
         <a:sysClr val="windowText" lastClr="000000"/>
       </a:dk1>
@@ -5117,7 +4836,7 @@
         <a:srgbClr val="96607D"/>
       </a:folHlink>
     </a:clrScheme>
-    <a:fontScheme name="Office">
+    <a:fontScheme name="Office Theme">
       <a:majorFont>
         <a:latin typeface="Aptos Display" panose="02110004020202020204"/>
         <a:ea typeface=""/>
@@ -5223,7 +4942,7 @@
         <a:font script="Tfng" typeface="Ebrima"/>
       </a:minorFont>
     </a:fontScheme>
-    <a:fmtScheme name="Office">
+    <a:fmtScheme name="Office Theme">
       <a:fillStyleLst>
         <a:solidFill>
           <a:schemeClr val="phClr"/>
